--- a/실습5/실습5_day3_발표.pptx
+++ b/실습5/실습5_day3_발표.pptx
@@ -18,6 +18,8 @@
     <p:sldId id="266" r:id="rId17"/>
     <p:sldId id="267" r:id="rId18"/>
     <p:sldId id="268" r:id="rId19"/>
+    <p:sldId id="269" r:id="rId20"/>
+    <p:sldId id="270" r:id="rId21"/>
   </p:sldIdLst>
   <p:sldSz cx="12191695" cy="6858000" type="screen4x3"/>
   <p:notesSz cx="6858000" cy="9144000"/>
@@ -3429,7 +3431,7 @@
                 </a:solidFill>
                 <a:latin typeface="맑은 고딕"/>
               </a:rPr>
-              <a:t>27.50 dB / 0.8400</a:t>
+              <a:t>29.25 dB / 0.8777</a:t>
             </a:r>
           </a:p>
         </p:txBody>
@@ -3555,46 +3557,7 @@
                 </a:solidFill>
                 <a:latin typeface="맑은 고딕"/>
               </a:rPr>
-              <a:t>+2.49 dB</a:t>
-            </a:r>
-          </a:p>
-        </p:txBody>
-      </p:sp>
-      <p:sp>
-        <p:nvSpPr>
-          <p:cNvPr id="13" name="TextBox 12"/>
-          <p:cNvSpPr txBox="1"/>
-          <p:nvPr/>
-        </p:nvSpPr>
-        <p:spPr>
-          <a:xfrm>
-            <a:off x="640080" y="6355080"/>
-            <a:ext cx="10972800" cy="274320"/>
-          </a:xfrm>
-          <a:prstGeom prst="rect">
-            <a:avLst/>
-          </a:prstGeom>
-          <a:noFill/>
-        </p:spPr>
-        <p:txBody>
-          <a:bodyPr wrap="square" anchor="t">
-            <a:spAutoFit/>
-          </a:bodyPr>
-          <a:lstStyle/>
-          <a:p>
-            <a:pPr algn="l">
-              <a:lnSpc>
-                <a:spcPct val="125000"/>
-              </a:lnSpc>
-            </a:pPr>
-            <a:r>
-              <a:rPr sz="1000" b="0">
-                <a:solidFill>
-                  <a:srgbClr val="66756F"/>
-                </a:solidFill>
-                <a:latin typeface="Consolas"/>
-              </a:rPr>
-              <a:t>빌드 확인</a:t>
+              <a:t>+4.24 dB</a:t>
             </a:r>
           </a:p>
         </p:txBody>
@@ -4104,7 +4067,7 @@
                 </a:solidFill>
                 <a:latin typeface="Consolas"/>
               </a:rPr>
-              <a:t>요구사항 4</a:t>
+              <a:t>제출값</a:t>
             </a:r>
           </a:p>
         </p:txBody>
@@ -4143,7 +4106,7 @@
                 </a:solidFill>
                 <a:latin typeface="맑은 고딕"/>
               </a:rPr>
-              <a:t>label-free — 정답을 한 장도 쓰지 않고</a:t>
+              <a:t>최종 결과</a:t>
             </a:r>
           </a:p>
         </p:txBody>
@@ -4182,7 +4145,7 @@
                 </a:solidFill>
                 <a:latin typeface="맑은 고딕"/>
               </a:rPr>
-              <a:t>보너스 점수</a:t>
+              <a:t>test_deconv_noise 100장 · 4× self-ensemble</a:t>
             </a:r>
           </a:p>
         </p:txBody>
@@ -4231,16 +4194,1097 @@
           </a:p>
         </p:txBody>
       </p:sp>
-      <p:sp>
-        <p:nvSpPr>
-          <p:cNvPr id="6" name="Rounded Rectangle 5"/>
+      <p:graphicFrame>
+        <p:nvGraphicFramePr>
+          <p:cNvPr id="6" name="Table 5"/>
+          <p:cNvGraphicFramePr>
+            <a:graphicFrameLocks noGrp="1"/>
+          </p:cNvGraphicFramePr>
+          <p:nvPr/>
+        </p:nvGraphicFramePr>
+        <p:xfrm>
+          <a:off x="822960" y="1691640"/>
+          <a:ext cx="10515599" cy="1645920"/>
+        </p:xfrm>
+        <a:graphic>
+          <a:graphicData uri="http://schemas.openxmlformats.org/drawingml/2006/table">
+            <a:tbl>
+              <a:tblPr firstRow="1" bandRow="1">
+                <a:tableStyleId>{5C22544A-7EE6-4342-B048-85BDC9FD1C3A}</a:tableStyleId>
+              </a:tblPr>
+              <a:tblGrid>
+                <a:gridCol w="4754880"/>
+                <a:gridCol w="1828800"/>
+                <a:gridCol w="1828800"/>
+                <a:gridCol w="2103119"/>
+              </a:tblGrid>
+              <a:tr h="274320">
+                <a:tc>
+                  <a:txBody>
+                    <a:bodyPr/>
+                    <a:lstStyle/>
+                    <a:p>
+                      <a:pPr algn="l"/>
+                    </a:p>
+                  </a:txBody>
+                  <a:tcPr marL="82296" marR="82296" marT="27432" marB="27432" anchor="ctr">
+                    <a:solidFill>
+                      <a:srgbClr val="DCEDE8"/>
+                    </a:solidFill>
+                  </a:tcPr>
+                </a:tc>
+                <a:tc>
+                  <a:txBody>
+                    <a:bodyPr/>
+                    <a:lstStyle/>
+                    <a:p>
+                      <a:pPr algn="r"/>
+                      <a:r>
+                        <a:rPr sz="1200" b="1">
+                          <a:solidFill>
+                            <a:srgbClr val="131A19"/>
+                          </a:solidFill>
+                          <a:latin typeface="Consolas"/>
+                        </a:rPr>
+                        <a:t>PSNR</a:t>
+                      </a:r>
+                    </a:p>
+                  </a:txBody>
+                  <a:tcPr marL="82296" marR="82296" marT="27432" marB="27432" anchor="ctr">
+                    <a:solidFill>
+                      <a:srgbClr val="DCEDE8"/>
+                    </a:solidFill>
+                  </a:tcPr>
+                </a:tc>
+                <a:tc>
+                  <a:txBody>
+                    <a:bodyPr/>
+                    <a:lstStyle/>
+                    <a:p>
+                      <a:pPr algn="r"/>
+                      <a:r>
+                        <a:rPr sz="1200" b="1">
+                          <a:solidFill>
+                            <a:srgbClr val="131A19"/>
+                          </a:solidFill>
+                          <a:latin typeface="Consolas"/>
+                        </a:rPr>
+                        <a:t>SSIM</a:t>
+                      </a:r>
+                    </a:p>
+                  </a:txBody>
+                  <a:tcPr marL="82296" marR="82296" marT="27432" marB="27432" anchor="ctr">
+                    <a:solidFill>
+                      <a:srgbClr val="DCEDE8"/>
+                    </a:solidFill>
+                  </a:tcPr>
+                </a:tc>
+                <a:tc>
+                  <a:txBody>
+                    <a:bodyPr/>
+                    <a:lstStyle/>
+                    <a:p>
+                      <a:pPr algn="r"/>
+                      <a:r>
+                        <a:rPr sz="1200" b="1">
+                          <a:solidFill>
+                            <a:srgbClr val="131A19"/>
+                          </a:solidFill>
+                          <a:latin typeface="Consolas"/>
+                        </a:rPr>
+                        <a:t>판정</a:t>
+                      </a:r>
+                    </a:p>
+                  </a:txBody>
+                  <a:tcPr marL="82296" marR="82296" marT="27432" marB="27432" anchor="ctr">
+                    <a:solidFill>
+                      <a:srgbClr val="DCEDE8"/>
+                    </a:solidFill>
+                  </a:tcPr>
+                </a:tc>
+              </a:tr>
+              <a:tr h="274320">
+                <a:tc>
+                  <a:txBody>
+                    <a:bodyPr/>
+                    <a:lstStyle/>
+                    <a:p>
+                      <a:pPr algn="l"/>
+                      <a:r>
+                        <a:rPr sz="1200" b="0">
+                          <a:solidFill>
+                            <a:srgbClr val="3C4947"/>
+                          </a:solidFill>
+                          <a:latin typeface="맑은 고딕"/>
+                        </a:rPr>
+                        <a:t>통과 기준</a:t>
+                      </a:r>
+                    </a:p>
+                  </a:txBody>
+                  <a:tcPr marL="82296" marR="82296" marT="27432" marB="27432" anchor="ctr">
+                    <a:solidFill>
+                      <a:srgbClr val="FFFFFF"/>
+                    </a:solidFill>
+                  </a:tcPr>
+                </a:tc>
+                <a:tc>
+                  <a:txBody>
+                    <a:bodyPr/>
+                    <a:lstStyle/>
+                    <a:p>
+                      <a:pPr algn="r"/>
+                      <a:r>
+                        <a:rPr sz="1200" b="0">
+                          <a:solidFill>
+                            <a:srgbClr val="3C4947"/>
+                          </a:solidFill>
+                          <a:latin typeface="Consolas"/>
+                        </a:rPr>
+                        <a:t>26</a:t>
+                      </a:r>
+                    </a:p>
+                  </a:txBody>
+                  <a:tcPr marL="82296" marR="82296" marT="27432" marB="27432" anchor="ctr">
+                    <a:solidFill>
+                      <a:srgbClr val="FFFFFF"/>
+                    </a:solidFill>
+                  </a:tcPr>
+                </a:tc>
+                <a:tc>
+                  <a:txBody>
+                    <a:bodyPr/>
+                    <a:lstStyle/>
+                    <a:p>
+                      <a:pPr algn="r"/>
+                      <a:r>
+                        <a:rPr sz="1200" b="0">
+                          <a:solidFill>
+                            <a:srgbClr val="3C4947"/>
+                          </a:solidFill>
+                          <a:latin typeface="Consolas"/>
+                        </a:rPr>
+                        <a:t>0.83</a:t>
+                      </a:r>
+                    </a:p>
+                  </a:txBody>
+                  <a:tcPr marL="82296" marR="82296" marT="27432" marB="27432" anchor="ctr">
+                    <a:solidFill>
+                      <a:srgbClr val="FFFFFF"/>
+                    </a:solidFill>
+                  </a:tcPr>
+                </a:tc>
+                <a:tc>
+                  <a:txBody>
+                    <a:bodyPr/>
+                    <a:lstStyle/>
+                    <a:p>
+                      <a:pPr algn="r"/>
+                      <a:r>
+                        <a:rPr sz="1200" b="0">
+                          <a:solidFill>
+                            <a:srgbClr val="3C4947"/>
+                          </a:solidFill>
+                          <a:latin typeface="Consolas"/>
+                        </a:rPr>
+                        <a:t>—</a:t>
+                      </a:r>
+                    </a:p>
+                  </a:txBody>
+                  <a:tcPr marL="82296" marR="82296" marT="27432" marB="27432" anchor="ctr">
+                    <a:solidFill>
+                      <a:srgbClr val="FFFFFF"/>
+                    </a:solidFill>
+                  </a:tcPr>
+                </a:tc>
+              </a:tr>
+              <a:tr h="274320">
+                <a:tc>
+                  <a:txBody>
+                    <a:bodyPr/>
+                    <a:lstStyle/>
+                    <a:p>
+                      <a:pPr algn="l"/>
+                      <a:r>
+                        <a:rPr sz="1200" b="0">
+                          <a:solidFill>
+                            <a:srgbClr val="3C4947"/>
+                          </a:solidFill>
+                          <a:latin typeface="맑은 고딕"/>
+                        </a:rPr>
+                        <a:t>입력 (blur + noise)</a:t>
+                      </a:r>
+                    </a:p>
+                  </a:txBody>
+                  <a:tcPr marL="82296" marR="82296" marT="27432" marB="27432" anchor="ctr">
+                    <a:solidFill>
+                      <a:srgbClr val="FFFFFF"/>
+                    </a:solidFill>
+                  </a:tcPr>
+                </a:tc>
+                <a:tc>
+                  <a:txBody>
+                    <a:bodyPr/>
+                    <a:lstStyle/>
+                    <a:p>
+                      <a:pPr algn="r"/>
+                      <a:r>
+                        <a:rPr sz="1200" b="0">
+                          <a:solidFill>
+                            <a:srgbClr val="3C4947"/>
+                          </a:solidFill>
+                          <a:latin typeface="Consolas"/>
+                        </a:rPr>
+                        <a:t>8.02</a:t>
+                      </a:r>
+                    </a:p>
+                  </a:txBody>
+                  <a:tcPr marL="82296" marR="82296" marT="27432" marB="27432" anchor="ctr">
+                    <a:solidFill>
+                      <a:srgbClr val="FFFFFF"/>
+                    </a:solidFill>
+                  </a:tcPr>
+                </a:tc>
+                <a:tc>
+                  <a:txBody>
+                    <a:bodyPr/>
+                    <a:lstStyle/>
+                    <a:p>
+                      <a:pPr algn="r"/>
+                      <a:r>
+                        <a:rPr sz="1200" b="0">
+                          <a:solidFill>
+                            <a:srgbClr val="3C4947"/>
+                          </a:solidFill>
+                          <a:latin typeface="Consolas"/>
+                        </a:rPr>
+                        <a:t>−0.0187</a:t>
+                      </a:r>
+                    </a:p>
+                  </a:txBody>
+                  <a:tcPr marL="82296" marR="82296" marT="27432" marB="27432" anchor="ctr">
+                    <a:solidFill>
+                      <a:srgbClr val="FFFFFF"/>
+                    </a:solidFill>
+                  </a:tcPr>
+                </a:tc>
+                <a:tc>
+                  <a:txBody>
+                    <a:bodyPr/>
+                    <a:lstStyle/>
+                    <a:p>
+                      <a:pPr algn="r"/>
+                      <a:r>
+                        <a:rPr sz="1200" b="0">
+                          <a:solidFill>
+                            <a:srgbClr val="3C4947"/>
+                          </a:solidFill>
+                          <a:latin typeface="Consolas"/>
+                        </a:rPr>
+                        <a:t>출발점</a:t>
+                      </a:r>
+                    </a:p>
+                  </a:txBody>
+                  <a:tcPr marL="82296" marR="82296" marT="27432" marB="27432" anchor="ctr">
+                    <a:solidFill>
+                      <a:srgbClr val="FFFFFF"/>
+                    </a:solidFill>
+                  </a:tcPr>
+                </a:tc>
+              </a:tr>
+              <a:tr h="274320">
+                <a:tc>
+                  <a:txBody>
+                    <a:bodyPr/>
+                    <a:lstStyle/>
+                    <a:p>
+                      <a:pPr algn="l"/>
+                      <a:r>
+                        <a:rPr sz="1200" b="0">
+                          <a:solidFill>
+                            <a:srgbClr val="3C4947"/>
+                          </a:solidFill>
+                          <a:latin typeface="맑은 고딕"/>
+                        </a:rPr>
+                        <a:t>배포 baseline (End2End U-Net)</a:t>
+                      </a:r>
+                    </a:p>
+                  </a:txBody>
+                  <a:tcPr marL="82296" marR="82296" marT="27432" marB="27432" anchor="ctr">
+                    <a:solidFill>
+                      <a:srgbClr val="FFFFFF"/>
+                    </a:solidFill>
+                  </a:tcPr>
+                </a:tc>
+                <a:tc>
+                  <a:txBody>
+                    <a:bodyPr/>
+                    <a:lstStyle/>
+                    <a:p>
+                      <a:pPr algn="r"/>
+                      <a:r>
+                        <a:rPr sz="1200" b="0">
+                          <a:solidFill>
+                            <a:srgbClr val="3C4947"/>
+                          </a:solidFill>
+                          <a:latin typeface="Consolas"/>
+                        </a:rPr>
+                        <a:t>25.01</a:t>
+                      </a:r>
+                    </a:p>
+                  </a:txBody>
+                  <a:tcPr marL="82296" marR="82296" marT="27432" marB="27432" anchor="ctr">
+                    <a:solidFill>
+                      <a:srgbClr val="FFFFFF"/>
+                    </a:solidFill>
+                  </a:tcPr>
+                </a:tc>
+                <a:tc>
+                  <a:txBody>
+                    <a:bodyPr/>
+                    <a:lstStyle/>
+                    <a:p>
+                      <a:pPr algn="r"/>
+                      <a:r>
+                        <a:rPr sz="1200" b="0">
+                          <a:solidFill>
+                            <a:srgbClr val="3C4947"/>
+                          </a:solidFill>
+                          <a:latin typeface="Consolas"/>
+                        </a:rPr>
+                        <a:t>0.8149</a:t>
+                      </a:r>
+                    </a:p>
+                  </a:txBody>
+                  <a:tcPr marL="82296" marR="82296" marT="27432" marB="27432" anchor="ctr">
+                    <a:solidFill>
+                      <a:srgbClr val="FFFFFF"/>
+                    </a:solidFill>
+                  </a:tcPr>
+                </a:tc>
+                <a:tc>
+                  <a:txBody>
+                    <a:bodyPr/>
+                    <a:lstStyle/>
+                    <a:p>
+                      <a:pPr algn="r"/>
+                      <a:r>
+                        <a:rPr sz="1200" b="0">
+                          <a:solidFill>
+                            <a:srgbClr val="3C4947"/>
+                          </a:solidFill>
+                          <a:latin typeface="Consolas"/>
+                        </a:rPr>
+                        <a:t>미달</a:t>
+                      </a:r>
+                    </a:p>
+                  </a:txBody>
+                  <a:tcPr marL="82296" marR="82296" marT="27432" marB="27432" anchor="ctr">
+                    <a:solidFill>
+                      <a:srgbClr val="FFFFFF"/>
+                    </a:solidFill>
+                  </a:tcPr>
+                </a:tc>
+              </a:tr>
+              <a:tr h="274320">
+                <a:tc>
+                  <a:txBody>
+                    <a:bodyPr/>
+                    <a:lstStyle/>
+                    <a:p>
+                      <a:pPr algn="l"/>
+                      <a:r>
+                        <a:rPr sz="1200" b="0">
+                          <a:solidFill>
+                            <a:srgbClr val="3C4947"/>
+                          </a:solidFill>
+                          <a:latin typeface="맑은 고딕"/>
+                        </a:rPr>
+                        <a:t>다른 조 (2-step + 4× SE)</a:t>
+                      </a:r>
+                    </a:p>
+                  </a:txBody>
+                  <a:tcPr marL="82296" marR="82296" marT="27432" marB="27432" anchor="ctr">
+                    <a:solidFill>
+                      <a:srgbClr val="FFFFFF"/>
+                    </a:solidFill>
+                  </a:tcPr>
+                </a:tc>
+                <a:tc>
+                  <a:txBody>
+                    <a:bodyPr/>
+                    <a:lstStyle/>
+                    <a:p>
+                      <a:pPr algn="r"/>
+                      <a:r>
+                        <a:rPr sz="1200" b="0">
+                          <a:solidFill>
+                            <a:srgbClr val="3C4947"/>
+                          </a:solidFill>
+                          <a:latin typeface="Consolas"/>
+                        </a:rPr>
+                        <a:t>26.73</a:t>
+                      </a:r>
+                    </a:p>
+                  </a:txBody>
+                  <a:tcPr marL="82296" marR="82296" marT="27432" marB="27432" anchor="ctr">
+                    <a:solidFill>
+                      <a:srgbClr val="FFFFFF"/>
+                    </a:solidFill>
+                  </a:tcPr>
+                </a:tc>
+                <a:tc>
+                  <a:txBody>
+                    <a:bodyPr/>
+                    <a:lstStyle/>
+                    <a:p>
+                      <a:pPr algn="r"/>
+                      <a:r>
+                        <a:rPr sz="1200" b="0">
+                          <a:solidFill>
+                            <a:srgbClr val="3C4947"/>
+                          </a:solidFill>
+                          <a:latin typeface="Consolas"/>
+                        </a:rPr>
+                        <a:t>0.8215</a:t>
+                      </a:r>
+                    </a:p>
+                  </a:txBody>
+                  <a:tcPr marL="82296" marR="82296" marT="27432" marB="27432" anchor="ctr">
+                    <a:solidFill>
+                      <a:srgbClr val="FFFFFF"/>
+                    </a:solidFill>
+                  </a:tcPr>
+                </a:tc>
+                <a:tc>
+                  <a:txBody>
+                    <a:bodyPr/>
+                    <a:lstStyle/>
+                    <a:p>
+                      <a:pPr algn="r"/>
+                      <a:r>
+                        <a:rPr sz="1200" b="0">
+                          <a:solidFill>
+                            <a:srgbClr val="3C4947"/>
+                          </a:solidFill>
+                          <a:latin typeface="Consolas"/>
+                        </a:rPr>
+                        <a:t>SSIM 미달</a:t>
+                      </a:r>
+                    </a:p>
+                  </a:txBody>
+                  <a:tcPr marL="82296" marR="82296" marT="27432" marB="27432" anchor="ctr">
+                    <a:solidFill>
+                      <a:srgbClr val="FFFFFF"/>
+                    </a:solidFill>
+                  </a:tcPr>
+                </a:tc>
+              </a:tr>
+              <a:tr h="274320">
+                <a:tc>
+                  <a:txBody>
+                    <a:bodyPr/>
+                    <a:lstStyle/>
+                    <a:p>
+                      <a:pPr algn="l"/>
+                      <a:r>
+                        <a:rPr sz="1200" b="1">
+                          <a:solidFill>
+                            <a:srgbClr val="131A19"/>
+                          </a:solidFill>
+                          <a:latin typeface="맑은 고딕"/>
+                        </a:rPr>
+                        <a:t>우리 (전개형 + σ + 4× SE)</a:t>
+                      </a:r>
+                    </a:p>
+                  </a:txBody>
+                  <a:tcPr marL="82296" marR="82296" marT="27432" marB="27432" anchor="ctr">
+                    <a:solidFill>
+                      <a:srgbClr val="ECF5F2"/>
+                    </a:solidFill>
+                  </a:tcPr>
+                </a:tc>
+                <a:tc>
+                  <a:txBody>
+                    <a:bodyPr/>
+                    <a:lstStyle/>
+                    <a:p>
+                      <a:pPr algn="r"/>
+                      <a:r>
+                        <a:rPr sz="1200" b="1">
+                          <a:solidFill>
+                            <a:srgbClr val="131A19"/>
+                          </a:solidFill>
+                          <a:latin typeface="Consolas"/>
+                        </a:rPr>
+                        <a:t>29.25</a:t>
+                      </a:r>
+                    </a:p>
+                  </a:txBody>
+                  <a:tcPr marL="82296" marR="82296" marT="27432" marB="27432" anchor="ctr">
+                    <a:solidFill>
+                      <a:srgbClr val="ECF5F2"/>
+                    </a:solidFill>
+                  </a:tcPr>
+                </a:tc>
+                <a:tc>
+                  <a:txBody>
+                    <a:bodyPr/>
+                    <a:lstStyle/>
+                    <a:p>
+                      <a:pPr algn="r"/>
+                      <a:r>
+                        <a:rPr sz="1200" b="1">
+                          <a:solidFill>
+                            <a:srgbClr val="131A19"/>
+                          </a:solidFill>
+                          <a:latin typeface="Consolas"/>
+                        </a:rPr>
+                        <a:t>0.8777</a:t>
+                      </a:r>
+                    </a:p>
+                  </a:txBody>
+                  <a:tcPr marL="82296" marR="82296" marT="27432" marB="27432" anchor="ctr">
+                    <a:solidFill>
+                      <a:srgbClr val="ECF5F2"/>
+                    </a:solidFill>
+                  </a:tcPr>
+                </a:tc>
+                <a:tc>
+                  <a:txBody>
+                    <a:bodyPr/>
+                    <a:lstStyle/>
+                    <a:p>
+                      <a:pPr algn="r"/>
+                      <a:r>
+                        <a:rPr sz="1200" b="1">
+                          <a:solidFill>
+                            <a:srgbClr val="131A19"/>
+                          </a:solidFill>
+                          <a:latin typeface="Consolas"/>
+                        </a:rPr>
+                        <a:t>통과</a:t>
+                      </a:r>
+                    </a:p>
+                  </a:txBody>
+                  <a:tcPr marL="82296" marR="82296" marT="27432" marB="27432" anchor="ctr">
+                    <a:solidFill>
+                      <a:srgbClr val="ECF5F2"/>
+                    </a:solidFill>
+                  </a:tcPr>
+                </a:tc>
+              </a:tr>
+            </a:tbl>
+          </a:graphicData>
+        </a:graphic>
+      </p:graphicFrame>
+      <p:graphicFrame>
+        <p:nvGraphicFramePr>
+          <p:cNvPr id="7" name="Table 6"/>
+          <p:cNvGraphicFramePr>
+            <a:graphicFrameLocks noGrp="1"/>
+          </p:cNvGraphicFramePr>
+          <p:nvPr/>
+        </p:nvGraphicFramePr>
+        <p:xfrm>
+          <a:off x="822960" y="3977639"/>
+          <a:ext cx="5486400" cy="1371600"/>
+        </p:xfrm>
+        <a:graphic>
+          <a:graphicData uri="http://schemas.openxmlformats.org/drawingml/2006/table">
+            <a:tbl>
+              <a:tblPr firstRow="1" bandRow="1">
+                <a:tableStyleId>{5C22544A-7EE6-4342-B048-85BDC9FD1C3A}</a:tableStyleId>
+              </a:tblPr>
+              <a:tblGrid>
+                <a:gridCol w="2377440"/>
+                <a:gridCol w="1188720"/>
+                <a:gridCol w="1188720"/>
+                <a:gridCol w="731520"/>
+              </a:tblGrid>
+              <a:tr h="274320">
+                <a:tc>
+                  <a:txBody>
+                    <a:bodyPr/>
+                    <a:lstStyle/>
+                    <a:p>
+                      <a:pPr algn="l"/>
+                      <a:r>
+                        <a:rPr sz="1200" b="1">
+                          <a:solidFill>
+                            <a:srgbClr val="131A19"/>
+                          </a:solidFill>
+                          <a:latin typeface="맑은 고딕"/>
+                        </a:rPr>
+                        <a:t>노이즈</a:t>
+                      </a:r>
+                    </a:p>
+                  </a:txBody>
+                  <a:tcPr marL="82296" marR="82296" marT="27432" marB="27432" anchor="ctr">
+                    <a:solidFill>
+                      <a:srgbClr val="DCEDE8"/>
+                    </a:solidFill>
+                  </a:tcPr>
+                </a:tc>
+                <a:tc>
+                  <a:txBody>
+                    <a:bodyPr/>
+                    <a:lstStyle/>
+                    <a:p>
+                      <a:pPr algn="r"/>
+                      <a:r>
+                        <a:rPr sz="1200" b="1">
+                          <a:solidFill>
+                            <a:srgbClr val="131A19"/>
+                          </a:solidFill>
+                          <a:latin typeface="Consolas"/>
+                        </a:rPr>
+                        <a:t>PSNR</a:t>
+                      </a:r>
+                    </a:p>
+                  </a:txBody>
+                  <a:tcPr marL="82296" marR="82296" marT="27432" marB="27432" anchor="ctr">
+                    <a:solidFill>
+                      <a:srgbClr val="DCEDE8"/>
+                    </a:solidFill>
+                  </a:tcPr>
+                </a:tc>
+                <a:tc>
+                  <a:txBody>
+                    <a:bodyPr/>
+                    <a:lstStyle/>
+                    <a:p>
+                      <a:pPr algn="r"/>
+                      <a:r>
+                        <a:rPr sz="1200" b="1">
+                          <a:solidFill>
+                            <a:srgbClr val="131A19"/>
+                          </a:solidFill>
+                          <a:latin typeface="Consolas"/>
+                        </a:rPr>
+                        <a:t>SSIM</a:t>
+                      </a:r>
+                    </a:p>
+                  </a:txBody>
+                  <a:tcPr marL="82296" marR="82296" marT="27432" marB="27432" anchor="ctr">
+                    <a:solidFill>
+                      <a:srgbClr val="DCEDE8"/>
+                    </a:solidFill>
+                  </a:tcPr>
+                </a:tc>
+                <a:tc>
+                  <a:txBody>
+                    <a:bodyPr/>
+                    <a:lstStyle/>
+                    <a:p>
+                      <a:pPr algn="r"/>
+                      <a:r>
+                        <a:rPr sz="1200" b="1">
+                          <a:solidFill>
+                            <a:srgbClr val="131A19"/>
+                          </a:solidFill>
+                          <a:latin typeface="Consolas"/>
+                        </a:rPr>
+                        <a:t>n</a:t>
+                      </a:r>
+                    </a:p>
+                  </a:txBody>
+                  <a:tcPr marL="82296" marR="82296" marT="27432" marB="27432" anchor="ctr">
+                    <a:solidFill>
+                      <a:srgbClr val="DCEDE8"/>
+                    </a:solidFill>
+                  </a:tcPr>
+                </a:tc>
+              </a:tr>
+              <a:tr h="274320">
+                <a:tc>
+                  <a:txBody>
+                    <a:bodyPr/>
+                    <a:lstStyle/>
+                    <a:p>
+                      <a:pPr algn="l"/>
+                      <a:r>
+                        <a:rPr sz="1200" b="0">
+                          <a:solidFill>
+                            <a:srgbClr val="3C4947"/>
+                          </a:solidFill>
+                          <a:latin typeface="맑은 고딕"/>
+                        </a:rPr>
+                        <a:t>gaussian</a:t>
+                      </a:r>
+                    </a:p>
+                  </a:txBody>
+                  <a:tcPr marL="82296" marR="82296" marT="27432" marB="27432" anchor="ctr">
+                    <a:solidFill>
+                      <a:srgbClr val="FFFFFF"/>
+                    </a:solidFill>
+                  </a:tcPr>
+                </a:tc>
+                <a:tc>
+                  <a:txBody>
+                    <a:bodyPr/>
+                    <a:lstStyle/>
+                    <a:p>
+                      <a:pPr algn="r"/>
+                      <a:r>
+                        <a:rPr sz="1200" b="0">
+                          <a:solidFill>
+                            <a:srgbClr val="3C4947"/>
+                          </a:solidFill>
+                          <a:latin typeface="Consolas"/>
+                        </a:rPr>
+                        <a:t>30.03</a:t>
+                      </a:r>
+                    </a:p>
+                  </a:txBody>
+                  <a:tcPr marL="82296" marR="82296" marT="27432" marB="27432" anchor="ctr">
+                    <a:solidFill>
+                      <a:srgbClr val="FFFFFF"/>
+                    </a:solidFill>
+                  </a:tcPr>
+                </a:tc>
+                <a:tc>
+                  <a:txBody>
+                    <a:bodyPr/>
+                    <a:lstStyle/>
+                    <a:p>
+                      <a:pPr algn="r"/>
+                      <a:r>
+                        <a:rPr sz="1200" b="0">
+                          <a:solidFill>
+                            <a:srgbClr val="3C4947"/>
+                          </a:solidFill>
+                          <a:latin typeface="Consolas"/>
+                        </a:rPr>
+                        <a:t>0.8830</a:t>
+                      </a:r>
+                    </a:p>
+                  </a:txBody>
+                  <a:tcPr marL="82296" marR="82296" marT="27432" marB="27432" anchor="ctr">
+                    <a:solidFill>
+                      <a:srgbClr val="FFFFFF"/>
+                    </a:solidFill>
+                  </a:tcPr>
+                </a:tc>
+                <a:tc>
+                  <a:txBody>
+                    <a:bodyPr/>
+                    <a:lstStyle/>
+                    <a:p>
+                      <a:pPr algn="r"/>
+                      <a:r>
+                        <a:rPr sz="1200" b="0">
+                          <a:solidFill>
+                            <a:srgbClr val="3C4947"/>
+                          </a:solidFill>
+                          <a:latin typeface="Consolas"/>
+                        </a:rPr>
+                        <a:t>25</a:t>
+                      </a:r>
+                    </a:p>
+                  </a:txBody>
+                  <a:tcPr marL="82296" marR="82296" marT="27432" marB="27432" anchor="ctr">
+                    <a:solidFill>
+                      <a:srgbClr val="FFFFFF"/>
+                    </a:solidFill>
+                  </a:tcPr>
+                </a:tc>
+              </a:tr>
+              <a:tr h="274320">
+                <a:tc>
+                  <a:txBody>
+                    <a:bodyPr/>
+                    <a:lstStyle/>
+                    <a:p>
+                      <a:pPr algn="l"/>
+                      <a:r>
+                        <a:rPr sz="1200" b="0">
+                          <a:solidFill>
+                            <a:srgbClr val="3C4947"/>
+                          </a:solidFill>
+                          <a:latin typeface="맑은 고딕"/>
+                        </a:rPr>
+                        <a:t>rician</a:t>
+                      </a:r>
+                    </a:p>
+                  </a:txBody>
+                  <a:tcPr marL="82296" marR="82296" marT="27432" marB="27432" anchor="ctr">
+                    <a:solidFill>
+                      <a:srgbClr val="FFFFFF"/>
+                    </a:solidFill>
+                  </a:tcPr>
+                </a:tc>
+                <a:tc>
+                  <a:txBody>
+                    <a:bodyPr/>
+                    <a:lstStyle/>
+                    <a:p>
+                      <a:pPr algn="r"/>
+                      <a:r>
+                        <a:rPr sz="1200" b="0">
+                          <a:solidFill>
+                            <a:srgbClr val="3C4947"/>
+                          </a:solidFill>
+                          <a:latin typeface="Consolas"/>
+                        </a:rPr>
+                        <a:t>22.47</a:t>
+                      </a:r>
+                    </a:p>
+                  </a:txBody>
+                  <a:tcPr marL="82296" marR="82296" marT="27432" marB="27432" anchor="ctr">
+                    <a:solidFill>
+                      <a:srgbClr val="FFFFFF"/>
+                    </a:solidFill>
+                  </a:tcPr>
+                </a:tc>
+                <a:tc>
+                  <a:txBody>
+                    <a:bodyPr/>
+                    <a:lstStyle/>
+                    <a:p>
+                      <a:pPr algn="r"/>
+                      <a:r>
+                        <a:rPr sz="1200" b="0">
+                          <a:solidFill>
+                            <a:srgbClr val="3C4947"/>
+                          </a:solidFill>
+                          <a:latin typeface="Consolas"/>
+                        </a:rPr>
+                        <a:t>0.7464</a:t>
+                      </a:r>
+                    </a:p>
+                  </a:txBody>
+                  <a:tcPr marL="82296" marR="82296" marT="27432" marB="27432" anchor="ctr">
+                    <a:solidFill>
+                      <a:srgbClr val="FFFFFF"/>
+                    </a:solidFill>
+                  </a:tcPr>
+                </a:tc>
+                <a:tc>
+                  <a:txBody>
+                    <a:bodyPr/>
+                    <a:lstStyle/>
+                    <a:p>
+                      <a:pPr algn="r"/>
+                      <a:r>
+                        <a:rPr sz="1200" b="0">
+                          <a:solidFill>
+                            <a:srgbClr val="3C4947"/>
+                          </a:solidFill>
+                          <a:latin typeface="Consolas"/>
+                        </a:rPr>
+                        <a:t>25</a:t>
+                      </a:r>
+                    </a:p>
+                  </a:txBody>
+                  <a:tcPr marL="82296" marR="82296" marT="27432" marB="27432" anchor="ctr">
+                    <a:solidFill>
+                      <a:srgbClr val="FFFFFF"/>
+                    </a:solidFill>
+                  </a:tcPr>
+                </a:tc>
+              </a:tr>
+              <a:tr h="274320">
+                <a:tc>
+                  <a:txBody>
+                    <a:bodyPr/>
+                    <a:lstStyle/>
+                    <a:p>
+                      <a:pPr algn="l"/>
+                      <a:r>
+                        <a:rPr sz="1200" b="0">
+                          <a:solidFill>
+                            <a:srgbClr val="3C4947"/>
+                          </a:solidFill>
+                          <a:latin typeface="맑은 고딕"/>
+                        </a:rPr>
+                        <a:t>uniform</a:t>
+                      </a:r>
+                    </a:p>
+                  </a:txBody>
+                  <a:tcPr marL="82296" marR="82296" marT="27432" marB="27432" anchor="ctr">
+                    <a:solidFill>
+                      <a:srgbClr val="FFFFFF"/>
+                    </a:solidFill>
+                  </a:tcPr>
+                </a:tc>
+                <a:tc>
+                  <a:txBody>
+                    <a:bodyPr/>
+                    <a:lstStyle/>
+                    <a:p>
+                      <a:pPr algn="r"/>
+                      <a:r>
+                        <a:rPr sz="1200" b="0">
+                          <a:solidFill>
+                            <a:srgbClr val="3C4947"/>
+                          </a:solidFill>
+                          <a:latin typeface="Consolas"/>
+                        </a:rPr>
+                        <a:t>29.23</a:t>
+                      </a:r>
+                    </a:p>
+                  </a:txBody>
+                  <a:tcPr marL="82296" marR="82296" marT="27432" marB="27432" anchor="ctr">
+                    <a:solidFill>
+                      <a:srgbClr val="FFFFFF"/>
+                    </a:solidFill>
+                  </a:tcPr>
+                </a:tc>
+                <a:tc>
+                  <a:txBody>
+                    <a:bodyPr/>
+                    <a:lstStyle/>
+                    <a:p>
+                      <a:pPr algn="r"/>
+                      <a:r>
+                        <a:rPr sz="1200" b="0">
+                          <a:solidFill>
+                            <a:srgbClr val="3C4947"/>
+                          </a:solidFill>
+                          <a:latin typeface="Consolas"/>
+                        </a:rPr>
+                        <a:t>0.9029</a:t>
+                      </a:r>
+                    </a:p>
+                  </a:txBody>
+                  <a:tcPr marL="82296" marR="82296" marT="27432" marB="27432" anchor="ctr">
+                    <a:solidFill>
+                      <a:srgbClr val="FFFFFF"/>
+                    </a:solidFill>
+                  </a:tcPr>
+                </a:tc>
+                <a:tc>
+                  <a:txBody>
+                    <a:bodyPr/>
+                    <a:lstStyle/>
+                    <a:p>
+                      <a:pPr algn="r"/>
+                      <a:r>
+                        <a:rPr sz="1200" b="0">
+                          <a:solidFill>
+                            <a:srgbClr val="3C4947"/>
+                          </a:solidFill>
+                          <a:latin typeface="Consolas"/>
+                        </a:rPr>
+                        <a:t>25</a:t>
+                      </a:r>
+                    </a:p>
+                  </a:txBody>
+                  <a:tcPr marL="82296" marR="82296" marT="27432" marB="27432" anchor="ctr">
+                    <a:solidFill>
+                      <a:srgbClr val="FFFFFF"/>
+                    </a:solidFill>
+                  </a:tcPr>
+                </a:tc>
+              </a:tr>
+              <a:tr h="274320">
+                <a:tc>
+                  <a:txBody>
+                    <a:bodyPr/>
+                    <a:lstStyle/>
+                    <a:p>
+                      <a:pPr algn="l"/>
+                      <a:r>
+                        <a:rPr sz="1200" b="0">
+                          <a:solidFill>
+                            <a:srgbClr val="3C4947"/>
+                          </a:solidFill>
+                          <a:latin typeface="맑은 고딕"/>
+                        </a:rPr>
+                        <a:t>salt_and_pepper</a:t>
+                      </a:r>
+                    </a:p>
+                  </a:txBody>
+                  <a:tcPr marL="82296" marR="82296" marT="27432" marB="27432" anchor="ctr">
+                    <a:solidFill>
+                      <a:srgbClr val="FFFFFF"/>
+                    </a:solidFill>
+                  </a:tcPr>
+                </a:tc>
+                <a:tc>
+                  <a:txBody>
+                    <a:bodyPr/>
+                    <a:lstStyle/>
+                    <a:p>
+                      <a:pPr algn="r"/>
+                      <a:r>
+                        <a:rPr sz="1200" b="0">
+                          <a:solidFill>
+                            <a:srgbClr val="3C4947"/>
+                          </a:solidFill>
+                          <a:latin typeface="Consolas"/>
+                        </a:rPr>
+                        <a:t>35.26</a:t>
+                      </a:r>
+                    </a:p>
+                  </a:txBody>
+                  <a:tcPr marL="82296" marR="82296" marT="27432" marB="27432" anchor="ctr">
+                    <a:solidFill>
+                      <a:srgbClr val="FFFFFF"/>
+                    </a:solidFill>
+                  </a:tcPr>
+                </a:tc>
+                <a:tc>
+                  <a:txBody>
+                    <a:bodyPr/>
+                    <a:lstStyle/>
+                    <a:p>
+                      <a:pPr algn="r"/>
+                      <a:r>
+                        <a:rPr sz="1200" b="0">
+                          <a:solidFill>
+                            <a:srgbClr val="3C4947"/>
+                          </a:solidFill>
+                          <a:latin typeface="Consolas"/>
+                        </a:rPr>
+                        <a:t>0.9784</a:t>
+                      </a:r>
+                    </a:p>
+                  </a:txBody>
+                  <a:tcPr marL="82296" marR="82296" marT="27432" marB="27432" anchor="ctr">
+                    <a:solidFill>
+                      <a:srgbClr val="FFFFFF"/>
+                    </a:solidFill>
+                  </a:tcPr>
+                </a:tc>
+                <a:tc>
+                  <a:txBody>
+                    <a:bodyPr/>
+                    <a:lstStyle/>
+                    <a:p>
+                      <a:pPr algn="r"/>
+                      <a:r>
+                        <a:rPr sz="1200" b="0">
+                          <a:solidFill>
+                            <a:srgbClr val="3C4947"/>
+                          </a:solidFill>
+                          <a:latin typeface="Consolas"/>
+                        </a:rPr>
+                        <a:t>25</a:t>
+                      </a:r>
+                    </a:p>
+                  </a:txBody>
+                  <a:tcPr marL="82296" marR="82296" marT="27432" marB="27432" anchor="ctr">
+                    <a:solidFill>
+                      <a:srgbClr val="FFFFFF"/>
+                    </a:solidFill>
+                  </a:tcPr>
+                </a:tc>
+              </a:tr>
+            </a:tbl>
+          </a:graphicData>
+        </a:graphic>
+      </p:graphicFrame>
+      <p:sp>
+        <p:nvSpPr>
+          <p:cNvPr id="8" name="Rounded Rectangle 7"/>
           <p:cNvSpPr/>
           <p:nvPr/>
         </p:nvSpPr>
         <p:spPr>
           <a:xfrm>
-            <a:off x="685800" y="2011680"/>
-            <a:ext cx="1828800" cy="1463040"/>
+            <a:off x="6675120" y="3977639"/>
+            <a:ext cx="4663440" cy="1554480"/>
           </a:xfrm>
           <a:prstGeom prst="roundRect">
             <a:avLst>
@@ -4281,14 +5325,14 @@
       </p:sp>
       <p:sp>
         <p:nvSpPr>
-          <p:cNvPr id="7" name="TextBox 6"/>
+          <p:cNvPr id="9" name="TextBox 8"/>
           <p:cNvSpPr txBox="1"/>
           <p:nvPr/>
         </p:nvSpPr>
         <p:spPr>
           <a:xfrm>
-            <a:off x="777240" y="2148840"/>
-            <a:ext cx="1645920" cy="365760"/>
+            <a:off x="6903720" y="4160520"/>
+            <a:ext cx="4206240" cy="1280160"/>
           </a:xfrm>
           <a:prstGeom prst="rect">
             <a:avLst/>
@@ -4301,33 +5345,81 @@
           </a:bodyPr>
           <a:lstStyle/>
           <a:p>
-            <a:pPr algn="ctr">
+            <a:pPr algn="l">
               <a:lnSpc>
                 <a:spcPct val="125000"/>
               </a:lnSpc>
             </a:pPr>
             <a:r>
-              <a:rPr sz="1300" b="1">
+              <a:rPr sz="1200" b="1">
                 <a:solidFill>
                   <a:srgbClr val="131A19"/>
                 </a:solidFill>
                 <a:latin typeface="맑은 고딕"/>
               </a:rPr>
-              <a:t>측정치 g</a:t>
-            </a:r>
-          </a:p>
-        </p:txBody>
-      </p:sp>
-      <p:sp>
-        <p:nvSpPr>
-          <p:cNvPr id="8" name="TextBox 7"/>
+              <a:t>rician 만 22.47 로 7 dB 뒤진다.</a:t>
+            </a:r>
+          </a:p>
+          <a:p>
+            <a:pPr algn="l">
+              <a:lnSpc>
+                <a:spcPct val="125000"/>
+              </a:lnSpc>
+            </a:pPr>
+            <a:r>
+              <a:rPr sz="1200" b="0">
+                <a:solidFill>
+                  <a:srgbClr val="3C4947"/>
+                </a:solidFill>
+                <a:latin typeface="맑은 고딕"/>
+              </a:rPr>
+              <a:t>정류가 밝기를 +0.0396 밀어 올리는데</a:t>
+            </a:r>
+          </a:p>
+          <a:p>
+            <a:pPr algn="l">
+              <a:lnSpc>
+                <a:spcPct val="125000"/>
+              </a:lnSpc>
+            </a:pPr>
+            <a:r>
+              <a:rPr sz="1200" b="0">
+                <a:solidFill>
+                  <a:srgbClr val="3C4947"/>
+                </a:solidFill>
+                <a:latin typeface="맑은 고딕"/>
+              </a:rPr>
+              <a:t>dipole 은 DC 를 1/3 로 보존하므로</a:t>
+            </a:r>
+          </a:p>
+          <a:p>
+            <a:pPr algn="l">
+              <a:lnSpc>
+                <a:spcPct val="125000"/>
+              </a:lnSpc>
+            </a:pPr>
+            <a:r>
+              <a:rPr sz="1200" b="0">
+                <a:solidFill>
+                  <a:srgbClr val="3C4947"/>
+                </a:solidFill>
+                <a:latin typeface="맑은 고딕"/>
+              </a:rPr>
+              <a:t>역산에서 3배가 되어 0.119 로 남는다.</a:t>
+            </a:r>
+          </a:p>
+        </p:txBody>
+      </p:sp>
+      <p:sp>
+        <p:nvSpPr>
+          <p:cNvPr id="10" name="TextBox 9"/>
           <p:cNvSpPr txBox="1"/>
           <p:nvPr/>
         </p:nvSpPr>
         <p:spPr>
           <a:xfrm>
-            <a:off x="777240" y="2560320"/>
-            <a:ext cx="1645920" cy="822960"/>
+            <a:off x="640080" y="6355080"/>
+            <a:ext cx="10972800" cy="274320"/>
           </a:xfrm>
           <a:prstGeom prst="rect">
             <a:avLst/>
@@ -4340,7 +5432,7 @@
           </a:bodyPr>
           <a:lstStyle/>
           <a:p>
-            <a:pPr algn="ctr">
+            <a:pPr algn="l">
               <a:lnSpc>
                 <a:spcPct val="125000"/>
               </a:lnSpc>
@@ -4352,1052 +5444,7 @@
                 </a:solidFill>
                 <a:latin typeface="Consolas"/>
               </a:rPr>
-              <a:t>가진 것은 이것뿐</a:t>
-            </a:r>
-          </a:p>
-        </p:txBody>
-      </p:sp>
-      <p:sp>
-        <p:nvSpPr>
-          <p:cNvPr id="9" name="Rounded Rectangle 8"/>
-          <p:cNvSpPr/>
-          <p:nvPr/>
-        </p:nvSpPr>
-        <p:spPr>
-          <a:xfrm>
-            <a:off x="2743200" y="2011680"/>
-            <a:ext cx="1828800" cy="1463040"/>
-          </a:xfrm>
-          <a:prstGeom prst="roundRect">
-            <a:avLst>
-              <a:gd name="adj" fmla="val 4000"/>
-            </a:avLst>
-          </a:prstGeom>
-          <a:solidFill>
-            <a:srgbClr val="DCEDE8"/>
-          </a:solidFill>
-          <a:ln w="9525">
-            <a:solidFill>
-              <a:srgbClr val="0B6E5E"/>
-            </a:solidFill>
-          </a:ln>
-          <a:effectLst/>
-        </p:spPr>
-        <p:style>
-          <a:lnRef idx="1">
-            <a:schemeClr val="accent1"/>
-          </a:lnRef>
-          <a:fillRef idx="3">
-            <a:schemeClr val="accent1"/>
-          </a:fillRef>
-          <a:effectRef idx="2">
-            <a:schemeClr val="accent1"/>
-          </a:effectRef>
-          <a:fontRef idx="minor">
-            <a:schemeClr val="lt1"/>
-          </a:fontRef>
-        </p:style>
-        <p:txBody>
-          <a:bodyPr rtlCol="0" anchor="ctr"/>
-          <a:lstStyle/>
-          <a:p>
-            <a:pPr algn="ctr"/>
-          </a:p>
-        </p:txBody>
-      </p:sp>
-      <p:sp>
-        <p:nvSpPr>
-          <p:cNvPr id="10" name="TextBox 9"/>
-          <p:cNvSpPr txBox="1"/>
-          <p:nvPr/>
-        </p:nvSpPr>
-        <p:spPr>
-          <a:xfrm>
-            <a:off x="2834640" y="2148840"/>
-            <a:ext cx="1645920" cy="365760"/>
-          </a:xfrm>
-          <a:prstGeom prst="rect">
-            <a:avLst/>
-          </a:prstGeom>
-          <a:noFill/>
-        </p:spPr>
-        <p:txBody>
-          <a:bodyPr wrap="square" anchor="t">
-            <a:spAutoFit/>
-          </a:bodyPr>
-          <a:lstStyle/>
-          <a:p>
-            <a:pPr algn="ctr">
-              <a:lnSpc>
-                <a:spcPct val="125000"/>
-              </a:lnSpc>
-            </a:pPr>
-            <a:r>
-              <a:rPr sz="1300" b="1">
-                <a:solidFill>
-                  <a:srgbClr val="131A19"/>
-                </a:solidFill>
-                <a:latin typeface="맑은 고딕"/>
-              </a:rPr>
-              <a:t>σ 추정</a:t>
-            </a:r>
-          </a:p>
-        </p:txBody>
-      </p:sp>
-      <p:sp>
-        <p:nvSpPr>
-          <p:cNvPr id="11" name="TextBox 10"/>
-          <p:cNvSpPr txBox="1"/>
-          <p:nvPr/>
-        </p:nvSpPr>
-        <p:spPr>
-          <a:xfrm>
-            <a:off x="2834640" y="2560320"/>
-            <a:ext cx="1645920" cy="822960"/>
-          </a:xfrm>
-          <a:prstGeom prst="rect">
-            <a:avLst/>
-          </a:prstGeom>
-          <a:noFill/>
-        </p:spPr>
-        <p:txBody>
-          <a:bodyPr wrap="square" anchor="t">
-            <a:spAutoFit/>
-          </a:bodyPr>
-          <a:lstStyle/>
-          <a:p>
-            <a:pPr algn="ctr">
-              <a:lnSpc>
-                <a:spcPct val="125000"/>
-              </a:lnSpc>
-            </a:pPr>
-            <a:r>
-              <a:rPr sz="1000" b="0">
-                <a:solidFill>
-                  <a:srgbClr val="66756F"/>
-                </a:solidFill>
-                <a:latin typeface="Consolas"/>
-              </a:rPr>
-              <a:t>널 원뿔에서
-라벨 불필요</a:t>
-            </a:r>
-          </a:p>
-        </p:txBody>
-      </p:sp>
-      <p:sp>
-        <p:nvSpPr>
-          <p:cNvPr id="12" name="Rounded Rectangle 11"/>
-          <p:cNvSpPr/>
-          <p:nvPr/>
-        </p:nvSpPr>
-        <p:spPr>
-          <a:xfrm>
-            <a:off x="4800600" y="2011680"/>
-            <a:ext cx="1828800" cy="1463040"/>
-          </a:xfrm>
-          <a:prstGeom prst="roundRect">
-            <a:avLst>
-              <a:gd name="adj" fmla="val 4000"/>
-            </a:avLst>
-          </a:prstGeom>
-          <a:solidFill>
-            <a:srgbClr val="DCEDE8"/>
-          </a:solidFill>
-          <a:ln w="9525">
-            <a:solidFill>
-              <a:srgbClr val="0B6E5E"/>
-            </a:solidFill>
-          </a:ln>
-          <a:effectLst/>
-        </p:spPr>
-        <p:style>
-          <a:lnRef idx="1">
-            <a:schemeClr val="accent1"/>
-          </a:lnRef>
-          <a:fillRef idx="3">
-            <a:schemeClr val="accent1"/>
-          </a:fillRef>
-          <a:effectRef idx="2">
-            <a:schemeClr val="accent1"/>
-          </a:effectRef>
-          <a:fontRef idx="minor">
-            <a:schemeClr val="lt1"/>
-          </a:fontRef>
-        </p:style>
-        <p:txBody>
-          <a:bodyPr rtlCol="0" anchor="ctr"/>
-          <a:lstStyle/>
-          <a:p>
-            <a:pPr algn="ctr"/>
-          </a:p>
-        </p:txBody>
-      </p:sp>
-      <p:sp>
-        <p:nvSpPr>
-          <p:cNvPr id="13" name="TextBox 12"/>
-          <p:cNvSpPr txBox="1"/>
-          <p:nvPr/>
-        </p:nvSpPr>
-        <p:spPr>
-          <a:xfrm>
-            <a:off x="4892040" y="2148840"/>
-            <a:ext cx="1645920" cy="365760"/>
-          </a:xfrm>
-          <a:prstGeom prst="rect">
-            <a:avLst/>
-          </a:prstGeom>
-          <a:noFill/>
-        </p:spPr>
-        <p:txBody>
-          <a:bodyPr wrap="square" anchor="t">
-            <a:spAutoFit/>
-          </a:bodyPr>
-          <a:lstStyle/>
-          <a:p>
-            <a:pPr algn="ctr">
-              <a:lnSpc>
-                <a:spcPct val="125000"/>
-              </a:lnSpc>
-            </a:pPr>
-            <a:r>
-              <a:rPr sz="1300" b="1">
-                <a:solidFill>
-                  <a:srgbClr val="131A19"/>
-                </a:solidFill>
-                <a:latin typeface="맑은 고딕"/>
-              </a:rPr>
-              <a:t>N2V 디노이저</a:t>
-            </a:r>
-          </a:p>
-        </p:txBody>
-      </p:sp>
-      <p:sp>
-        <p:nvSpPr>
-          <p:cNvPr id="14" name="TextBox 13"/>
-          <p:cNvSpPr txBox="1"/>
-          <p:nvPr/>
-        </p:nvSpPr>
-        <p:spPr>
-          <a:xfrm>
-            <a:off x="4892040" y="2560320"/>
-            <a:ext cx="1645920" cy="822960"/>
-          </a:xfrm>
-          <a:prstGeom prst="rect">
-            <a:avLst/>
-          </a:prstGeom>
-          <a:noFill/>
-        </p:spPr>
-        <p:txBody>
-          <a:bodyPr wrap="square" anchor="t">
-            <a:spAutoFit/>
-          </a:bodyPr>
-          <a:lstStyle/>
-          <a:p>
-            <a:pPr algn="ctr">
-              <a:lnSpc>
-                <a:spcPct val="125000"/>
-              </a:lnSpc>
-            </a:pPr>
-            <a:r>
-              <a:rPr sz="1000" b="0">
-                <a:solidFill>
-                  <a:srgbClr val="66756F"/>
-                </a:solidFill>
-                <a:latin typeface="Consolas"/>
-              </a:rPr>
-              <a:t>1일차 blind-spot
-으로 학습
-정답 안 씀</a:t>
-            </a:r>
-          </a:p>
-        </p:txBody>
-      </p:sp>
-      <p:sp>
-        <p:nvSpPr>
-          <p:cNvPr id="15" name="Rounded Rectangle 14"/>
-          <p:cNvSpPr/>
-          <p:nvPr/>
-        </p:nvSpPr>
-        <p:spPr>
-          <a:xfrm>
-            <a:off x="6858000" y="2011680"/>
-            <a:ext cx="1828800" cy="1463040"/>
-          </a:xfrm>
-          <a:prstGeom prst="roundRect">
-            <a:avLst>
-              <a:gd name="adj" fmla="val 4000"/>
-            </a:avLst>
-          </a:prstGeom>
-          <a:solidFill>
-            <a:srgbClr val="DCEDE8"/>
-          </a:solidFill>
-          <a:ln w="9525">
-            <a:solidFill>
-              <a:srgbClr val="0B6E5E"/>
-            </a:solidFill>
-          </a:ln>
-          <a:effectLst/>
-        </p:spPr>
-        <p:style>
-          <a:lnRef idx="1">
-            <a:schemeClr val="accent1"/>
-          </a:lnRef>
-          <a:fillRef idx="3">
-            <a:schemeClr val="accent1"/>
-          </a:fillRef>
-          <a:effectRef idx="2">
-            <a:schemeClr val="accent1"/>
-          </a:effectRef>
-          <a:fontRef idx="minor">
-            <a:schemeClr val="lt1"/>
-          </a:fontRef>
-        </p:style>
-        <p:txBody>
-          <a:bodyPr rtlCol="0" anchor="ctr"/>
-          <a:lstStyle/>
-          <a:p>
-            <a:pPr algn="ctr"/>
-          </a:p>
-        </p:txBody>
-      </p:sp>
-      <p:sp>
-        <p:nvSpPr>
-          <p:cNvPr id="16" name="TextBox 15"/>
-          <p:cNvSpPr txBox="1"/>
-          <p:nvPr/>
-        </p:nvSpPr>
-        <p:spPr>
-          <a:xfrm>
-            <a:off x="6949440" y="2148840"/>
-            <a:ext cx="1645920" cy="365760"/>
-          </a:xfrm>
-          <a:prstGeom prst="rect">
-            <a:avLst/>
-          </a:prstGeom>
-          <a:noFill/>
-        </p:spPr>
-        <p:txBody>
-          <a:bodyPr wrap="square" anchor="t">
-            <a:spAutoFit/>
-          </a:bodyPr>
-          <a:lstStyle/>
-          <a:p>
-            <a:pPr algn="ctr">
-              <a:lnSpc>
-                <a:spcPct val="125000"/>
-              </a:lnSpc>
-            </a:pPr>
-            <a:r>
-              <a:rPr sz="1300" b="1">
-                <a:solidFill>
-                  <a:srgbClr val="131A19"/>
-                </a:solidFill>
-                <a:latin typeface="맑은 고딕"/>
-              </a:rPr>
-              <a:t>데이터 정합</a:t>
-            </a:r>
-          </a:p>
-        </p:txBody>
-      </p:sp>
-      <p:sp>
-        <p:nvSpPr>
-          <p:cNvPr id="17" name="TextBox 16"/>
-          <p:cNvSpPr txBox="1"/>
-          <p:nvPr/>
-        </p:nvSpPr>
-        <p:spPr>
-          <a:xfrm>
-            <a:off x="6949440" y="2560320"/>
-            <a:ext cx="1645920" cy="822960"/>
-          </a:xfrm>
-          <a:prstGeom prst="rect">
-            <a:avLst/>
-          </a:prstGeom>
-          <a:noFill/>
-        </p:spPr>
-        <p:txBody>
-          <a:bodyPr wrap="square" anchor="t">
-            <a:spAutoFit/>
-          </a:bodyPr>
-          <a:lstStyle/>
-          <a:p>
-            <a:pPr algn="ctr">
-              <a:lnSpc>
-                <a:spcPct val="125000"/>
-              </a:lnSpc>
-            </a:pPr>
-            <a:r>
-              <a:rPr sz="1000" b="0">
-                <a:solidFill>
-                  <a:srgbClr val="66756F"/>
-                </a:solidFill>
-                <a:latin typeface="Consolas"/>
-              </a:rPr>
-              <a:t>닫힌 해
-학습 없음</a:t>
-            </a:r>
-          </a:p>
-        </p:txBody>
-      </p:sp>
-      <p:sp>
-        <p:nvSpPr>
-          <p:cNvPr id="18" name="Rounded Rectangle 17"/>
-          <p:cNvSpPr/>
-          <p:nvPr/>
-        </p:nvSpPr>
-        <p:spPr>
-          <a:xfrm>
-            <a:off x="8915400" y="2011680"/>
-            <a:ext cx="1828800" cy="1463040"/>
-          </a:xfrm>
-          <a:prstGeom prst="roundRect">
-            <a:avLst>
-              <a:gd name="adj" fmla="val 4000"/>
-            </a:avLst>
-          </a:prstGeom>
-          <a:solidFill>
-            <a:srgbClr val="DCEDE8"/>
-          </a:solidFill>
-          <a:ln w="9525">
-            <a:solidFill>
-              <a:srgbClr val="0B6E5E"/>
-            </a:solidFill>
-          </a:ln>
-          <a:effectLst/>
-        </p:spPr>
-        <p:style>
-          <a:lnRef idx="1">
-            <a:schemeClr val="accent1"/>
-          </a:lnRef>
-          <a:fillRef idx="3">
-            <a:schemeClr val="accent1"/>
-          </a:fillRef>
-          <a:effectRef idx="2">
-            <a:schemeClr val="accent1"/>
-          </a:effectRef>
-          <a:fontRef idx="minor">
-            <a:schemeClr val="lt1"/>
-          </a:fontRef>
-        </p:style>
-        <p:txBody>
-          <a:bodyPr rtlCol="0" anchor="ctr"/>
-          <a:lstStyle/>
-          <a:p>
-            <a:pPr algn="ctr"/>
-          </a:p>
-        </p:txBody>
-      </p:sp>
-      <p:sp>
-        <p:nvSpPr>
-          <p:cNvPr id="19" name="TextBox 18"/>
-          <p:cNvSpPr txBox="1"/>
-          <p:nvPr/>
-        </p:nvSpPr>
-        <p:spPr>
-          <a:xfrm>
-            <a:off x="9006840" y="2148840"/>
-            <a:ext cx="1645920" cy="365760"/>
-          </a:xfrm>
-          <a:prstGeom prst="rect">
-            <a:avLst/>
-          </a:prstGeom>
-          <a:noFill/>
-        </p:spPr>
-        <p:txBody>
-          <a:bodyPr wrap="square" anchor="t">
-            <a:spAutoFit/>
-          </a:bodyPr>
-          <a:lstStyle/>
-          <a:p>
-            <a:pPr algn="ctr">
-              <a:lnSpc>
-                <a:spcPct val="125000"/>
-              </a:lnSpc>
-            </a:pPr>
-            <a:r>
-              <a:rPr sz="1300" b="1">
-                <a:solidFill>
-                  <a:srgbClr val="131A19"/>
-                </a:solidFill>
-                <a:latin typeface="맑은 고딕"/>
-              </a:rPr>
-              <a:t>복원</a:t>
-            </a:r>
-          </a:p>
-        </p:txBody>
-      </p:sp>
-      <p:sp>
-        <p:nvSpPr>
-          <p:cNvPr id="20" name="TextBox 19"/>
-          <p:cNvSpPr txBox="1"/>
-          <p:nvPr/>
-        </p:nvSpPr>
-        <p:spPr>
-          <a:xfrm>
-            <a:off x="9006840" y="2560320"/>
-            <a:ext cx="1645920" cy="822960"/>
-          </a:xfrm>
-          <a:prstGeom prst="rect">
-            <a:avLst/>
-          </a:prstGeom>
-          <a:noFill/>
-        </p:spPr>
-        <p:txBody>
-          <a:bodyPr wrap="square" anchor="t">
-            <a:spAutoFit/>
-          </a:bodyPr>
-          <a:lstStyle/>
-          <a:p>
-            <a:pPr algn="ctr">
-              <a:lnSpc>
-                <a:spcPct val="125000"/>
-              </a:lnSpc>
-            </a:pPr>
-            <a:r>
-              <a:rPr sz="1000" b="0">
-                <a:solidFill>
-                  <a:srgbClr val="66756F"/>
-                </a:solidFill>
-                <a:latin typeface="Consolas"/>
-              </a:rPr>
-              <a:t>19.94 dB</a:t>
-            </a:r>
-          </a:p>
-        </p:txBody>
-      </p:sp>
-      <p:graphicFrame>
-        <p:nvGraphicFramePr>
-          <p:cNvPr id="21" name="Table 20"/>
-          <p:cNvGraphicFramePr>
-            <a:graphicFrameLocks noGrp="1"/>
-          </p:cNvGraphicFramePr>
-          <p:nvPr/>
-        </p:nvGraphicFramePr>
-        <p:xfrm>
-          <a:off x="822960" y="3840480"/>
-          <a:ext cx="10515600" cy="1371600"/>
-        </p:xfrm>
-        <a:graphic>
-          <a:graphicData uri="http://schemas.openxmlformats.org/drawingml/2006/table">
-            <a:tbl>
-              <a:tblPr firstRow="1" bandRow="1">
-                <a:tableStyleId>{5C22544A-7EE6-4342-B048-85BDC9FD1C3A}</a:tableStyleId>
-              </a:tblPr>
-              <a:tblGrid>
-                <a:gridCol w="4572000"/>
-                <a:gridCol w="1828800"/>
-                <a:gridCol w="1645920"/>
-                <a:gridCol w="2468880"/>
-              </a:tblGrid>
-              <a:tr h="274320">
-                <a:tc>
-                  <a:txBody>
-                    <a:bodyPr/>
-                    <a:lstStyle/>
-                    <a:p>
-                      <a:pPr algn="l"/>
-                      <a:r>
-                        <a:rPr sz="1200" b="1">
-                          <a:solidFill>
-                            <a:srgbClr val="131A19"/>
-                          </a:solidFill>
-                          <a:latin typeface="맑은 고딕"/>
-                        </a:rPr>
-                        <a:t>경로</a:t>
-                      </a:r>
-                    </a:p>
-                  </a:txBody>
-                  <a:tcPr marL="82296" marR="82296" marT="27432" marB="27432" anchor="ctr">
-                    <a:solidFill>
-                      <a:srgbClr val="DCEDE8"/>
-                    </a:solidFill>
-                  </a:tcPr>
-                </a:tc>
-                <a:tc>
-                  <a:txBody>
-                    <a:bodyPr/>
-                    <a:lstStyle/>
-                    <a:p>
-                      <a:pPr algn="r"/>
-                      <a:r>
-                        <a:rPr sz="1200" b="1">
-                          <a:solidFill>
-                            <a:srgbClr val="131A19"/>
-                          </a:solidFill>
-                          <a:latin typeface="Consolas"/>
-                        </a:rPr>
-                        <a:t>정답 사용</a:t>
-                      </a:r>
-                    </a:p>
-                  </a:txBody>
-                  <a:tcPr marL="82296" marR="82296" marT="27432" marB="27432" anchor="ctr">
-                    <a:solidFill>
-                      <a:srgbClr val="DCEDE8"/>
-                    </a:solidFill>
-                  </a:tcPr>
-                </a:tc>
-                <a:tc>
-                  <a:txBody>
-                    <a:bodyPr/>
-                    <a:lstStyle/>
-                    <a:p>
-                      <a:pPr algn="r"/>
-                      <a:r>
-                        <a:rPr sz="1200" b="1">
-                          <a:solidFill>
-                            <a:srgbClr val="131A19"/>
-                          </a:solidFill>
-                          <a:latin typeface="Consolas"/>
-                        </a:rPr>
-                        <a:t>PSNR</a:t>
-                      </a:r>
-                    </a:p>
-                  </a:txBody>
-                  <a:tcPr marL="82296" marR="82296" marT="27432" marB="27432" anchor="ctr">
-                    <a:solidFill>
-                      <a:srgbClr val="DCEDE8"/>
-                    </a:solidFill>
-                  </a:tcPr>
-                </a:tc>
-                <a:tc>
-                  <a:txBody>
-                    <a:bodyPr/>
-                    <a:lstStyle/>
-                    <a:p>
-                      <a:pPr algn="r"/>
-                      <a:r>
-                        <a:rPr sz="1200" b="1">
-                          <a:solidFill>
-                            <a:srgbClr val="131A19"/>
-                          </a:solidFill>
-                          <a:latin typeface="Consolas"/>
-                        </a:rPr>
-                        <a:t>분류</a:t>
-                      </a:r>
-                    </a:p>
-                  </a:txBody>
-                  <a:tcPr marL="82296" marR="82296" marT="27432" marB="27432" anchor="ctr">
-                    <a:solidFill>
-                      <a:srgbClr val="DCEDE8"/>
-                    </a:solidFill>
-                  </a:tcPr>
-                </a:tc>
-              </a:tr>
-              <a:tr h="274320">
-                <a:tc>
-                  <a:txBody>
-                    <a:bodyPr/>
-                    <a:lstStyle/>
-                    <a:p>
-                      <a:pPr algn="l"/>
-                      <a:r>
-                        <a:rPr sz="1200" b="1">
-                          <a:solidFill>
-                            <a:srgbClr val="131A19"/>
-                          </a:solidFill>
-                          <a:latin typeface="맑은 고딕"/>
-                        </a:rPr>
-                        <a:t>1일차 label-free (N2V) → Wiener</a:t>
-                      </a:r>
-                    </a:p>
-                  </a:txBody>
-                  <a:tcPr marL="82296" marR="82296" marT="27432" marB="27432" anchor="ctr">
-                    <a:solidFill>
-                      <a:srgbClr val="ECF5F2"/>
-                    </a:solidFill>
-                  </a:tcPr>
-                </a:tc>
-                <a:tc>
-                  <a:txBody>
-                    <a:bodyPr/>
-                    <a:lstStyle/>
-                    <a:p>
-                      <a:pPr algn="r"/>
-                      <a:r>
-                        <a:rPr sz="1200" b="1">
-                          <a:solidFill>
-                            <a:srgbClr val="131A19"/>
-                          </a:solidFill>
-                          <a:latin typeface="Consolas"/>
-                        </a:rPr>
-                        <a:t>없음</a:t>
-                      </a:r>
-                    </a:p>
-                  </a:txBody>
-                  <a:tcPr marL="82296" marR="82296" marT="27432" marB="27432" anchor="ctr">
-                    <a:solidFill>
-                      <a:srgbClr val="ECF5F2"/>
-                    </a:solidFill>
-                  </a:tcPr>
-                </a:tc>
-                <a:tc>
-                  <a:txBody>
-                    <a:bodyPr/>
-                    <a:lstStyle/>
-                    <a:p>
-                      <a:pPr algn="r"/>
-                      <a:r>
-                        <a:rPr sz="1200" b="1">
-                          <a:solidFill>
-                            <a:srgbClr val="131A19"/>
-                          </a:solidFill>
-                          <a:latin typeface="Consolas"/>
-                        </a:rPr>
-                        <a:t>18.87</a:t>
-                      </a:r>
-                    </a:p>
-                  </a:txBody>
-                  <a:tcPr marL="82296" marR="82296" marT="27432" marB="27432" anchor="ctr">
-                    <a:solidFill>
-                      <a:srgbClr val="ECF5F2"/>
-                    </a:solidFill>
-                  </a:tcPr>
-                </a:tc>
-                <a:tc>
-                  <a:txBody>
-                    <a:bodyPr/>
-                    <a:lstStyle/>
-                    <a:p>
-                      <a:pPr algn="r"/>
-                      <a:r>
-                        <a:rPr sz="1200" b="1">
-                          <a:solidFill>
-                            <a:srgbClr val="131A19"/>
-                          </a:solidFill>
-                          <a:latin typeface="Consolas"/>
-                        </a:rPr>
-                        <a:t>Self-supervised</a:t>
-                      </a:r>
-                    </a:p>
-                  </a:txBody>
-                  <a:tcPr marL="82296" marR="82296" marT="27432" marB="27432" anchor="ctr">
-                    <a:solidFill>
-                      <a:srgbClr val="ECF5F2"/>
-                    </a:solidFill>
-                  </a:tcPr>
-                </a:tc>
-              </a:tr>
-              <a:tr h="274320">
-                <a:tc>
-                  <a:txBody>
-                    <a:bodyPr/>
-                    <a:lstStyle/>
-                    <a:p>
-                      <a:pPr algn="l"/>
-                      <a:r>
-                        <a:rPr sz="1200" b="0">
-                          <a:solidFill>
-                            <a:srgbClr val="3C4947"/>
-                          </a:solidFill>
-                          <a:latin typeface="맑은 고딕"/>
-                        </a:rPr>
-                        <a:t>plug-and-play · label-free</a:t>
-                      </a:r>
-                    </a:p>
-                  </a:txBody>
-                  <a:tcPr marL="82296" marR="82296" marT="27432" marB="27432" anchor="ctr">
-                    <a:solidFill>
-                      <a:srgbClr val="FFFFFF"/>
-                    </a:solidFill>
-                  </a:tcPr>
-                </a:tc>
-                <a:tc>
-                  <a:txBody>
-                    <a:bodyPr/>
-                    <a:lstStyle/>
-                    <a:p>
-                      <a:pPr algn="r"/>
-                      <a:r>
-                        <a:rPr sz="1200" b="0">
-                          <a:solidFill>
-                            <a:srgbClr val="3C4947"/>
-                          </a:solidFill>
-                          <a:latin typeface="Consolas"/>
-                        </a:rPr>
-                        <a:t>없음</a:t>
-                      </a:r>
-                    </a:p>
-                  </a:txBody>
-                  <a:tcPr marL="82296" marR="82296" marT="27432" marB="27432" anchor="ctr">
-                    <a:solidFill>
-                      <a:srgbClr val="FFFFFF"/>
-                    </a:solidFill>
-                  </a:tcPr>
-                </a:tc>
-                <a:tc>
-                  <a:txBody>
-                    <a:bodyPr/>
-                    <a:lstStyle/>
-                    <a:p>
-                      <a:pPr algn="r"/>
-                      <a:r>
-                        <a:rPr sz="1200" b="0">
-                          <a:solidFill>
-                            <a:srgbClr val="3C4947"/>
-                          </a:solidFill>
-                          <a:latin typeface="Consolas"/>
-                        </a:rPr>
-                        <a:t>17.99</a:t>
-                      </a:r>
-                    </a:p>
-                  </a:txBody>
-                  <a:tcPr marL="82296" marR="82296" marT="27432" marB="27432" anchor="ctr">
-                    <a:solidFill>
-                      <a:srgbClr val="FFFFFF"/>
-                    </a:solidFill>
-                  </a:tcPr>
-                </a:tc>
-                <a:tc>
-                  <a:txBody>
-                    <a:bodyPr/>
-                    <a:lstStyle/>
-                    <a:p>
-                      <a:pPr algn="r"/>
-                      <a:r>
-                        <a:rPr sz="1200" b="0">
-                          <a:solidFill>
-                            <a:srgbClr val="3C4947"/>
-                          </a:solidFill>
-                          <a:latin typeface="Consolas"/>
-                        </a:rPr>
-                        <a:t>Self-supervised</a:t>
-                      </a:r>
-                    </a:p>
-                  </a:txBody>
-                  <a:tcPr marL="82296" marR="82296" marT="27432" marB="27432" anchor="ctr">
-                    <a:solidFill>
-                      <a:srgbClr val="FFFFFF"/>
-                    </a:solidFill>
-                  </a:tcPr>
-                </a:tc>
-              </a:tr>
-              <a:tr h="274320">
-                <a:tc>
-                  <a:txBody>
-                    <a:bodyPr/>
-                    <a:lstStyle/>
-                    <a:p>
-                      <a:pPr algn="l"/>
-                      <a:r>
-                        <a:rPr sz="1200" b="0">
-                          <a:solidFill>
-                            <a:srgbClr val="3C4947"/>
-                          </a:solidFill>
-                          <a:latin typeface="맑은 고딕"/>
-                        </a:rPr>
-                        <a:t>1일차 supervised → Wiener</a:t>
-                      </a:r>
-                    </a:p>
-                  </a:txBody>
-                  <a:tcPr marL="82296" marR="82296" marT="27432" marB="27432" anchor="ctr">
-                    <a:solidFill>
-                      <a:srgbClr val="FFFFFF"/>
-                    </a:solidFill>
-                  </a:tcPr>
-                </a:tc>
-                <a:tc>
-                  <a:txBody>
-                    <a:bodyPr/>
-                    <a:lstStyle/>
-                    <a:p>
-                      <a:pPr algn="r"/>
-                      <a:r>
-                        <a:rPr sz="1200" b="0">
-                          <a:solidFill>
-                            <a:srgbClr val="3C4947"/>
-                          </a:solidFill>
-                          <a:latin typeface="Consolas"/>
-                        </a:rPr>
-                        <a:t>1일차만</a:t>
-                      </a:r>
-                    </a:p>
-                  </a:txBody>
-                  <a:tcPr marL="82296" marR="82296" marT="27432" marB="27432" anchor="ctr">
-                    <a:solidFill>
-                      <a:srgbClr val="FFFFFF"/>
-                    </a:solidFill>
-                  </a:tcPr>
-                </a:tc>
-                <a:tc>
-                  <a:txBody>
-                    <a:bodyPr/>
-                    <a:lstStyle/>
-                    <a:p>
-                      <a:pPr algn="r"/>
-                      <a:r>
-                        <a:rPr sz="1200" b="0">
-                          <a:solidFill>
-                            <a:srgbClr val="3C4947"/>
-                          </a:solidFill>
-                          <a:latin typeface="Consolas"/>
-                        </a:rPr>
-                        <a:t>21.06</a:t>
-                      </a:r>
-                    </a:p>
-                  </a:txBody>
-                  <a:tcPr marL="82296" marR="82296" marT="27432" marB="27432" anchor="ctr">
-                    <a:solidFill>
-                      <a:srgbClr val="FFFFFF"/>
-                    </a:solidFill>
-                  </a:tcPr>
-                </a:tc>
-                <a:tc>
-                  <a:txBody>
-                    <a:bodyPr/>
-                    <a:lstStyle/>
-                    <a:p>
-                      <a:pPr algn="r"/>
-                      <a:r>
-                        <a:rPr sz="1200" b="0">
-                          <a:solidFill>
-                            <a:srgbClr val="3C4947"/>
-                          </a:solidFill>
-                          <a:latin typeface="Consolas"/>
-                        </a:rPr>
-                        <a:t>Supervised</a:t>
-                      </a:r>
-                    </a:p>
-                  </a:txBody>
-                  <a:tcPr marL="82296" marR="82296" marT="27432" marB="27432" anchor="ctr">
-                    <a:solidFill>
-                      <a:srgbClr val="FFFFFF"/>
-                    </a:solidFill>
-                  </a:tcPr>
-                </a:tc>
-              </a:tr>
-              <a:tr h="274320">
-                <a:tc>
-                  <a:txBody>
-                    <a:bodyPr/>
-                    <a:lstStyle/>
-                    <a:p>
-                      <a:pPr algn="l"/>
-                      <a:r>
-                        <a:rPr sz="1200" b="0">
-                          <a:solidFill>
-                            <a:srgbClr val="3C4947"/>
-                          </a:solidFill>
-                          <a:latin typeface="맑은 고딕"/>
-                        </a:rPr>
-                        <a:t>최종 모델</a:t>
-                      </a:r>
-                    </a:p>
-                  </a:txBody>
-                  <a:tcPr marL="82296" marR="82296" marT="27432" marB="27432" anchor="ctr">
-                    <a:solidFill>
-                      <a:srgbClr val="FFFFFF"/>
-                    </a:solidFill>
-                  </a:tcPr>
-                </a:tc>
-                <a:tc>
-                  <a:txBody>
-                    <a:bodyPr/>
-                    <a:lstStyle/>
-                    <a:p>
-                      <a:pPr algn="r"/>
-                      <a:r>
-                        <a:rPr sz="1200" b="0">
-                          <a:solidFill>
-                            <a:srgbClr val="3C4947"/>
-                          </a:solidFill>
-                          <a:latin typeface="Consolas"/>
-                        </a:rPr>
-                        <a:t>3일차 학습</a:t>
-                      </a:r>
-                    </a:p>
-                  </a:txBody>
-                  <a:tcPr marL="82296" marR="82296" marT="27432" marB="27432" anchor="ctr">
-                    <a:solidFill>
-                      <a:srgbClr val="FFFFFF"/>
-                    </a:solidFill>
-                  </a:tcPr>
-                </a:tc>
-                <a:tc>
-                  <a:txBody>
-                    <a:bodyPr/>
-                    <a:lstStyle/>
-                    <a:p>
-                      <a:pPr algn="r"/>
-                      <a:r>
-                        <a:rPr sz="1200" b="0">
-                          <a:solidFill>
-                            <a:srgbClr val="3C4947"/>
-                          </a:solidFill>
-                          <a:latin typeface="Consolas"/>
-                        </a:rPr>
-                        <a:t>27.50</a:t>
-                      </a:r>
-                    </a:p>
-                  </a:txBody>
-                  <a:tcPr marL="82296" marR="82296" marT="27432" marB="27432" anchor="ctr">
-                    <a:solidFill>
-                      <a:srgbClr val="FFFFFF"/>
-                    </a:solidFill>
-                  </a:tcPr>
-                </a:tc>
-                <a:tc>
-                  <a:txBody>
-                    <a:bodyPr/>
-                    <a:lstStyle/>
-                    <a:p>
-                      <a:pPr algn="r"/>
-                      <a:r>
-                        <a:rPr sz="1200" b="0">
-                          <a:solidFill>
-                            <a:srgbClr val="3C4947"/>
-                          </a:solidFill>
-                          <a:latin typeface="Consolas"/>
-                        </a:rPr>
-                        <a:t>Supervised</a:t>
-                      </a:r>
-                    </a:p>
-                  </a:txBody>
-                  <a:tcPr marL="82296" marR="82296" marT="27432" marB="27432" anchor="ctr">
-                    <a:solidFill>
-                      <a:srgbClr val="FFFFFF"/>
-                    </a:solidFill>
-                  </a:tcPr>
-                </a:tc>
-              </a:tr>
-            </a:tbl>
-          </a:graphicData>
-        </a:graphic>
-      </p:graphicFrame>
-      <p:sp>
-        <p:nvSpPr>
-          <p:cNvPr id="22" name="TextBox 21"/>
-          <p:cNvSpPr txBox="1"/>
-          <p:nvPr/>
-        </p:nvSpPr>
-        <p:spPr>
-          <a:xfrm>
-            <a:off x="640080" y="6355080"/>
-            <a:ext cx="10972800" cy="274320"/>
-          </a:xfrm>
-          <a:prstGeom prst="rect">
-            <a:avLst/>
-          </a:prstGeom>
-          <a:noFill/>
-        </p:spPr>
-        <p:txBody>
-          <a:bodyPr wrap="square" anchor="t">
-            <a:spAutoFit/>
-          </a:bodyPr>
-          <a:lstStyle/>
-          <a:p>
-            <a:pPr algn="l">
-              <a:lnSpc>
-                <a:spcPct val="125000"/>
-              </a:lnSpc>
-            </a:pPr>
-            <a:r>
-              <a:rPr sz="1000" b="0">
-                <a:solidFill>
-                  <a:srgbClr val="66756F"/>
-                </a:solidFill>
-                <a:latin typeface="Consolas"/>
-              </a:rPr>
-              <a:t>label-free 경로는 3일차 정답을 한 장도 쓰지 않는다 — σ 추정도 측정치만 본다</a:t>
+              <a:t>배포 baseline 대비 +4.24 dB · +0.0628 SSIM</a:t>
             </a:r>
           </a:p>
         </p:txBody>
@@ -5462,7 +5509,7 @@
                 </a:solidFill>
                 <a:latin typeface="Consolas"/>
               </a:rPr>
-              <a:t>전체</a:t>
+              <a:t>근거</a:t>
             </a:r>
           </a:p>
         </p:txBody>
@@ -5501,7 +5548,7 @@
                 </a:solidFill>
                 <a:latin typeface="맑은 고딕"/>
               </a:rPr>
-              <a:t>시도별 결과와 개선점</a:t>
+              <a:t>σ 조건화가 성능의 절반을 책임진다</a:t>
             </a:r>
           </a:p>
         </p:txBody>
@@ -5540,7 +5587,7 @@
                 </a:solidFill>
                 <a:latin typeface="맑은 고딕"/>
               </a:rPr>
-              <a:t>한 페이지 요약</a:t>
+              <a:t>가중치는 그대로 두고 σ 입력만 바꿔 잰다 — 학습이 필요 없는 ablation</a:t>
             </a:r>
           </a:p>
         </p:txBody>
@@ -5598,8 +5645,8 @@
           <p:nvPr/>
         </p:nvGraphicFramePr>
         <p:xfrm>
-          <a:off x="548640" y="1554480"/>
-          <a:ext cx="11064240" cy="3291840"/>
+          <a:off x="822960" y="1737360"/>
+          <a:ext cx="10515598" cy="1097280"/>
         </p:xfrm>
         <a:graphic>
           <a:graphicData uri="http://schemas.openxmlformats.org/drawingml/2006/table">
@@ -5608,9 +5655,10 @@
                 <a:tableStyleId>{5C22544A-7EE6-4342-B048-85BDC9FD1C3A}</a:tableStyleId>
               </a:tblPr>
               <a:tblGrid>
-                <a:gridCol w="3291840"/>
-                <a:gridCol w="1371600"/>
-                <a:gridCol w="6400800"/>
+                <a:gridCol w="4779818"/>
+                <a:gridCol w="1720734"/>
+                <a:gridCol w="1720734"/>
+                <a:gridCol w="2294312"/>
               </a:tblGrid>
               <a:tr h="274320">
                 <a:tc>
@@ -5620,13 +5668,13 @@
                     <a:p>
                       <a:pPr algn="l"/>
                       <a:r>
-                        <a:rPr sz="1100" b="1">
+                        <a:rPr sz="1200" b="1">
                           <a:solidFill>
                             <a:srgbClr val="131A19"/>
                           </a:solidFill>
                           <a:latin typeface="맑은 고딕"/>
                         </a:rPr>
-                        <a:t>시도</a:t>
+                        <a:t>σ 를 어떻게 주는가</a:t>
                       </a:r>
                     </a:p>
                   </a:txBody>
@@ -5643,13 +5691,13 @@
                     <a:p>
                       <a:pPr algn="r"/>
                       <a:r>
-                        <a:rPr sz="1100" b="1">
+                        <a:rPr sz="1200" b="1">
                           <a:solidFill>
                             <a:srgbClr val="131A19"/>
                           </a:solidFill>
                           <a:latin typeface="Consolas"/>
                         </a:rPr>
-                        <a:t>결과</a:t>
+                        <a:t>PSNR</a:t>
                       </a:r>
                     </a:p>
                   </a:txBody>
@@ -5666,13 +5714,36 @@
                     <a:p>
                       <a:pPr algn="r"/>
                       <a:r>
-                        <a:rPr sz="1100" b="1">
+                        <a:rPr sz="1200" b="1">
                           <a:solidFill>
                             <a:srgbClr val="131A19"/>
                           </a:solidFill>
                           <a:latin typeface="Consolas"/>
                         </a:rPr>
-                        <a:t>왜 그랬나 / 무엇을 배웠나</a:t>
+                        <a:t>SSIM</a:t>
+                      </a:r>
+                    </a:p>
+                  </a:txBody>
+                  <a:tcPr marL="82296" marR="82296" marT="27432" marB="27432" anchor="ctr">
+                    <a:solidFill>
+                      <a:srgbClr val="DCEDE8"/>
+                    </a:solidFill>
+                  </a:tcPr>
+                </a:tc>
+                <a:tc>
+                  <a:txBody>
+                    <a:bodyPr/>
+                    <a:lstStyle/>
+                    <a:p>
+                      <a:pPr algn="r"/>
+                      <a:r>
+                        <a:rPr sz="1200" b="1">
+                          <a:solidFill>
+                            <a:srgbClr val="131A19"/>
+                          </a:solidFill>
+                          <a:latin typeface="Consolas"/>
+                        </a:rPr>
+                        <a:t>손실</a:t>
                       </a:r>
                     </a:p>
                   </a:txBody>
@@ -5691,19 +5762,19 @@
                     <a:p>
                       <a:pPr algn="l"/>
                       <a:r>
-                        <a:rPr sz="1100" b="0">
-                          <a:solidFill>
-                            <a:srgbClr val="3C4947"/>
+                        <a:rPr sz="1200" b="1">
+                          <a:solidFill>
+                            <a:srgbClr val="131A19"/>
                           </a:solidFill>
                           <a:latin typeface="맑은 고딕"/>
                         </a:rPr>
-                        <a:t>2일차 답(K→0)을 그대로</a:t>
-                      </a:r>
-                    </a:p>
-                  </a:txBody>
-                  <a:tcPr marL="82296" marR="82296" marT="27432" marB="27432" anchor="ctr">
-                    <a:solidFill>
-                      <a:srgbClr val="FFFFFF"/>
+                        <a:t>추정 σ (정상)</a:t>
+                      </a:r>
+                    </a:p>
+                  </a:txBody>
+                  <a:tcPr marL="82296" marR="82296" marT="27432" marB="27432" anchor="ctr">
+                    <a:solidFill>
+                      <a:srgbClr val="ECF5F2"/>
                     </a:solidFill>
                   </a:tcPr>
                 </a:tc>
@@ -5714,19 +5785,19 @@
                     <a:p>
                       <a:pPr algn="r"/>
                       <a:r>
-                        <a:rPr sz="1100" b="0">
-                          <a:solidFill>
-                            <a:srgbClr val="3C4947"/>
+                        <a:rPr sz="1200" b="1">
+                          <a:solidFill>
+                            <a:srgbClr val="131A19"/>
                           </a:solidFill>
                           <a:latin typeface="Consolas"/>
                         </a:rPr>
-                        <a:t>−24 dB</a:t>
-                      </a:r>
-                    </a:p>
-                  </a:txBody>
-                  <a:tcPr marL="82296" marR="82296" marT="27432" marB="27432" anchor="ctr">
-                    <a:solidFill>
-                      <a:srgbClr val="FFFFFF"/>
+                        <a:t>29.25</a:t>
+                      </a:r>
+                    </a:p>
+                  </a:txBody>
+                  <a:tcPr marL="82296" marR="82296" marT="27432" marB="27432" anchor="ctr">
+                    <a:solidFill>
+                      <a:srgbClr val="ECF5F2"/>
                     </a:solidFill>
                   </a:tcPr>
                 </a:tc>
@@ -5737,19 +5808,42 @@
                     <a:p>
                       <a:pPr algn="r"/>
                       <a:r>
-                        <a:rPr sz="1100" b="0">
-                          <a:solidFill>
-                            <a:srgbClr val="3C4947"/>
+                        <a:rPr sz="1200" b="1">
+                          <a:solidFill>
+                            <a:srgbClr val="131A19"/>
                           </a:solidFill>
                           <a:latin typeface="Consolas"/>
                         </a:rPr>
-                        <a:t>노이즈를 +51.5 dB 증폭. n=0 이라 통했던 답이다</a:t>
-                      </a:r>
-                    </a:p>
-                  </a:txBody>
-                  <a:tcPr marL="82296" marR="82296" marT="27432" marB="27432" anchor="ctr">
-                    <a:solidFill>
-                      <a:srgbClr val="FFFFFF"/>
+                        <a:t>0.8777</a:t>
+                      </a:r>
+                    </a:p>
+                  </a:txBody>
+                  <a:tcPr marL="82296" marR="82296" marT="27432" marB="27432" anchor="ctr">
+                    <a:solidFill>
+                      <a:srgbClr val="ECF5F2"/>
+                    </a:solidFill>
+                  </a:tcPr>
+                </a:tc>
+                <a:tc>
+                  <a:txBody>
+                    <a:bodyPr/>
+                    <a:lstStyle/>
+                    <a:p>
+                      <a:pPr algn="r"/>
+                      <a:r>
+                        <a:rPr sz="1200" b="1">
+                          <a:solidFill>
+                            <a:srgbClr val="131A19"/>
+                          </a:solidFill>
+                          <a:latin typeface="Consolas"/>
+                        </a:rPr>
+                        <a:t>—</a:t>
+                      </a:r>
+                    </a:p>
+                  </a:txBody>
+                  <a:tcPr marL="82296" marR="82296" marT="27432" marB="27432" anchor="ctr">
+                    <a:solidFill>
+                      <a:srgbClr val="ECF5F2"/>
                     </a:solidFill>
                   </a:tcPr>
                 </a:tc>
@@ -5762,13 +5856,13 @@
                     <a:p>
                       <a:pPr algn="l"/>
                       <a:r>
-                        <a:rPr sz="1100" b="0">
+                        <a:rPr sz="1200" b="0">
                           <a:solidFill>
                             <a:srgbClr val="3C4947"/>
                           </a:solidFill>
                           <a:latin typeface="맑은 고딕"/>
                         </a:rPr>
-                        <a:t>Wiener 단독 (K 는 val 에서)</a:t>
+                        <a:t>σ = 0 (없다고 알려줌)</a:t>
                       </a:r>
                     </a:p>
                   </a:txBody>
@@ -5785,13 +5879,13 @@
                     <a:p>
                       <a:pPr algn="r"/>
                       <a:r>
-                        <a:rPr sz="1100" b="0">
+                        <a:rPr sz="1200" b="0">
                           <a:solidFill>
                             <a:srgbClr val="3C4947"/>
                           </a:solidFill>
                           <a:latin typeface="Consolas"/>
                         </a:rPr>
-                        <a:t>13.79</a:t>
+                        <a:t>15.64</a:t>
                       </a:r>
                     </a:p>
                   </a:txBody>
@@ -5808,13 +5902,36 @@
                     <a:p>
                       <a:pPr algn="r"/>
                       <a:r>
-                        <a:rPr sz="1100" b="0">
+                        <a:rPr sz="1200" b="0">
                           <a:solidFill>
                             <a:srgbClr val="3C4947"/>
                           </a:solidFill>
                           <a:latin typeface="Consolas"/>
                         </a:rPr>
-                        <a:t>선형 역산의 한계. 정보를 버려야 노이즈가 잡힌다</a:t>
+                        <a:t>0.3948</a:t>
+                      </a:r>
+                    </a:p>
+                  </a:txBody>
+                  <a:tcPr marL="82296" marR="82296" marT="27432" marB="27432" anchor="ctr">
+                    <a:solidFill>
+                      <a:srgbClr val="FFFFFF"/>
+                    </a:solidFill>
+                  </a:tcPr>
+                </a:tc>
+                <a:tc>
+                  <a:txBody>
+                    <a:bodyPr/>
+                    <a:lstStyle/>
+                    <a:p>
+                      <a:pPr algn="r"/>
+                      <a:r>
+                        <a:rPr sz="1200" b="0">
+                          <a:solidFill>
+                            <a:srgbClr val="3C4947"/>
+                          </a:solidFill>
+                          <a:latin typeface="Consolas"/>
+                        </a:rPr>
+                        <a:t>-13.61 dB</a:t>
                       </a:r>
                     </a:p>
                   </a:txBody>
@@ -5833,13 +5950,13 @@
                     <a:p>
                       <a:pPr algn="l"/>
                       <a:r>
-                        <a:rPr sz="1100" b="0">
+                        <a:rPr sz="1200" b="0">
                           <a:solidFill>
                             <a:srgbClr val="3C4947"/>
                           </a:solidFill>
                           <a:latin typeface="맑은 고딕"/>
                         </a:rPr>
-                        <a:t>DC-Net (2일차 최고 구조)</a:t>
+                        <a:t>σ 2배 (과대평가)</a:t>
                       </a:r>
                     </a:p>
                   </a:txBody>
@@ -5856,13 +5973,13 @@
                     <a:p>
                       <a:pPr algn="r"/>
                       <a:r>
-                        <a:rPr sz="1100" b="0">
+                        <a:rPr sz="1200" b="0">
                           <a:solidFill>
                             <a:srgbClr val="3C4947"/>
                           </a:solidFill>
                           <a:latin typeface="Consolas"/>
                         </a:rPr>
-                        <a:t>14.80</a:t>
+                        <a:t>22.45</a:t>
                       </a:r>
                     </a:p>
                   </a:txBody>
@@ -5879,13 +5996,13 @@
                     <a:p>
                       <a:pPr algn="r"/>
                       <a:r>
-                        <a:rPr sz="1100" b="0">
+                        <a:rPr sz="1200" b="0">
                           <a:solidFill>
                             <a:srgbClr val="3C4947"/>
                           </a:solidFill>
                           <a:latin typeface="Consolas"/>
                         </a:rPr>
-                        <a:t>hard DC 가 G/D=F+N/D 를 못박는다. 좋은 τ 가 없다</a:t>
+                        <a:t>0.7845</a:t>
                       </a:r>
                     </a:p>
                   </a:txBody>
@@ -5895,571 +6012,26 @@
                     </a:solidFill>
                   </a:tcPr>
                 </a:tc>
-              </a:tr>
-              <a:tr h="274320">
-                <a:tc>
-                  <a:txBody>
-                    <a:bodyPr/>
-                    <a:lstStyle/>
-                    <a:p>
-                      <a:pPr algn="l"/>
-                      <a:r>
-                        <a:rPr sz="1100" b="0">
+                <a:tc>
+                  <a:txBody>
+                    <a:bodyPr/>
+                    <a:lstStyle/>
+                    <a:p>
+                      <a:pPr algn="r"/>
+                      <a:r>
+                        <a:rPr sz="1200" b="0">
                           <a:solidFill>
                             <a:srgbClr val="3C4947"/>
                           </a:solidFill>
-                          <a:latin typeface="맑은 고딕"/>
-                        </a:rPr>
-                        <a:t>Wiener → 디노이저</a:t>
+                          <a:latin typeface="Consolas"/>
+                        </a:rPr>
+                        <a:t>-6.80 dB</a:t>
                       </a:r>
                     </a:p>
                   </a:txBody>
                   <a:tcPr marL="82296" marR="82296" marT="27432" marB="27432" anchor="ctr">
                     <a:solidFill>
                       <a:srgbClr val="FFFFFF"/>
-                    </a:solidFill>
-                  </a:tcPr>
-                </a:tc>
-                <a:tc>
-                  <a:txBody>
-                    <a:bodyPr/>
-                    <a:lstStyle/>
-                    <a:p>
-                      <a:pPr algn="r"/>
-                      <a:r>
-                        <a:rPr sz="1100" b="0">
-                          <a:solidFill>
-                            <a:srgbClr val="3C4947"/>
-                          </a:solidFill>
-                          <a:latin typeface="Consolas"/>
-                        </a:rPr>
-                        <a:t>16.88</a:t>
-                      </a:r>
-                    </a:p>
-                  </a:txBody>
-                  <a:tcPr marL="82296" marR="82296" marT="27432" marB="27432" anchor="ctr">
-                    <a:solidFill>
-                      <a:srgbClr val="FFFFFF"/>
-                    </a:solidFill>
-                  </a:tcPr>
-                </a:tc>
-                <a:tc>
-                  <a:txBody>
-                    <a:bodyPr/>
-                    <a:lstStyle/>
-                    <a:p>
-                      <a:pPr algn="r"/>
-                      <a:r>
-                        <a:rPr sz="1100" b="0">
-                          <a:solidFill>
-                            <a:srgbClr val="3C4947"/>
-                          </a:solidFill>
-                          <a:latin typeface="Consolas"/>
-                        </a:rPr>
-                        <a:t>순서가 반대. 역산이 노이즈를 유색으로 만든다</a:t>
-                      </a:r>
-                    </a:p>
-                  </a:txBody>
-                  <a:tcPr marL="82296" marR="82296" marT="27432" marB="27432" anchor="ctr">
-                    <a:solidFill>
-                      <a:srgbClr val="FFFFFF"/>
-                    </a:solidFill>
-                  </a:tcPr>
-                </a:tc>
-              </a:tr>
-              <a:tr h="274320">
-                <a:tc>
-                  <a:txBody>
-                    <a:bodyPr/>
-                    <a:lstStyle/>
-                    <a:p>
-                      <a:pPr algn="l"/>
-                      <a:r>
-                        <a:rPr sz="1100" b="0">
-                          <a:solidFill>
-                            <a:srgbClr val="3C4947"/>
-                          </a:solidFill>
-                          <a:latin typeface="맑은 고딕"/>
-                        </a:rPr>
-                        <a:t>median → Wiener</a:t>
-                      </a:r>
-                    </a:p>
-                  </a:txBody>
-                  <a:tcPr marL="82296" marR="82296" marT="27432" marB="27432" anchor="ctr">
-                    <a:solidFill>
-                      <a:srgbClr val="FFFFFF"/>
-                    </a:solidFill>
-                  </a:tcPr>
-                </a:tc>
-                <a:tc>
-                  <a:txBody>
-                    <a:bodyPr/>
-                    <a:lstStyle/>
-                    <a:p>
-                      <a:pPr algn="r"/>
-                      <a:r>
-                        <a:rPr sz="1100" b="0">
-                          <a:solidFill>
-                            <a:srgbClr val="3C4947"/>
-                          </a:solidFill>
-                          <a:latin typeface="Consolas"/>
-                        </a:rPr>
-                        <a:t>19.20</a:t>
-                      </a:r>
-                    </a:p>
-                  </a:txBody>
-                  <a:tcPr marL="82296" marR="82296" marT="27432" marB="27432" anchor="ctr">
-                    <a:solidFill>
-                      <a:srgbClr val="FFFFFF"/>
-                    </a:solidFill>
-                  </a:tcPr>
-                </a:tc>
-                <a:tc>
-                  <a:txBody>
-                    <a:bodyPr/>
-                    <a:lstStyle/>
-                    <a:p>
-                      <a:pPr algn="r"/>
-                      <a:r>
-                        <a:rPr sz="1100" b="0">
-                          <a:solidFill>
-                            <a:srgbClr val="3C4947"/>
-                          </a:solidFill>
-                          <a:latin typeface="Consolas"/>
-                        </a:rPr>
-                        <a:t>s&amp;p 에서만 딥러닝을 이긴다 (23.23)</a:t>
-                      </a:r>
-                    </a:p>
-                  </a:txBody>
-                  <a:tcPr marL="82296" marR="82296" marT="27432" marB="27432" anchor="ctr">
-                    <a:solidFill>
-                      <a:srgbClr val="FFFFFF"/>
-                    </a:solidFill>
-                  </a:tcPr>
-                </a:tc>
-              </a:tr>
-              <a:tr h="274320">
-                <a:tc>
-                  <a:txBody>
-                    <a:bodyPr/>
-                    <a:lstStyle/>
-                    <a:p>
-                      <a:pPr algn="l"/>
-                      <a:r>
-                        <a:rPr sz="1100" b="0">
-                          <a:solidFill>
-                            <a:srgbClr val="3C4947"/>
-                          </a:solidFill>
-                          <a:latin typeface="맑은 고딕"/>
-                        </a:rPr>
-                        <a:t>1일차 디노이저 → Wiener</a:t>
-                      </a:r>
-                    </a:p>
-                  </a:txBody>
-                  <a:tcPr marL="82296" marR="82296" marT="27432" marB="27432" anchor="ctr">
-                    <a:solidFill>
-                      <a:srgbClr val="FFFFFF"/>
-                    </a:solidFill>
-                  </a:tcPr>
-                </a:tc>
-                <a:tc>
-                  <a:txBody>
-                    <a:bodyPr/>
-                    <a:lstStyle/>
-                    <a:p>
-                      <a:pPr algn="r"/>
-                      <a:r>
-                        <a:rPr sz="1100" b="0">
-                          <a:solidFill>
-                            <a:srgbClr val="3C4947"/>
-                          </a:solidFill>
-                          <a:latin typeface="Consolas"/>
-                        </a:rPr>
-                        <a:t>21.06</a:t>
-                      </a:r>
-                    </a:p>
-                  </a:txBody>
-                  <a:tcPr marL="82296" marR="82296" marT="27432" marB="27432" anchor="ctr">
-                    <a:solidFill>
-                      <a:srgbClr val="FFFFFF"/>
-                    </a:solidFill>
-                  </a:tcPr>
-                </a:tc>
-                <a:tc>
-                  <a:txBody>
-                    <a:bodyPr/>
-                    <a:lstStyle/>
-                    <a:p>
-                      <a:pPr algn="r"/>
-                      <a:r>
-                        <a:rPr sz="1100" b="0">
-                          <a:solidFill>
-                            <a:srgbClr val="3C4947"/>
-                          </a:solidFill>
-                          <a:latin typeface="Consolas"/>
-                        </a:rPr>
-                        <a:t>오라클 선형(19.80)을 넘었다. 비선형이 필요하다는 증거</a:t>
-                      </a:r>
-                    </a:p>
-                  </a:txBody>
-                  <a:tcPr marL="82296" marR="82296" marT="27432" marB="27432" anchor="ctr">
-                    <a:solidFill>
-                      <a:srgbClr val="FFFFFF"/>
-                    </a:solidFill>
-                  </a:tcPr>
-                </a:tc>
-              </a:tr>
-              <a:tr h="274320">
-                <a:tc>
-                  <a:txBody>
-                    <a:bodyPr/>
-                    <a:lstStyle/>
-                    <a:p>
-                      <a:pPr algn="l"/>
-                      <a:r>
-                        <a:rPr sz="1100" b="0">
-                          <a:solidFill>
-                            <a:srgbClr val="3C4947"/>
-                          </a:solidFill>
-                          <a:latin typeface="맑은 고딕"/>
-                        </a:rPr>
-                        <a:t>전개형 (unet f32, blind)</a:t>
-                      </a:r>
-                    </a:p>
-                  </a:txBody>
-                  <a:tcPr marL="82296" marR="82296" marT="27432" marB="27432" anchor="ctr">
-                    <a:solidFill>
-                      <a:srgbClr val="FFFFFF"/>
-                    </a:solidFill>
-                  </a:tcPr>
-                </a:tc>
-                <a:tc>
-                  <a:txBody>
-                    <a:bodyPr/>
-                    <a:lstStyle/>
-                    <a:p>
-                      <a:pPr algn="r"/>
-                      <a:r>
-                        <a:rPr sz="1100" b="0">
-                          <a:solidFill>
-                            <a:srgbClr val="3C4947"/>
-                          </a:solidFill>
-                          <a:latin typeface="Consolas"/>
-                        </a:rPr>
-                        <a:t>25.91</a:t>
-                      </a:r>
-                    </a:p>
-                  </a:txBody>
-                  <a:tcPr marL="82296" marR="82296" marT="27432" marB="27432" anchor="ctr">
-                    <a:solidFill>
-                      <a:srgbClr val="FFFFFF"/>
-                    </a:solidFill>
-                  </a:tcPr>
-                </a:tc>
-                <a:tc>
-                  <a:txBody>
-                    <a:bodyPr/>
-                    <a:lstStyle/>
-                    <a:p>
-                      <a:pPr algn="r"/>
-                      <a:r>
-                        <a:rPr sz="1100" b="0">
-                          <a:solidFill>
-                            <a:srgbClr val="3C4947"/>
-                          </a:solidFill>
-                          <a:latin typeface="Consolas"/>
-                        </a:rPr>
-                        <a:t>ep37 정체. 용량과 조건화가 병목이지 학습량이 아니다</a:t>
-                      </a:r>
-                    </a:p>
-                  </a:txBody>
-                  <a:tcPr marL="82296" marR="82296" marT="27432" marB="27432" anchor="ctr">
-                    <a:solidFill>
-                      <a:srgbClr val="FFFFFF"/>
-                    </a:solidFill>
-                  </a:tcPr>
-                </a:tc>
-              </a:tr>
-              <a:tr h="274320">
-                <a:tc>
-                  <a:txBody>
-                    <a:bodyPr/>
-                    <a:lstStyle/>
-                    <a:p>
-                      <a:pPr algn="l"/>
-                      <a:r>
-                        <a:rPr sz="1100" b="0">
-                          <a:solidFill>
-                            <a:srgbClr val="3C4947"/>
-                          </a:solidFill>
-                          <a:latin typeface="맑은 고딕"/>
-                        </a:rPr>
-                        <a:t>End2End U-Net f64</a:t>
-                      </a:r>
-                    </a:p>
-                  </a:txBody>
-                  <a:tcPr marL="82296" marR="82296" marT="27432" marB="27432" anchor="ctr">
-                    <a:solidFill>
-                      <a:srgbClr val="FFFFFF"/>
-                    </a:solidFill>
-                  </a:tcPr>
-                </a:tc>
-                <a:tc>
-                  <a:txBody>
-                    <a:bodyPr/>
-                    <a:lstStyle/>
-                    <a:p>
-                      <a:pPr algn="r"/>
-                      <a:r>
-                        <a:rPr sz="1100" b="0">
-                          <a:solidFill>
-                            <a:srgbClr val="3C4947"/>
-                          </a:solidFill>
-                          <a:latin typeface="Consolas"/>
-                        </a:rPr>
-                        <a:t>25.99</a:t>
-                      </a:r>
-                    </a:p>
-                  </a:txBody>
-                  <a:tcPr marL="82296" marR="82296" marT="27432" marB="27432" anchor="ctr">
-                    <a:solidFill>
-                      <a:srgbClr val="FFFFFF"/>
-                    </a:solidFill>
-                  </a:tcPr>
-                </a:tc>
-                <a:tc>
-                  <a:txBody>
-                    <a:bodyPr/>
-                    <a:lstStyle/>
-                    <a:p>
-                      <a:pPr algn="r"/>
-                      <a:r>
-                        <a:rPr sz="1100" b="0">
-                          <a:solidFill>
-                            <a:srgbClr val="3C4947"/>
-                          </a:solidFill>
-                          <a:latin typeface="Consolas"/>
-                        </a:rPr>
-                        <a:t>전개형과 비슷 — 물리 구조만으로는 이득이 없었다</a:t>
-                      </a:r>
-                    </a:p>
-                  </a:txBody>
-                  <a:tcPr marL="82296" marR="82296" marT="27432" marB="27432" anchor="ctr">
-                    <a:solidFill>
-                      <a:srgbClr val="FFFFFF"/>
-                    </a:solidFill>
-                  </a:tcPr>
-                </a:tc>
-              </a:tr>
-              <a:tr h="274320">
-                <a:tc>
-                  <a:txBody>
-                    <a:bodyPr/>
-                    <a:lstStyle/>
-                    <a:p>
-                      <a:pPr algn="l"/>
-                      <a:r>
-                        <a:rPr sz="1100" b="0">
-                          <a:solidFill>
-                            <a:srgbClr val="3C4947"/>
-                          </a:solidFill>
-                          <a:latin typeface="맑은 고딕"/>
-                        </a:rPr>
-                        <a:t>2단 분해 (측정치 영역 → 역필터)</a:t>
-                      </a:r>
-                    </a:p>
-                  </a:txBody>
-                  <a:tcPr marL="82296" marR="82296" marT="27432" marB="27432" anchor="ctr">
-                    <a:solidFill>
-                      <a:srgbClr val="FFFFFF"/>
-                    </a:solidFill>
-                  </a:tcPr>
-                </a:tc>
-                <a:tc>
-                  <a:txBody>
-                    <a:bodyPr/>
-                    <a:lstStyle/>
-                    <a:p>
-                      <a:pPr algn="r"/>
-                      <a:r>
-                        <a:rPr sz="1100" b="0">
-                          <a:solidFill>
-                            <a:srgbClr val="3C4947"/>
-                          </a:solidFill>
-                          <a:latin typeface="Consolas"/>
-                        </a:rPr>
-                        <a:t>15.6</a:t>
-                      </a:r>
-                    </a:p>
-                  </a:txBody>
-                  <a:tcPr marL="82296" marR="82296" marT="27432" marB="27432" anchor="ctr">
-                    <a:solidFill>
-                      <a:srgbClr val="FFFFFF"/>
-                    </a:solidFill>
-                  </a:tcPr>
-                </a:tc>
-                <a:tc>
-                  <a:txBody>
-                    <a:bodyPr/>
-                    <a:lstStyle/>
-                    <a:p>
-                      <a:pPr algn="r"/>
-                      <a:r>
-                        <a:rPr sz="1100" b="0">
-                          <a:solidFill>
-                            <a:srgbClr val="3C4947"/>
-                          </a:solidFill>
-                          <a:latin typeface="Consolas"/>
-                        </a:rPr>
-                        <a:t>실패. 역필터가 오차를 1/D 로 증폭해 40 dB 디노이징을 요구한다</a:t>
-                      </a:r>
-                    </a:p>
-                  </a:txBody>
-                  <a:tcPr marL="82296" marR="82296" marT="27432" marB="27432" anchor="ctr">
-                    <a:solidFill>
-                      <a:srgbClr val="FFFFFF"/>
-                    </a:solidFill>
-                  </a:tcPr>
-                </a:tc>
-              </a:tr>
-              <a:tr h="274320">
-                <a:tc>
-                  <a:txBody>
-                    <a:bodyPr/>
-                    <a:lstStyle/>
-                    <a:p>
-                      <a:pPr algn="l"/>
-                      <a:r>
-                        <a:rPr sz="1100" b="0">
-                          <a:solidFill>
-                            <a:srgbClr val="3C4947"/>
-                          </a:solidFill>
-                          <a:latin typeface="맑은 고딕"/>
-                        </a:rPr>
-                        <a:t>전개형 + DRUNet + σ 조건화</a:t>
-                      </a:r>
-                    </a:p>
-                  </a:txBody>
-                  <a:tcPr marL="82296" marR="82296" marT="27432" marB="27432" anchor="ctr">
-                    <a:solidFill>
-                      <a:srgbClr val="FFFFFF"/>
-                    </a:solidFill>
-                  </a:tcPr>
-                </a:tc>
-                <a:tc>
-                  <a:txBody>
-                    <a:bodyPr/>
-                    <a:lstStyle/>
-                    <a:p>
-                      <a:pPr algn="r"/>
-                      <a:r>
-                        <a:rPr sz="1100" b="0">
-                          <a:solidFill>
-                            <a:srgbClr val="3C4947"/>
-                          </a:solidFill>
-                          <a:latin typeface="Consolas"/>
-                        </a:rPr>
-                        <a:t>26.85</a:t>
-                      </a:r>
-                    </a:p>
-                  </a:txBody>
-                  <a:tcPr marL="82296" marR="82296" marT="27432" marB="27432" anchor="ctr">
-                    <a:solidFill>
-                      <a:srgbClr val="FFFFFF"/>
-                    </a:solidFill>
-                  </a:tcPr>
-                </a:tc>
-                <a:tc>
-                  <a:txBody>
-                    <a:bodyPr/>
-                    <a:lstStyle/>
-                    <a:p>
-                      <a:pPr algn="r"/>
-                      <a:r>
-                        <a:rPr sz="1100" b="0">
-                          <a:solidFill>
-                            <a:srgbClr val="3C4947"/>
-                          </a:solidFill>
-                          <a:latin typeface="Consolas"/>
-                        </a:rPr>
-                        <a:t>σ 200배 차이를 흡수. PSNR 통과, SSIM 0.77 로 미달</a:t>
-                      </a:r>
-                    </a:p>
-                  </a:txBody>
-                  <a:tcPr marL="82296" marR="82296" marT="27432" marB="27432" anchor="ctr">
-                    <a:solidFill>
-                      <a:srgbClr val="FFFFFF"/>
-                    </a:solidFill>
-                  </a:tcPr>
-                </a:tc>
-              </a:tr>
-              <a:tr h="274320">
-                <a:tc>
-                  <a:txBody>
-                    <a:bodyPr/>
-                    <a:lstStyle/>
-                    <a:p>
-                      <a:pPr algn="l"/>
-                      <a:r>
-                        <a:rPr sz="1100" b="1">
-                          <a:solidFill>
-                            <a:srgbClr val="131A19"/>
-                          </a:solidFill>
-                          <a:latin typeface="맑은 고딕"/>
-                        </a:rPr>
-                        <a:t>+ 채점 SSIM 을 손실에</a:t>
-                      </a:r>
-                    </a:p>
-                  </a:txBody>
-                  <a:tcPr marL="82296" marR="82296" marT="27432" marB="27432" anchor="ctr">
-                    <a:solidFill>
-                      <a:srgbClr val="ECF5F2"/>
-                    </a:solidFill>
-                  </a:tcPr>
-                </a:tc>
-                <a:tc>
-                  <a:txBody>
-                    <a:bodyPr/>
-                    <a:lstStyle/>
-                    <a:p>
-                      <a:pPr algn="r"/>
-                      <a:r>
-                        <a:rPr sz="1100" b="1">
-                          <a:solidFill>
-                            <a:srgbClr val="131A19"/>
-                          </a:solidFill>
-                          <a:latin typeface="Consolas"/>
-                        </a:rPr>
-                        <a:t>27.50</a:t>
-                      </a:r>
-                    </a:p>
-                  </a:txBody>
-                  <a:tcPr marL="82296" marR="82296" marT="27432" marB="27432" anchor="ctr">
-                    <a:solidFill>
-                      <a:srgbClr val="ECF5F2"/>
-                    </a:solidFill>
-                  </a:tcPr>
-                </a:tc>
-                <a:tc>
-                  <a:txBody>
-                    <a:bodyPr/>
-                    <a:lstStyle/>
-                    <a:p>
-                      <a:pPr algn="r"/>
-                      <a:r>
-                        <a:rPr sz="1100" b="1">
-                          <a:solidFill>
-                            <a:srgbClr val="131A19"/>
-                          </a:solidFill>
-                          <a:latin typeface="Consolas"/>
-                        </a:rPr>
-                        <a:t>L1 은 뭉개는 쪽으로 수렴한다. 채점 함수를 그대로 미분했다</a:t>
-                      </a:r>
-                    </a:p>
-                  </a:txBody>
-                  <a:tcPr marL="82296" marR="82296" marT="27432" marB="27432" anchor="ctr">
-                    <a:solidFill>
-                      <a:srgbClr val="ECF5F2"/>
                     </a:solidFill>
                   </a:tcPr>
                 </a:tc>
@@ -6470,14 +6042,62 @@
       </p:graphicFrame>
       <p:sp>
         <p:nvSpPr>
-          <p:cNvPr id="7" name="TextBox 6"/>
+          <p:cNvPr id="7" name="Rounded Rectangle 6"/>
+          <p:cNvSpPr/>
+          <p:nvPr/>
+        </p:nvSpPr>
+        <p:spPr>
+          <a:xfrm>
+            <a:off x="822960" y="3840480"/>
+            <a:ext cx="10515600" cy="1828800"/>
+          </a:xfrm>
+          <a:prstGeom prst="roundRect">
+            <a:avLst>
+              <a:gd name="adj" fmla="val 4000"/>
+            </a:avLst>
+          </a:prstGeom>
+          <a:solidFill>
+            <a:srgbClr val="DCEDE8"/>
+          </a:solidFill>
+          <a:ln w="9525">
+            <a:solidFill>
+              <a:srgbClr val="0B6E5E"/>
+            </a:solidFill>
+          </a:ln>
+          <a:effectLst/>
+        </p:spPr>
+        <p:style>
+          <a:lnRef idx="1">
+            <a:schemeClr val="accent1"/>
+          </a:lnRef>
+          <a:fillRef idx="3">
+            <a:schemeClr val="accent1"/>
+          </a:fillRef>
+          <a:effectRef idx="2">
+            <a:schemeClr val="accent1"/>
+          </a:effectRef>
+          <a:fontRef idx="minor">
+            <a:schemeClr val="lt1"/>
+          </a:fontRef>
+        </p:style>
+        <p:txBody>
+          <a:bodyPr rtlCol="0" anchor="ctr"/>
+          <a:lstStyle/>
+          <a:p>
+            <a:pPr algn="ctr"/>
+          </a:p>
+        </p:txBody>
+      </p:sp>
+      <p:sp>
+        <p:nvSpPr>
+          <p:cNvPr id="8" name="TextBox 7"/>
           <p:cNvSpPr txBox="1"/>
           <p:nvPr/>
         </p:nvSpPr>
         <p:spPr>
           <a:xfrm>
-            <a:off x="640080" y="6355080"/>
-            <a:ext cx="10972800" cy="274320"/>
+            <a:off x="1097280" y="4069080"/>
+            <a:ext cx="10058400" cy="1554480"/>
           </a:xfrm>
           <a:prstGeom prst="rect">
             <a:avLst/>
@@ -6496,13 +6116,61 @@
               </a:lnSpc>
             </a:pPr>
             <a:r>
-              <a:rPr sz="1000" b="0">
+              <a:rPr sz="1300" b="1">
                 <a:solidFill>
-                  <a:srgbClr val="66756F"/>
+                  <a:srgbClr val="131A19"/>
                 </a:solidFill>
-                <a:latin typeface="Consolas"/>
+                <a:latin typeface="맑은 고딕"/>
               </a:rPr>
-              <a:t>K·λ 는 전부 validation 에서 골랐다. test 는 채점에만 썼다</a:t>
+              <a:t>σ 를 0 이라고 알려주면 29.25 에서 15.64 로 무너진다.</a:t>
+            </a:r>
+          </a:p>
+          <a:p>
+            <a:pPr algn="l">
+              <a:lnSpc>
+                <a:spcPct val="125000"/>
+              </a:lnSpc>
+            </a:pPr>
+            <a:r>
+              <a:rPr sz="1300" b="0">
+                <a:solidFill>
+                  <a:srgbClr val="3C4947"/>
+                </a:solidFill>
+                <a:latin typeface="맑은 고딕"/>
+              </a:rPr>
+              <a:t/>
+            </a:r>
+          </a:p>
+          <a:p>
+            <a:pPr algn="l">
+              <a:lnSpc>
+                <a:spcPct val="125000"/>
+              </a:lnSpc>
+            </a:pPr>
+            <a:r>
+              <a:rPr sz="1300" b="0">
+                <a:solidFill>
+                  <a:srgbClr val="3C4947"/>
+                </a:solidFill>
+                <a:latin typeface="맑은 고딕"/>
+              </a:rPr>
+              <a:t>σ 는 |D| &lt; 0.02 인 주파수에서 읽는다. 거기엔 dipole 이 신호를 보내지 않으므로 남은 것은 전부 노이즈다.</a:t>
+            </a:r>
+          </a:p>
+          <a:p>
+            <a:pPr algn="l">
+              <a:lnSpc>
+                <a:spcPct val="125000"/>
+              </a:lnSpc>
+            </a:pPr>
+            <a:r>
+              <a:rPr sz="1300" b="0">
+                <a:solidFill>
+                  <a:srgbClr val="3C4947"/>
+                </a:solidFill>
+                <a:latin typeface="맑은 고딕"/>
+              </a:rPr>
+              <a:t>정답도 noise_meta.json 도 쓰지 않는다 — 측정치 하나에서 나온다. 3일차 σ 는 장마다 200배 차이난다.</a:t>
             </a:r>
           </a:p>
         </p:txBody>
@@ -6567,6 +6235,2611 @@
                 </a:solidFill>
                 <a:latin typeface="Consolas"/>
               </a:rPr>
+              <a:t>요구사항 4</a:t>
+            </a:r>
+          </a:p>
+        </p:txBody>
+      </p:sp>
+      <p:sp>
+        <p:nvSpPr>
+          <p:cNvPr id="3" name="TextBox 2"/>
+          <p:cNvSpPr txBox="1"/>
+          <p:nvPr/>
+        </p:nvSpPr>
+        <p:spPr>
+          <a:xfrm>
+            <a:off x="640080" y="713232"/>
+            <a:ext cx="10972800" cy="548640"/>
+          </a:xfrm>
+          <a:prstGeom prst="rect">
+            <a:avLst/>
+          </a:prstGeom>
+          <a:noFill/>
+        </p:spPr>
+        <p:txBody>
+          <a:bodyPr wrap="square" anchor="t">
+            <a:spAutoFit/>
+          </a:bodyPr>
+          <a:lstStyle/>
+          <a:p>
+            <a:pPr algn="l">
+              <a:lnSpc>
+                <a:spcPct val="125000"/>
+              </a:lnSpc>
+            </a:pPr>
+            <a:r>
+              <a:rPr sz="3000" b="1">
+                <a:solidFill>
+                  <a:srgbClr val="131A19"/>
+                </a:solidFill>
+                <a:latin typeface="맑은 고딕"/>
+              </a:rPr>
+              <a:t>label-free — 정답을 한 장도 쓰지 않고</a:t>
+            </a:r>
+          </a:p>
+        </p:txBody>
+      </p:sp>
+      <p:sp>
+        <p:nvSpPr>
+          <p:cNvPr id="4" name="TextBox 3"/>
+          <p:cNvSpPr txBox="1"/>
+          <p:nvPr/>
+        </p:nvSpPr>
+        <p:spPr>
+          <a:xfrm>
+            <a:off x="640080" y="1371600"/>
+            <a:ext cx="10972800" cy="365760"/>
+          </a:xfrm>
+          <a:prstGeom prst="rect">
+            <a:avLst/>
+          </a:prstGeom>
+          <a:noFill/>
+        </p:spPr>
+        <p:txBody>
+          <a:bodyPr wrap="square" anchor="t">
+            <a:spAutoFit/>
+          </a:bodyPr>
+          <a:lstStyle/>
+          <a:p>
+            <a:pPr algn="l">
+              <a:lnSpc>
+                <a:spcPct val="125000"/>
+              </a:lnSpc>
+            </a:pPr>
+            <a:r>
+              <a:rPr sz="1400" b="0">
+                <a:solidFill>
+                  <a:srgbClr val="66756F"/>
+                </a:solidFill>
+                <a:latin typeface="맑은 고딕"/>
+              </a:rPr>
+              <a:t>보너스 점수</a:t>
+            </a:r>
+          </a:p>
+        </p:txBody>
+      </p:sp>
+      <p:sp>
+        <p:nvSpPr>
+          <p:cNvPr id="5" name="Rectangle 4"/>
+          <p:cNvSpPr/>
+          <p:nvPr/>
+        </p:nvSpPr>
+        <p:spPr>
+          <a:xfrm>
+            <a:off x="640080" y="1874520"/>
+            <a:ext cx="10908792" cy="15240"/>
+          </a:xfrm>
+          <a:prstGeom prst="rect">
+            <a:avLst/>
+          </a:prstGeom>
+          <a:solidFill>
+            <a:srgbClr val="DCE3E0"/>
+          </a:solidFill>
+          <a:ln>
+            <a:noFill/>
+          </a:ln>
+          <a:effectLst/>
+        </p:spPr>
+        <p:style>
+          <a:lnRef idx="1">
+            <a:schemeClr val="accent1"/>
+          </a:lnRef>
+          <a:fillRef idx="3">
+            <a:schemeClr val="accent1"/>
+          </a:fillRef>
+          <a:effectRef idx="2">
+            <a:schemeClr val="accent1"/>
+          </a:effectRef>
+          <a:fontRef idx="minor">
+            <a:schemeClr val="lt1"/>
+          </a:fontRef>
+        </p:style>
+        <p:txBody>
+          <a:bodyPr rtlCol="0" anchor="ctr"/>
+          <a:lstStyle/>
+          <a:p>
+            <a:pPr algn="ctr"/>
+          </a:p>
+        </p:txBody>
+      </p:sp>
+      <p:sp>
+        <p:nvSpPr>
+          <p:cNvPr id="6" name="Rounded Rectangle 5"/>
+          <p:cNvSpPr/>
+          <p:nvPr/>
+        </p:nvSpPr>
+        <p:spPr>
+          <a:xfrm>
+            <a:off x="685800" y="2011680"/>
+            <a:ext cx="1828800" cy="1463040"/>
+          </a:xfrm>
+          <a:prstGeom prst="roundRect">
+            <a:avLst>
+              <a:gd name="adj" fmla="val 4000"/>
+            </a:avLst>
+          </a:prstGeom>
+          <a:solidFill>
+            <a:srgbClr val="DCEDE8"/>
+          </a:solidFill>
+          <a:ln w="9525">
+            <a:solidFill>
+              <a:srgbClr val="0B6E5E"/>
+            </a:solidFill>
+          </a:ln>
+          <a:effectLst/>
+        </p:spPr>
+        <p:style>
+          <a:lnRef idx="1">
+            <a:schemeClr val="accent1"/>
+          </a:lnRef>
+          <a:fillRef idx="3">
+            <a:schemeClr val="accent1"/>
+          </a:fillRef>
+          <a:effectRef idx="2">
+            <a:schemeClr val="accent1"/>
+          </a:effectRef>
+          <a:fontRef idx="minor">
+            <a:schemeClr val="lt1"/>
+          </a:fontRef>
+        </p:style>
+        <p:txBody>
+          <a:bodyPr rtlCol="0" anchor="ctr"/>
+          <a:lstStyle/>
+          <a:p>
+            <a:pPr algn="ctr"/>
+          </a:p>
+        </p:txBody>
+      </p:sp>
+      <p:sp>
+        <p:nvSpPr>
+          <p:cNvPr id="7" name="TextBox 6"/>
+          <p:cNvSpPr txBox="1"/>
+          <p:nvPr/>
+        </p:nvSpPr>
+        <p:spPr>
+          <a:xfrm>
+            <a:off x="777240" y="2148840"/>
+            <a:ext cx="1645920" cy="365760"/>
+          </a:xfrm>
+          <a:prstGeom prst="rect">
+            <a:avLst/>
+          </a:prstGeom>
+          <a:noFill/>
+        </p:spPr>
+        <p:txBody>
+          <a:bodyPr wrap="square" anchor="t">
+            <a:spAutoFit/>
+          </a:bodyPr>
+          <a:lstStyle/>
+          <a:p>
+            <a:pPr algn="ctr">
+              <a:lnSpc>
+                <a:spcPct val="125000"/>
+              </a:lnSpc>
+            </a:pPr>
+            <a:r>
+              <a:rPr sz="1300" b="1">
+                <a:solidFill>
+                  <a:srgbClr val="131A19"/>
+                </a:solidFill>
+                <a:latin typeface="맑은 고딕"/>
+              </a:rPr>
+              <a:t>측정치 g</a:t>
+            </a:r>
+          </a:p>
+        </p:txBody>
+      </p:sp>
+      <p:sp>
+        <p:nvSpPr>
+          <p:cNvPr id="8" name="TextBox 7"/>
+          <p:cNvSpPr txBox="1"/>
+          <p:nvPr/>
+        </p:nvSpPr>
+        <p:spPr>
+          <a:xfrm>
+            <a:off x="777240" y="2560320"/>
+            <a:ext cx="1645920" cy="822960"/>
+          </a:xfrm>
+          <a:prstGeom prst="rect">
+            <a:avLst/>
+          </a:prstGeom>
+          <a:noFill/>
+        </p:spPr>
+        <p:txBody>
+          <a:bodyPr wrap="square" anchor="t">
+            <a:spAutoFit/>
+          </a:bodyPr>
+          <a:lstStyle/>
+          <a:p>
+            <a:pPr algn="ctr">
+              <a:lnSpc>
+                <a:spcPct val="125000"/>
+              </a:lnSpc>
+            </a:pPr>
+            <a:r>
+              <a:rPr sz="1000" b="0">
+                <a:solidFill>
+                  <a:srgbClr val="66756F"/>
+                </a:solidFill>
+                <a:latin typeface="Consolas"/>
+              </a:rPr>
+              <a:t>가진 것은 이것뿐</a:t>
+            </a:r>
+          </a:p>
+        </p:txBody>
+      </p:sp>
+      <p:sp>
+        <p:nvSpPr>
+          <p:cNvPr id="9" name="Rounded Rectangle 8"/>
+          <p:cNvSpPr/>
+          <p:nvPr/>
+        </p:nvSpPr>
+        <p:spPr>
+          <a:xfrm>
+            <a:off x="2743200" y="2011680"/>
+            <a:ext cx="1828800" cy="1463040"/>
+          </a:xfrm>
+          <a:prstGeom prst="roundRect">
+            <a:avLst>
+              <a:gd name="adj" fmla="val 4000"/>
+            </a:avLst>
+          </a:prstGeom>
+          <a:solidFill>
+            <a:srgbClr val="DCEDE8"/>
+          </a:solidFill>
+          <a:ln w="9525">
+            <a:solidFill>
+              <a:srgbClr val="0B6E5E"/>
+            </a:solidFill>
+          </a:ln>
+          <a:effectLst/>
+        </p:spPr>
+        <p:style>
+          <a:lnRef idx="1">
+            <a:schemeClr val="accent1"/>
+          </a:lnRef>
+          <a:fillRef idx="3">
+            <a:schemeClr val="accent1"/>
+          </a:fillRef>
+          <a:effectRef idx="2">
+            <a:schemeClr val="accent1"/>
+          </a:effectRef>
+          <a:fontRef idx="minor">
+            <a:schemeClr val="lt1"/>
+          </a:fontRef>
+        </p:style>
+        <p:txBody>
+          <a:bodyPr rtlCol="0" anchor="ctr"/>
+          <a:lstStyle/>
+          <a:p>
+            <a:pPr algn="ctr"/>
+          </a:p>
+        </p:txBody>
+      </p:sp>
+      <p:sp>
+        <p:nvSpPr>
+          <p:cNvPr id="10" name="TextBox 9"/>
+          <p:cNvSpPr txBox="1"/>
+          <p:nvPr/>
+        </p:nvSpPr>
+        <p:spPr>
+          <a:xfrm>
+            <a:off x="2834640" y="2148840"/>
+            <a:ext cx="1645920" cy="365760"/>
+          </a:xfrm>
+          <a:prstGeom prst="rect">
+            <a:avLst/>
+          </a:prstGeom>
+          <a:noFill/>
+        </p:spPr>
+        <p:txBody>
+          <a:bodyPr wrap="square" anchor="t">
+            <a:spAutoFit/>
+          </a:bodyPr>
+          <a:lstStyle/>
+          <a:p>
+            <a:pPr algn="ctr">
+              <a:lnSpc>
+                <a:spcPct val="125000"/>
+              </a:lnSpc>
+            </a:pPr>
+            <a:r>
+              <a:rPr sz="1300" b="1">
+                <a:solidFill>
+                  <a:srgbClr val="131A19"/>
+                </a:solidFill>
+                <a:latin typeface="맑은 고딕"/>
+              </a:rPr>
+              <a:t>σ 추정</a:t>
+            </a:r>
+          </a:p>
+        </p:txBody>
+      </p:sp>
+      <p:sp>
+        <p:nvSpPr>
+          <p:cNvPr id="11" name="TextBox 10"/>
+          <p:cNvSpPr txBox="1"/>
+          <p:nvPr/>
+        </p:nvSpPr>
+        <p:spPr>
+          <a:xfrm>
+            <a:off x="2834640" y="2560320"/>
+            <a:ext cx="1645920" cy="822960"/>
+          </a:xfrm>
+          <a:prstGeom prst="rect">
+            <a:avLst/>
+          </a:prstGeom>
+          <a:noFill/>
+        </p:spPr>
+        <p:txBody>
+          <a:bodyPr wrap="square" anchor="t">
+            <a:spAutoFit/>
+          </a:bodyPr>
+          <a:lstStyle/>
+          <a:p>
+            <a:pPr algn="ctr">
+              <a:lnSpc>
+                <a:spcPct val="125000"/>
+              </a:lnSpc>
+            </a:pPr>
+            <a:r>
+              <a:rPr sz="1000" b="0">
+                <a:solidFill>
+                  <a:srgbClr val="66756F"/>
+                </a:solidFill>
+                <a:latin typeface="Consolas"/>
+              </a:rPr>
+              <a:t>널 원뿔에서
+라벨 불필요</a:t>
+            </a:r>
+          </a:p>
+        </p:txBody>
+      </p:sp>
+      <p:sp>
+        <p:nvSpPr>
+          <p:cNvPr id="12" name="Rounded Rectangle 11"/>
+          <p:cNvSpPr/>
+          <p:nvPr/>
+        </p:nvSpPr>
+        <p:spPr>
+          <a:xfrm>
+            <a:off x="4800600" y="2011680"/>
+            <a:ext cx="1828800" cy="1463040"/>
+          </a:xfrm>
+          <a:prstGeom prst="roundRect">
+            <a:avLst>
+              <a:gd name="adj" fmla="val 4000"/>
+            </a:avLst>
+          </a:prstGeom>
+          <a:solidFill>
+            <a:srgbClr val="DCEDE8"/>
+          </a:solidFill>
+          <a:ln w="9525">
+            <a:solidFill>
+              <a:srgbClr val="0B6E5E"/>
+            </a:solidFill>
+          </a:ln>
+          <a:effectLst/>
+        </p:spPr>
+        <p:style>
+          <a:lnRef idx="1">
+            <a:schemeClr val="accent1"/>
+          </a:lnRef>
+          <a:fillRef idx="3">
+            <a:schemeClr val="accent1"/>
+          </a:fillRef>
+          <a:effectRef idx="2">
+            <a:schemeClr val="accent1"/>
+          </a:effectRef>
+          <a:fontRef idx="minor">
+            <a:schemeClr val="lt1"/>
+          </a:fontRef>
+        </p:style>
+        <p:txBody>
+          <a:bodyPr rtlCol="0" anchor="ctr"/>
+          <a:lstStyle/>
+          <a:p>
+            <a:pPr algn="ctr"/>
+          </a:p>
+        </p:txBody>
+      </p:sp>
+      <p:sp>
+        <p:nvSpPr>
+          <p:cNvPr id="13" name="TextBox 12"/>
+          <p:cNvSpPr txBox="1"/>
+          <p:nvPr/>
+        </p:nvSpPr>
+        <p:spPr>
+          <a:xfrm>
+            <a:off x="4892040" y="2148840"/>
+            <a:ext cx="1645920" cy="365760"/>
+          </a:xfrm>
+          <a:prstGeom prst="rect">
+            <a:avLst/>
+          </a:prstGeom>
+          <a:noFill/>
+        </p:spPr>
+        <p:txBody>
+          <a:bodyPr wrap="square" anchor="t">
+            <a:spAutoFit/>
+          </a:bodyPr>
+          <a:lstStyle/>
+          <a:p>
+            <a:pPr algn="ctr">
+              <a:lnSpc>
+                <a:spcPct val="125000"/>
+              </a:lnSpc>
+            </a:pPr>
+            <a:r>
+              <a:rPr sz="1300" b="1">
+                <a:solidFill>
+                  <a:srgbClr val="131A19"/>
+                </a:solidFill>
+                <a:latin typeface="맑은 고딕"/>
+              </a:rPr>
+              <a:t>N2V 디노이저</a:t>
+            </a:r>
+          </a:p>
+        </p:txBody>
+      </p:sp>
+      <p:sp>
+        <p:nvSpPr>
+          <p:cNvPr id="14" name="TextBox 13"/>
+          <p:cNvSpPr txBox="1"/>
+          <p:nvPr/>
+        </p:nvSpPr>
+        <p:spPr>
+          <a:xfrm>
+            <a:off x="4892040" y="2560320"/>
+            <a:ext cx="1645920" cy="822960"/>
+          </a:xfrm>
+          <a:prstGeom prst="rect">
+            <a:avLst/>
+          </a:prstGeom>
+          <a:noFill/>
+        </p:spPr>
+        <p:txBody>
+          <a:bodyPr wrap="square" anchor="t">
+            <a:spAutoFit/>
+          </a:bodyPr>
+          <a:lstStyle/>
+          <a:p>
+            <a:pPr algn="ctr">
+              <a:lnSpc>
+                <a:spcPct val="125000"/>
+              </a:lnSpc>
+            </a:pPr>
+            <a:r>
+              <a:rPr sz="1000" b="0">
+                <a:solidFill>
+                  <a:srgbClr val="66756F"/>
+                </a:solidFill>
+                <a:latin typeface="Consolas"/>
+              </a:rPr>
+              <a:t>1일차 blind-spot
+으로 학습
+정답 안 씀</a:t>
+            </a:r>
+          </a:p>
+        </p:txBody>
+      </p:sp>
+      <p:sp>
+        <p:nvSpPr>
+          <p:cNvPr id="15" name="Rounded Rectangle 14"/>
+          <p:cNvSpPr/>
+          <p:nvPr/>
+        </p:nvSpPr>
+        <p:spPr>
+          <a:xfrm>
+            <a:off x="6858000" y="2011680"/>
+            <a:ext cx="1828800" cy="1463040"/>
+          </a:xfrm>
+          <a:prstGeom prst="roundRect">
+            <a:avLst>
+              <a:gd name="adj" fmla="val 4000"/>
+            </a:avLst>
+          </a:prstGeom>
+          <a:solidFill>
+            <a:srgbClr val="DCEDE8"/>
+          </a:solidFill>
+          <a:ln w="9525">
+            <a:solidFill>
+              <a:srgbClr val="0B6E5E"/>
+            </a:solidFill>
+          </a:ln>
+          <a:effectLst/>
+        </p:spPr>
+        <p:style>
+          <a:lnRef idx="1">
+            <a:schemeClr val="accent1"/>
+          </a:lnRef>
+          <a:fillRef idx="3">
+            <a:schemeClr val="accent1"/>
+          </a:fillRef>
+          <a:effectRef idx="2">
+            <a:schemeClr val="accent1"/>
+          </a:effectRef>
+          <a:fontRef idx="minor">
+            <a:schemeClr val="lt1"/>
+          </a:fontRef>
+        </p:style>
+        <p:txBody>
+          <a:bodyPr rtlCol="0" anchor="ctr"/>
+          <a:lstStyle/>
+          <a:p>
+            <a:pPr algn="ctr"/>
+          </a:p>
+        </p:txBody>
+      </p:sp>
+      <p:sp>
+        <p:nvSpPr>
+          <p:cNvPr id="16" name="TextBox 15"/>
+          <p:cNvSpPr txBox="1"/>
+          <p:nvPr/>
+        </p:nvSpPr>
+        <p:spPr>
+          <a:xfrm>
+            <a:off x="6949440" y="2148840"/>
+            <a:ext cx="1645920" cy="365760"/>
+          </a:xfrm>
+          <a:prstGeom prst="rect">
+            <a:avLst/>
+          </a:prstGeom>
+          <a:noFill/>
+        </p:spPr>
+        <p:txBody>
+          <a:bodyPr wrap="square" anchor="t">
+            <a:spAutoFit/>
+          </a:bodyPr>
+          <a:lstStyle/>
+          <a:p>
+            <a:pPr algn="ctr">
+              <a:lnSpc>
+                <a:spcPct val="125000"/>
+              </a:lnSpc>
+            </a:pPr>
+            <a:r>
+              <a:rPr sz="1300" b="1">
+                <a:solidFill>
+                  <a:srgbClr val="131A19"/>
+                </a:solidFill>
+                <a:latin typeface="맑은 고딕"/>
+              </a:rPr>
+              <a:t>데이터 정합</a:t>
+            </a:r>
+          </a:p>
+        </p:txBody>
+      </p:sp>
+      <p:sp>
+        <p:nvSpPr>
+          <p:cNvPr id="17" name="TextBox 16"/>
+          <p:cNvSpPr txBox="1"/>
+          <p:nvPr/>
+        </p:nvSpPr>
+        <p:spPr>
+          <a:xfrm>
+            <a:off x="6949440" y="2560320"/>
+            <a:ext cx="1645920" cy="822960"/>
+          </a:xfrm>
+          <a:prstGeom prst="rect">
+            <a:avLst/>
+          </a:prstGeom>
+          <a:noFill/>
+        </p:spPr>
+        <p:txBody>
+          <a:bodyPr wrap="square" anchor="t">
+            <a:spAutoFit/>
+          </a:bodyPr>
+          <a:lstStyle/>
+          <a:p>
+            <a:pPr algn="ctr">
+              <a:lnSpc>
+                <a:spcPct val="125000"/>
+              </a:lnSpc>
+            </a:pPr>
+            <a:r>
+              <a:rPr sz="1000" b="0">
+                <a:solidFill>
+                  <a:srgbClr val="66756F"/>
+                </a:solidFill>
+                <a:latin typeface="Consolas"/>
+              </a:rPr>
+              <a:t>닫힌 해
+학습 없음</a:t>
+            </a:r>
+          </a:p>
+        </p:txBody>
+      </p:sp>
+      <p:sp>
+        <p:nvSpPr>
+          <p:cNvPr id="18" name="Rounded Rectangle 17"/>
+          <p:cNvSpPr/>
+          <p:nvPr/>
+        </p:nvSpPr>
+        <p:spPr>
+          <a:xfrm>
+            <a:off x="8915400" y="2011680"/>
+            <a:ext cx="1828800" cy="1463040"/>
+          </a:xfrm>
+          <a:prstGeom prst="roundRect">
+            <a:avLst>
+              <a:gd name="adj" fmla="val 4000"/>
+            </a:avLst>
+          </a:prstGeom>
+          <a:solidFill>
+            <a:srgbClr val="DCEDE8"/>
+          </a:solidFill>
+          <a:ln w="9525">
+            <a:solidFill>
+              <a:srgbClr val="0B6E5E"/>
+            </a:solidFill>
+          </a:ln>
+          <a:effectLst/>
+        </p:spPr>
+        <p:style>
+          <a:lnRef idx="1">
+            <a:schemeClr val="accent1"/>
+          </a:lnRef>
+          <a:fillRef idx="3">
+            <a:schemeClr val="accent1"/>
+          </a:fillRef>
+          <a:effectRef idx="2">
+            <a:schemeClr val="accent1"/>
+          </a:effectRef>
+          <a:fontRef idx="minor">
+            <a:schemeClr val="lt1"/>
+          </a:fontRef>
+        </p:style>
+        <p:txBody>
+          <a:bodyPr rtlCol="0" anchor="ctr"/>
+          <a:lstStyle/>
+          <a:p>
+            <a:pPr algn="ctr"/>
+          </a:p>
+        </p:txBody>
+      </p:sp>
+      <p:sp>
+        <p:nvSpPr>
+          <p:cNvPr id="19" name="TextBox 18"/>
+          <p:cNvSpPr txBox="1"/>
+          <p:nvPr/>
+        </p:nvSpPr>
+        <p:spPr>
+          <a:xfrm>
+            <a:off x="9006840" y="2148840"/>
+            <a:ext cx="1645920" cy="365760"/>
+          </a:xfrm>
+          <a:prstGeom prst="rect">
+            <a:avLst/>
+          </a:prstGeom>
+          <a:noFill/>
+        </p:spPr>
+        <p:txBody>
+          <a:bodyPr wrap="square" anchor="t">
+            <a:spAutoFit/>
+          </a:bodyPr>
+          <a:lstStyle/>
+          <a:p>
+            <a:pPr algn="ctr">
+              <a:lnSpc>
+                <a:spcPct val="125000"/>
+              </a:lnSpc>
+            </a:pPr>
+            <a:r>
+              <a:rPr sz="1300" b="1">
+                <a:solidFill>
+                  <a:srgbClr val="131A19"/>
+                </a:solidFill>
+                <a:latin typeface="맑은 고딕"/>
+              </a:rPr>
+              <a:t>복원</a:t>
+            </a:r>
+          </a:p>
+        </p:txBody>
+      </p:sp>
+      <p:sp>
+        <p:nvSpPr>
+          <p:cNvPr id="20" name="TextBox 19"/>
+          <p:cNvSpPr txBox="1"/>
+          <p:nvPr/>
+        </p:nvSpPr>
+        <p:spPr>
+          <a:xfrm>
+            <a:off x="9006840" y="2560320"/>
+            <a:ext cx="1645920" cy="822960"/>
+          </a:xfrm>
+          <a:prstGeom prst="rect">
+            <a:avLst/>
+          </a:prstGeom>
+          <a:noFill/>
+        </p:spPr>
+        <p:txBody>
+          <a:bodyPr wrap="square" anchor="t">
+            <a:spAutoFit/>
+          </a:bodyPr>
+          <a:lstStyle/>
+          <a:p>
+            <a:pPr algn="ctr">
+              <a:lnSpc>
+                <a:spcPct val="125000"/>
+              </a:lnSpc>
+            </a:pPr>
+            <a:r>
+              <a:rPr sz="1000" b="0">
+                <a:solidFill>
+                  <a:srgbClr val="66756F"/>
+                </a:solidFill>
+                <a:latin typeface="Consolas"/>
+              </a:rPr>
+              <a:t>19.94 dB</a:t>
+            </a:r>
+          </a:p>
+        </p:txBody>
+      </p:sp>
+      <p:graphicFrame>
+        <p:nvGraphicFramePr>
+          <p:cNvPr id="21" name="Table 20"/>
+          <p:cNvGraphicFramePr>
+            <a:graphicFrameLocks noGrp="1"/>
+          </p:cNvGraphicFramePr>
+          <p:nvPr/>
+        </p:nvGraphicFramePr>
+        <p:xfrm>
+          <a:off x="822960" y="3840480"/>
+          <a:ext cx="10515600" cy="1371600"/>
+        </p:xfrm>
+        <a:graphic>
+          <a:graphicData uri="http://schemas.openxmlformats.org/drawingml/2006/table">
+            <a:tbl>
+              <a:tblPr firstRow="1" bandRow="1">
+                <a:tableStyleId>{5C22544A-7EE6-4342-B048-85BDC9FD1C3A}</a:tableStyleId>
+              </a:tblPr>
+              <a:tblGrid>
+                <a:gridCol w="4572000"/>
+                <a:gridCol w="1828800"/>
+                <a:gridCol w="1645920"/>
+                <a:gridCol w="2468880"/>
+              </a:tblGrid>
+              <a:tr h="274320">
+                <a:tc>
+                  <a:txBody>
+                    <a:bodyPr/>
+                    <a:lstStyle/>
+                    <a:p>
+                      <a:pPr algn="l"/>
+                      <a:r>
+                        <a:rPr sz="1200" b="1">
+                          <a:solidFill>
+                            <a:srgbClr val="131A19"/>
+                          </a:solidFill>
+                          <a:latin typeface="맑은 고딕"/>
+                        </a:rPr>
+                        <a:t>경로</a:t>
+                      </a:r>
+                    </a:p>
+                  </a:txBody>
+                  <a:tcPr marL="82296" marR="82296" marT="27432" marB="27432" anchor="ctr">
+                    <a:solidFill>
+                      <a:srgbClr val="DCEDE8"/>
+                    </a:solidFill>
+                  </a:tcPr>
+                </a:tc>
+                <a:tc>
+                  <a:txBody>
+                    <a:bodyPr/>
+                    <a:lstStyle/>
+                    <a:p>
+                      <a:pPr algn="r"/>
+                      <a:r>
+                        <a:rPr sz="1200" b="1">
+                          <a:solidFill>
+                            <a:srgbClr val="131A19"/>
+                          </a:solidFill>
+                          <a:latin typeface="Consolas"/>
+                        </a:rPr>
+                        <a:t>정답 사용</a:t>
+                      </a:r>
+                    </a:p>
+                  </a:txBody>
+                  <a:tcPr marL="82296" marR="82296" marT="27432" marB="27432" anchor="ctr">
+                    <a:solidFill>
+                      <a:srgbClr val="DCEDE8"/>
+                    </a:solidFill>
+                  </a:tcPr>
+                </a:tc>
+                <a:tc>
+                  <a:txBody>
+                    <a:bodyPr/>
+                    <a:lstStyle/>
+                    <a:p>
+                      <a:pPr algn="r"/>
+                      <a:r>
+                        <a:rPr sz="1200" b="1">
+                          <a:solidFill>
+                            <a:srgbClr val="131A19"/>
+                          </a:solidFill>
+                          <a:latin typeface="Consolas"/>
+                        </a:rPr>
+                        <a:t>PSNR</a:t>
+                      </a:r>
+                    </a:p>
+                  </a:txBody>
+                  <a:tcPr marL="82296" marR="82296" marT="27432" marB="27432" anchor="ctr">
+                    <a:solidFill>
+                      <a:srgbClr val="DCEDE8"/>
+                    </a:solidFill>
+                  </a:tcPr>
+                </a:tc>
+                <a:tc>
+                  <a:txBody>
+                    <a:bodyPr/>
+                    <a:lstStyle/>
+                    <a:p>
+                      <a:pPr algn="r"/>
+                      <a:r>
+                        <a:rPr sz="1200" b="1">
+                          <a:solidFill>
+                            <a:srgbClr val="131A19"/>
+                          </a:solidFill>
+                          <a:latin typeface="Consolas"/>
+                        </a:rPr>
+                        <a:t>분류</a:t>
+                      </a:r>
+                    </a:p>
+                  </a:txBody>
+                  <a:tcPr marL="82296" marR="82296" marT="27432" marB="27432" anchor="ctr">
+                    <a:solidFill>
+                      <a:srgbClr val="DCEDE8"/>
+                    </a:solidFill>
+                  </a:tcPr>
+                </a:tc>
+              </a:tr>
+              <a:tr h="274320">
+                <a:tc>
+                  <a:txBody>
+                    <a:bodyPr/>
+                    <a:lstStyle/>
+                    <a:p>
+                      <a:pPr algn="l"/>
+                      <a:r>
+                        <a:rPr sz="1200" b="1">
+                          <a:solidFill>
+                            <a:srgbClr val="131A19"/>
+                          </a:solidFill>
+                          <a:latin typeface="맑은 고딕"/>
+                        </a:rPr>
+                        <a:t>1일차 label-free (N2V) → Wiener</a:t>
+                      </a:r>
+                    </a:p>
+                  </a:txBody>
+                  <a:tcPr marL="82296" marR="82296" marT="27432" marB="27432" anchor="ctr">
+                    <a:solidFill>
+                      <a:srgbClr val="ECF5F2"/>
+                    </a:solidFill>
+                  </a:tcPr>
+                </a:tc>
+                <a:tc>
+                  <a:txBody>
+                    <a:bodyPr/>
+                    <a:lstStyle/>
+                    <a:p>
+                      <a:pPr algn="r"/>
+                      <a:r>
+                        <a:rPr sz="1200" b="1">
+                          <a:solidFill>
+                            <a:srgbClr val="131A19"/>
+                          </a:solidFill>
+                          <a:latin typeface="Consolas"/>
+                        </a:rPr>
+                        <a:t>없음</a:t>
+                      </a:r>
+                    </a:p>
+                  </a:txBody>
+                  <a:tcPr marL="82296" marR="82296" marT="27432" marB="27432" anchor="ctr">
+                    <a:solidFill>
+                      <a:srgbClr val="ECF5F2"/>
+                    </a:solidFill>
+                  </a:tcPr>
+                </a:tc>
+                <a:tc>
+                  <a:txBody>
+                    <a:bodyPr/>
+                    <a:lstStyle/>
+                    <a:p>
+                      <a:pPr algn="r"/>
+                      <a:r>
+                        <a:rPr sz="1200" b="1">
+                          <a:solidFill>
+                            <a:srgbClr val="131A19"/>
+                          </a:solidFill>
+                          <a:latin typeface="Consolas"/>
+                        </a:rPr>
+                        <a:t>18.87</a:t>
+                      </a:r>
+                    </a:p>
+                  </a:txBody>
+                  <a:tcPr marL="82296" marR="82296" marT="27432" marB="27432" anchor="ctr">
+                    <a:solidFill>
+                      <a:srgbClr val="ECF5F2"/>
+                    </a:solidFill>
+                  </a:tcPr>
+                </a:tc>
+                <a:tc>
+                  <a:txBody>
+                    <a:bodyPr/>
+                    <a:lstStyle/>
+                    <a:p>
+                      <a:pPr algn="r"/>
+                      <a:r>
+                        <a:rPr sz="1200" b="1">
+                          <a:solidFill>
+                            <a:srgbClr val="131A19"/>
+                          </a:solidFill>
+                          <a:latin typeface="Consolas"/>
+                        </a:rPr>
+                        <a:t>Self-supervised</a:t>
+                      </a:r>
+                    </a:p>
+                  </a:txBody>
+                  <a:tcPr marL="82296" marR="82296" marT="27432" marB="27432" anchor="ctr">
+                    <a:solidFill>
+                      <a:srgbClr val="ECF5F2"/>
+                    </a:solidFill>
+                  </a:tcPr>
+                </a:tc>
+              </a:tr>
+              <a:tr h="274320">
+                <a:tc>
+                  <a:txBody>
+                    <a:bodyPr/>
+                    <a:lstStyle/>
+                    <a:p>
+                      <a:pPr algn="l"/>
+                      <a:r>
+                        <a:rPr sz="1200" b="0">
+                          <a:solidFill>
+                            <a:srgbClr val="3C4947"/>
+                          </a:solidFill>
+                          <a:latin typeface="맑은 고딕"/>
+                        </a:rPr>
+                        <a:t>plug-and-play · label-free</a:t>
+                      </a:r>
+                    </a:p>
+                  </a:txBody>
+                  <a:tcPr marL="82296" marR="82296" marT="27432" marB="27432" anchor="ctr">
+                    <a:solidFill>
+                      <a:srgbClr val="FFFFFF"/>
+                    </a:solidFill>
+                  </a:tcPr>
+                </a:tc>
+                <a:tc>
+                  <a:txBody>
+                    <a:bodyPr/>
+                    <a:lstStyle/>
+                    <a:p>
+                      <a:pPr algn="r"/>
+                      <a:r>
+                        <a:rPr sz="1200" b="0">
+                          <a:solidFill>
+                            <a:srgbClr val="3C4947"/>
+                          </a:solidFill>
+                          <a:latin typeface="Consolas"/>
+                        </a:rPr>
+                        <a:t>없음</a:t>
+                      </a:r>
+                    </a:p>
+                  </a:txBody>
+                  <a:tcPr marL="82296" marR="82296" marT="27432" marB="27432" anchor="ctr">
+                    <a:solidFill>
+                      <a:srgbClr val="FFFFFF"/>
+                    </a:solidFill>
+                  </a:tcPr>
+                </a:tc>
+                <a:tc>
+                  <a:txBody>
+                    <a:bodyPr/>
+                    <a:lstStyle/>
+                    <a:p>
+                      <a:pPr algn="r"/>
+                      <a:r>
+                        <a:rPr sz="1200" b="0">
+                          <a:solidFill>
+                            <a:srgbClr val="3C4947"/>
+                          </a:solidFill>
+                          <a:latin typeface="Consolas"/>
+                        </a:rPr>
+                        <a:t>17.99</a:t>
+                      </a:r>
+                    </a:p>
+                  </a:txBody>
+                  <a:tcPr marL="82296" marR="82296" marT="27432" marB="27432" anchor="ctr">
+                    <a:solidFill>
+                      <a:srgbClr val="FFFFFF"/>
+                    </a:solidFill>
+                  </a:tcPr>
+                </a:tc>
+                <a:tc>
+                  <a:txBody>
+                    <a:bodyPr/>
+                    <a:lstStyle/>
+                    <a:p>
+                      <a:pPr algn="r"/>
+                      <a:r>
+                        <a:rPr sz="1200" b="0">
+                          <a:solidFill>
+                            <a:srgbClr val="3C4947"/>
+                          </a:solidFill>
+                          <a:latin typeface="Consolas"/>
+                        </a:rPr>
+                        <a:t>Self-supervised</a:t>
+                      </a:r>
+                    </a:p>
+                  </a:txBody>
+                  <a:tcPr marL="82296" marR="82296" marT="27432" marB="27432" anchor="ctr">
+                    <a:solidFill>
+                      <a:srgbClr val="FFFFFF"/>
+                    </a:solidFill>
+                  </a:tcPr>
+                </a:tc>
+              </a:tr>
+              <a:tr h="274320">
+                <a:tc>
+                  <a:txBody>
+                    <a:bodyPr/>
+                    <a:lstStyle/>
+                    <a:p>
+                      <a:pPr algn="l"/>
+                      <a:r>
+                        <a:rPr sz="1200" b="0">
+                          <a:solidFill>
+                            <a:srgbClr val="3C4947"/>
+                          </a:solidFill>
+                          <a:latin typeface="맑은 고딕"/>
+                        </a:rPr>
+                        <a:t>1일차 supervised → Wiener</a:t>
+                      </a:r>
+                    </a:p>
+                  </a:txBody>
+                  <a:tcPr marL="82296" marR="82296" marT="27432" marB="27432" anchor="ctr">
+                    <a:solidFill>
+                      <a:srgbClr val="FFFFFF"/>
+                    </a:solidFill>
+                  </a:tcPr>
+                </a:tc>
+                <a:tc>
+                  <a:txBody>
+                    <a:bodyPr/>
+                    <a:lstStyle/>
+                    <a:p>
+                      <a:pPr algn="r"/>
+                      <a:r>
+                        <a:rPr sz="1200" b="0">
+                          <a:solidFill>
+                            <a:srgbClr val="3C4947"/>
+                          </a:solidFill>
+                          <a:latin typeface="Consolas"/>
+                        </a:rPr>
+                        <a:t>1일차만</a:t>
+                      </a:r>
+                    </a:p>
+                  </a:txBody>
+                  <a:tcPr marL="82296" marR="82296" marT="27432" marB="27432" anchor="ctr">
+                    <a:solidFill>
+                      <a:srgbClr val="FFFFFF"/>
+                    </a:solidFill>
+                  </a:tcPr>
+                </a:tc>
+                <a:tc>
+                  <a:txBody>
+                    <a:bodyPr/>
+                    <a:lstStyle/>
+                    <a:p>
+                      <a:pPr algn="r"/>
+                      <a:r>
+                        <a:rPr sz="1200" b="0">
+                          <a:solidFill>
+                            <a:srgbClr val="3C4947"/>
+                          </a:solidFill>
+                          <a:latin typeface="Consolas"/>
+                        </a:rPr>
+                        <a:t>21.06</a:t>
+                      </a:r>
+                    </a:p>
+                  </a:txBody>
+                  <a:tcPr marL="82296" marR="82296" marT="27432" marB="27432" anchor="ctr">
+                    <a:solidFill>
+                      <a:srgbClr val="FFFFFF"/>
+                    </a:solidFill>
+                  </a:tcPr>
+                </a:tc>
+                <a:tc>
+                  <a:txBody>
+                    <a:bodyPr/>
+                    <a:lstStyle/>
+                    <a:p>
+                      <a:pPr algn="r"/>
+                      <a:r>
+                        <a:rPr sz="1200" b="0">
+                          <a:solidFill>
+                            <a:srgbClr val="3C4947"/>
+                          </a:solidFill>
+                          <a:latin typeface="Consolas"/>
+                        </a:rPr>
+                        <a:t>Supervised</a:t>
+                      </a:r>
+                    </a:p>
+                  </a:txBody>
+                  <a:tcPr marL="82296" marR="82296" marT="27432" marB="27432" anchor="ctr">
+                    <a:solidFill>
+                      <a:srgbClr val="FFFFFF"/>
+                    </a:solidFill>
+                  </a:tcPr>
+                </a:tc>
+              </a:tr>
+              <a:tr h="274320">
+                <a:tc>
+                  <a:txBody>
+                    <a:bodyPr/>
+                    <a:lstStyle/>
+                    <a:p>
+                      <a:pPr algn="l"/>
+                      <a:r>
+                        <a:rPr sz="1200" b="0">
+                          <a:solidFill>
+                            <a:srgbClr val="3C4947"/>
+                          </a:solidFill>
+                          <a:latin typeface="맑은 고딕"/>
+                        </a:rPr>
+                        <a:t>최종 모델</a:t>
+                      </a:r>
+                    </a:p>
+                  </a:txBody>
+                  <a:tcPr marL="82296" marR="82296" marT="27432" marB="27432" anchor="ctr">
+                    <a:solidFill>
+                      <a:srgbClr val="FFFFFF"/>
+                    </a:solidFill>
+                  </a:tcPr>
+                </a:tc>
+                <a:tc>
+                  <a:txBody>
+                    <a:bodyPr/>
+                    <a:lstStyle/>
+                    <a:p>
+                      <a:pPr algn="r"/>
+                      <a:r>
+                        <a:rPr sz="1200" b="0">
+                          <a:solidFill>
+                            <a:srgbClr val="3C4947"/>
+                          </a:solidFill>
+                          <a:latin typeface="Consolas"/>
+                        </a:rPr>
+                        <a:t>3일차 학습</a:t>
+                      </a:r>
+                    </a:p>
+                  </a:txBody>
+                  <a:tcPr marL="82296" marR="82296" marT="27432" marB="27432" anchor="ctr">
+                    <a:solidFill>
+                      <a:srgbClr val="FFFFFF"/>
+                    </a:solidFill>
+                  </a:tcPr>
+                </a:tc>
+                <a:tc>
+                  <a:txBody>
+                    <a:bodyPr/>
+                    <a:lstStyle/>
+                    <a:p>
+                      <a:pPr algn="r"/>
+                      <a:r>
+                        <a:rPr sz="1200" b="0">
+                          <a:solidFill>
+                            <a:srgbClr val="3C4947"/>
+                          </a:solidFill>
+                          <a:latin typeface="Consolas"/>
+                        </a:rPr>
+                        <a:t>29.25</a:t>
+                      </a:r>
+                    </a:p>
+                  </a:txBody>
+                  <a:tcPr marL="82296" marR="82296" marT="27432" marB="27432" anchor="ctr">
+                    <a:solidFill>
+                      <a:srgbClr val="FFFFFF"/>
+                    </a:solidFill>
+                  </a:tcPr>
+                </a:tc>
+                <a:tc>
+                  <a:txBody>
+                    <a:bodyPr/>
+                    <a:lstStyle/>
+                    <a:p>
+                      <a:pPr algn="r"/>
+                      <a:r>
+                        <a:rPr sz="1200" b="0">
+                          <a:solidFill>
+                            <a:srgbClr val="3C4947"/>
+                          </a:solidFill>
+                          <a:latin typeface="Consolas"/>
+                        </a:rPr>
+                        <a:t>Supervised</a:t>
+                      </a:r>
+                    </a:p>
+                  </a:txBody>
+                  <a:tcPr marL="82296" marR="82296" marT="27432" marB="27432" anchor="ctr">
+                    <a:solidFill>
+                      <a:srgbClr val="FFFFFF"/>
+                    </a:solidFill>
+                  </a:tcPr>
+                </a:tc>
+              </a:tr>
+            </a:tbl>
+          </a:graphicData>
+        </a:graphic>
+      </p:graphicFrame>
+      <p:sp>
+        <p:nvSpPr>
+          <p:cNvPr id="22" name="TextBox 21"/>
+          <p:cNvSpPr txBox="1"/>
+          <p:nvPr/>
+        </p:nvSpPr>
+        <p:spPr>
+          <a:xfrm>
+            <a:off x="640080" y="6355080"/>
+            <a:ext cx="10972800" cy="274320"/>
+          </a:xfrm>
+          <a:prstGeom prst="rect">
+            <a:avLst/>
+          </a:prstGeom>
+          <a:noFill/>
+        </p:spPr>
+        <p:txBody>
+          <a:bodyPr wrap="square" anchor="t">
+            <a:spAutoFit/>
+          </a:bodyPr>
+          <a:lstStyle/>
+          <a:p>
+            <a:pPr algn="l">
+              <a:lnSpc>
+                <a:spcPct val="125000"/>
+              </a:lnSpc>
+            </a:pPr>
+            <a:r>
+              <a:rPr sz="1000" b="0">
+                <a:solidFill>
+                  <a:srgbClr val="66756F"/>
+                </a:solidFill>
+                <a:latin typeface="Consolas"/>
+              </a:rPr>
+              <a:t>label-free 경로는 3일차 정답을 한 장도 쓰지 않는다 — σ 추정도 측정치만 본다</a:t>
+            </a:r>
+          </a:p>
+        </p:txBody>
+      </p:sp>
+    </p:spTree>
+  </p:cSld>
+  <p:clrMapOvr>
+    <a:masterClrMapping/>
+  </p:clrMapOvr>
+</p:sld>
+</file>
+
+<file path=ppt/slides/slide14.xml><?xml version="1.0" encoding="utf-8"?>
+<p:sld xmlns:a="http://schemas.openxmlformats.org/drawingml/2006/main" xmlns:p="http://schemas.openxmlformats.org/presentationml/2006/main" xmlns:r="http://schemas.openxmlformats.org/officeDocument/2006/relationships">
+  <p:cSld>
+    <p:bg>
+      <p:bgPr>
+        <a:solidFill>
+          <a:srgbClr val="FFFFFF"/>
+        </a:solidFill>
+        <a:effectLst/>
+      </p:bgPr>
+    </p:bg>
+    <p:spTree>
+      <p:nvGrpSpPr>
+        <p:cNvPr id="1" name=""/>
+        <p:cNvGrpSpPr/>
+        <p:nvPr/>
+      </p:nvGrpSpPr>
+      <p:grpSpPr/>
+      <p:sp>
+        <p:nvSpPr>
+          <p:cNvPr id="2" name="TextBox 1"/>
+          <p:cNvSpPr txBox="1"/>
+          <p:nvPr/>
+        </p:nvSpPr>
+        <p:spPr>
+          <a:xfrm>
+            <a:off x="640080" y="420624"/>
+            <a:ext cx="10972800" cy="274320"/>
+          </a:xfrm>
+          <a:prstGeom prst="rect">
+            <a:avLst/>
+          </a:prstGeom>
+          <a:noFill/>
+        </p:spPr>
+        <p:txBody>
+          <a:bodyPr wrap="square" anchor="t">
+            <a:spAutoFit/>
+          </a:bodyPr>
+          <a:lstStyle/>
+          <a:p>
+            <a:pPr algn="l">
+              <a:lnSpc>
+                <a:spcPct val="125000"/>
+              </a:lnSpc>
+            </a:pPr>
+            <a:r>
+              <a:rPr sz="1100" b="1">
+                <a:solidFill>
+                  <a:srgbClr val="0B6E5E"/>
+                </a:solidFill>
+                <a:latin typeface="Consolas"/>
+              </a:rPr>
+              <a:t>전체</a:t>
+            </a:r>
+          </a:p>
+        </p:txBody>
+      </p:sp>
+      <p:sp>
+        <p:nvSpPr>
+          <p:cNvPr id="3" name="TextBox 2"/>
+          <p:cNvSpPr txBox="1"/>
+          <p:nvPr/>
+        </p:nvSpPr>
+        <p:spPr>
+          <a:xfrm>
+            <a:off x="640080" y="713232"/>
+            <a:ext cx="10972800" cy="548640"/>
+          </a:xfrm>
+          <a:prstGeom prst="rect">
+            <a:avLst/>
+          </a:prstGeom>
+          <a:noFill/>
+        </p:spPr>
+        <p:txBody>
+          <a:bodyPr wrap="square" anchor="t">
+            <a:spAutoFit/>
+          </a:bodyPr>
+          <a:lstStyle/>
+          <a:p>
+            <a:pPr algn="l">
+              <a:lnSpc>
+                <a:spcPct val="125000"/>
+              </a:lnSpc>
+            </a:pPr>
+            <a:r>
+              <a:rPr sz="3000" b="1">
+                <a:solidFill>
+                  <a:srgbClr val="131A19"/>
+                </a:solidFill>
+                <a:latin typeface="맑은 고딕"/>
+              </a:rPr>
+              <a:t>시도별 결과와 개선점</a:t>
+            </a:r>
+          </a:p>
+        </p:txBody>
+      </p:sp>
+      <p:sp>
+        <p:nvSpPr>
+          <p:cNvPr id="4" name="TextBox 3"/>
+          <p:cNvSpPr txBox="1"/>
+          <p:nvPr/>
+        </p:nvSpPr>
+        <p:spPr>
+          <a:xfrm>
+            <a:off x="640080" y="1371600"/>
+            <a:ext cx="10972800" cy="365760"/>
+          </a:xfrm>
+          <a:prstGeom prst="rect">
+            <a:avLst/>
+          </a:prstGeom>
+          <a:noFill/>
+        </p:spPr>
+        <p:txBody>
+          <a:bodyPr wrap="square" anchor="t">
+            <a:spAutoFit/>
+          </a:bodyPr>
+          <a:lstStyle/>
+          <a:p>
+            <a:pPr algn="l">
+              <a:lnSpc>
+                <a:spcPct val="125000"/>
+              </a:lnSpc>
+            </a:pPr>
+            <a:r>
+              <a:rPr sz="1400" b="0">
+                <a:solidFill>
+                  <a:srgbClr val="66756F"/>
+                </a:solidFill>
+                <a:latin typeface="맑은 고딕"/>
+              </a:rPr>
+              <a:t>한 페이지 요약</a:t>
+            </a:r>
+          </a:p>
+        </p:txBody>
+      </p:sp>
+      <p:sp>
+        <p:nvSpPr>
+          <p:cNvPr id="5" name="Rectangle 4"/>
+          <p:cNvSpPr/>
+          <p:nvPr/>
+        </p:nvSpPr>
+        <p:spPr>
+          <a:xfrm>
+            <a:off x="640080" y="1874520"/>
+            <a:ext cx="10908792" cy="15240"/>
+          </a:xfrm>
+          <a:prstGeom prst="rect">
+            <a:avLst/>
+          </a:prstGeom>
+          <a:solidFill>
+            <a:srgbClr val="DCE3E0"/>
+          </a:solidFill>
+          <a:ln>
+            <a:noFill/>
+          </a:ln>
+          <a:effectLst/>
+        </p:spPr>
+        <p:style>
+          <a:lnRef idx="1">
+            <a:schemeClr val="accent1"/>
+          </a:lnRef>
+          <a:fillRef idx="3">
+            <a:schemeClr val="accent1"/>
+          </a:fillRef>
+          <a:effectRef idx="2">
+            <a:schemeClr val="accent1"/>
+          </a:effectRef>
+          <a:fontRef idx="minor">
+            <a:schemeClr val="lt1"/>
+          </a:fontRef>
+        </p:style>
+        <p:txBody>
+          <a:bodyPr rtlCol="0" anchor="ctr"/>
+          <a:lstStyle/>
+          <a:p>
+            <a:pPr algn="ctr"/>
+          </a:p>
+        </p:txBody>
+      </p:sp>
+      <p:graphicFrame>
+        <p:nvGraphicFramePr>
+          <p:cNvPr id="6" name="Table 5"/>
+          <p:cNvGraphicFramePr>
+            <a:graphicFrameLocks noGrp="1"/>
+          </p:cNvGraphicFramePr>
+          <p:nvPr/>
+        </p:nvGraphicFramePr>
+        <p:xfrm>
+          <a:off x="548640" y="1554480"/>
+          <a:ext cx="11064240" cy="3840480"/>
+        </p:xfrm>
+        <a:graphic>
+          <a:graphicData uri="http://schemas.openxmlformats.org/drawingml/2006/table">
+            <a:tbl>
+              <a:tblPr firstRow="1" bandRow="1">
+                <a:tableStyleId>{5C22544A-7EE6-4342-B048-85BDC9FD1C3A}</a:tableStyleId>
+              </a:tblPr>
+              <a:tblGrid>
+                <a:gridCol w="3291840"/>
+                <a:gridCol w="1371600"/>
+                <a:gridCol w="6400800"/>
+              </a:tblGrid>
+              <a:tr h="274320">
+                <a:tc>
+                  <a:txBody>
+                    <a:bodyPr/>
+                    <a:lstStyle/>
+                    <a:p>
+                      <a:pPr algn="l"/>
+                      <a:r>
+                        <a:rPr sz="1100" b="1">
+                          <a:solidFill>
+                            <a:srgbClr val="131A19"/>
+                          </a:solidFill>
+                          <a:latin typeface="맑은 고딕"/>
+                        </a:rPr>
+                        <a:t>시도</a:t>
+                      </a:r>
+                    </a:p>
+                  </a:txBody>
+                  <a:tcPr marL="82296" marR="82296" marT="27432" marB="27432" anchor="ctr">
+                    <a:solidFill>
+                      <a:srgbClr val="DCEDE8"/>
+                    </a:solidFill>
+                  </a:tcPr>
+                </a:tc>
+                <a:tc>
+                  <a:txBody>
+                    <a:bodyPr/>
+                    <a:lstStyle/>
+                    <a:p>
+                      <a:pPr algn="r"/>
+                      <a:r>
+                        <a:rPr sz="1100" b="1">
+                          <a:solidFill>
+                            <a:srgbClr val="131A19"/>
+                          </a:solidFill>
+                          <a:latin typeface="Consolas"/>
+                        </a:rPr>
+                        <a:t>결과</a:t>
+                      </a:r>
+                    </a:p>
+                  </a:txBody>
+                  <a:tcPr marL="82296" marR="82296" marT="27432" marB="27432" anchor="ctr">
+                    <a:solidFill>
+                      <a:srgbClr val="DCEDE8"/>
+                    </a:solidFill>
+                  </a:tcPr>
+                </a:tc>
+                <a:tc>
+                  <a:txBody>
+                    <a:bodyPr/>
+                    <a:lstStyle/>
+                    <a:p>
+                      <a:pPr algn="r"/>
+                      <a:r>
+                        <a:rPr sz="1100" b="1">
+                          <a:solidFill>
+                            <a:srgbClr val="131A19"/>
+                          </a:solidFill>
+                          <a:latin typeface="Consolas"/>
+                        </a:rPr>
+                        <a:t>왜 그랬나 / 무엇을 배웠나</a:t>
+                      </a:r>
+                    </a:p>
+                  </a:txBody>
+                  <a:tcPr marL="82296" marR="82296" marT="27432" marB="27432" anchor="ctr">
+                    <a:solidFill>
+                      <a:srgbClr val="DCEDE8"/>
+                    </a:solidFill>
+                  </a:tcPr>
+                </a:tc>
+              </a:tr>
+              <a:tr h="274320">
+                <a:tc>
+                  <a:txBody>
+                    <a:bodyPr/>
+                    <a:lstStyle/>
+                    <a:p>
+                      <a:pPr algn="l"/>
+                      <a:r>
+                        <a:rPr sz="1100" b="0">
+                          <a:solidFill>
+                            <a:srgbClr val="3C4947"/>
+                          </a:solidFill>
+                          <a:latin typeface="맑은 고딕"/>
+                        </a:rPr>
+                        <a:t>2일차 답(K→0)을 그대로</a:t>
+                      </a:r>
+                    </a:p>
+                  </a:txBody>
+                  <a:tcPr marL="82296" marR="82296" marT="27432" marB="27432" anchor="ctr">
+                    <a:solidFill>
+                      <a:srgbClr val="FFFFFF"/>
+                    </a:solidFill>
+                  </a:tcPr>
+                </a:tc>
+                <a:tc>
+                  <a:txBody>
+                    <a:bodyPr/>
+                    <a:lstStyle/>
+                    <a:p>
+                      <a:pPr algn="r"/>
+                      <a:r>
+                        <a:rPr sz="1100" b="0">
+                          <a:solidFill>
+                            <a:srgbClr val="3C4947"/>
+                          </a:solidFill>
+                          <a:latin typeface="Consolas"/>
+                        </a:rPr>
+                        <a:t>−24 dB</a:t>
+                      </a:r>
+                    </a:p>
+                  </a:txBody>
+                  <a:tcPr marL="82296" marR="82296" marT="27432" marB="27432" anchor="ctr">
+                    <a:solidFill>
+                      <a:srgbClr val="FFFFFF"/>
+                    </a:solidFill>
+                  </a:tcPr>
+                </a:tc>
+                <a:tc>
+                  <a:txBody>
+                    <a:bodyPr/>
+                    <a:lstStyle/>
+                    <a:p>
+                      <a:pPr algn="r"/>
+                      <a:r>
+                        <a:rPr sz="1100" b="0">
+                          <a:solidFill>
+                            <a:srgbClr val="3C4947"/>
+                          </a:solidFill>
+                          <a:latin typeface="Consolas"/>
+                        </a:rPr>
+                        <a:t>노이즈를 +51.5 dB 증폭. n=0 이라 통했던 답이다</a:t>
+                      </a:r>
+                    </a:p>
+                  </a:txBody>
+                  <a:tcPr marL="82296" marR="82296" marT="27432" marB="27432" anchor="ctr">
+                    <a:solidFill>
+                      <a:srgbClr val="FFFFFF"/>
+                    </a:solidFill>
+                  </a:tcPr>
+                </a:tc>
+              </a:tr>
+              <a:tr h="274320">
+                <a:tc>
+                  <a:txBody>
+                    <a:bodyPr/>
+                    <a:lstStyle/>
+                    <a:p>
+                      <a:pPr algn="l"/>
+                      <a:r>
+                        <a:rPr sz="1100" b="0">
+                          <a:solidFill>
+                            <a:srgbClr val="3C4947"/>
+                          </a:solidFill>
+                          <a:latin typeface="맑은 고딕"/>
+                        </a:rPr>
+                        <a:t>Wiener 단독 (K 는 val 에서)</a:t>
+                      </a:r>
+                    </a:p>
+                  </a:txBody>
+                  <a:tcPr marL="82296" marR="82296" marT="27432" marB="27432" anchor="ctr">
+                    <a:solidFill>
+                      <a:srgbClr val="FFFFFF"/>
+                    </a:solidFill>
+                  </a:tcPr>
+                </a:tc>
+                <a:tc>
+                  <a:txBody>
+                    <a:bodyPr/>
+                    <a:lstStyle/>
+                    <a:p>
+                      <a:pPr algn="r"/>
+                      <a:r>
+                        <a:rPr sz="1100" b="0">
+                          <a:solidFill>
+                            <a:srgbClr val="3C4947"/>
+                          </a:solidFill>
+                          <a:latin typeface="Consolas"/>
+                        </a:rPr>
+                        <a:t>13.79</a:t>
+                      </a:r>
+                    </a:p>
+                  </a:txBody>
+                  <a:tcPr marL="82296" marR="82296" marT="27432" marB="27432" anchor="ctr">
+                    <a:solidFill>
+                      <a:srgbClr val="FFFFFF"/>
+                    </a:solidFill>
+                  </a:tcPr>
+                </a:tc>
+                <a:tc>
+                  <a:txBody>
+                    <a:bodyPr/>
+                    <a:lstStyle/>
+                    <a:p>
+                      <a:pPr algn="r"/>
+                      <a:r>
+                        <a:rPr sz="1100" b="0">
+                          <a:solidFill>
+                            <a:srgbClr val="3C4947"/>
+                          </a:solidFill>
+                          <a:latin typeface="Consolas"/>
+                        </a:rPr>
+                        <a:t>선형 역산의 한계. 정보를 버려야 노이즈가 잡힌다</a:t>
+                      </a:r>
+                    </a:p>
+                  </a:txBody>
+                  <a:tcPr marL="82296" marR="82296" marT="27432" marB="27432" anchor="ctr">
+                    <a:solidFill>
+                      <a:srgbClr val="FFFFFF"/>
+                    </a:solidFill>
+                  </a:tcPr>
+                </a:tc>
+              </a:tr>
+              <a:tr h="274320">
+                <a:tc>
+                  <a:txBody>
+                    <a:bodyPr/>
+                    <a:lstStyle/>
+                    <a:p>
+                      <a:pPr algn="l"/>
+                      <a:r>
+                        <a:rPr sz="1100" b="0">
+                          <a:solidFill>
+                            <a:srgbClr val="3C4947"/>
+                          </a:solidFill>
+                          <a:latin typeface="맑은 고딕"/>
+                        </a:rPr>
+                        <a:t>DC-Net (2일차 최고 구조)</a:t>
+                      </a:r>
+                    </a:p>
+                  </a:txBody>
+                  <a:tcPr marL="82296" marR="82296" marT="27432" marB="27432" anchor="ctr">
+                    <a:solidFill>
+                      <a:srgbClr val="FFFFFF"/>
+                    </a:solidFill>
+                  </a:tcPr>
+                </a:tc>
+                <a:tc>
+                  <a:txBody>
+                    <a:bodyPr/>
+                    <a:lstStyle/>
+                    <a:p>
+                      <a:pPr algn="r"/>
+                      <a:r>
+                        <a:rPr sz="1100" b="0">
+                          <a:solidFill>
+                            <a:srgbClr val="3C4947"/>
+                          </a:solidFill>
+                          <a:latin typeface="Consolas"/>
+                        </a:rPr>
+                        <a:t>14.80</a:t>
+                      </a:r>
+                    </a:p>
+                  </a:txBody>
+                  <a:tcPr marL="82296" marR="82296" marT="27432" marB="27432" anchor="ctr">
+                    <a:solidFill>
+                      <a:srgbClr val="FFFFFF"/>
+                    </a:solidFill>
+                  </a:tcPr>
+                </a:tc>
+                <a:tc>
+                  <a:txBody>
+                    <a:bodyPr/>
+                    <a:lstStyle/>
+                    <a:p>
+                      <a:pPr algn="r"/>
+                      <a:r>
+                        <a:rPr sz="1100" b="0">
+                          <a:solidFill>
+                            <a:srgbClr val="3C4947"/>
+                          </a:solidFill>
+                          <a:latin typeface="Consolas"/>
+                        </a:rPr>
+                        <a:t>hard DC 가 G/D=F+N/D 를 못박는다. 좋은 τ 가 없다</a:t>
+                      </a:r>
+                    </a:p>
+                  </a:txBody>
+                  <a:tcPr marL="82296" marR="82296" marT="27432" marB="27432" anchor="ctr">
+                    <a:solidFill>
+                      <a:srgbClr val="FFFFFF"/>
+                    </a:solidFill>
+                  </a:tcPr>
+                </a:tc>
+              </a:tr>
+              <a:tr h="274320">
+                <a:tc>
+                  <a:txBody>
+                    <a:bodyPr/>
+                    <a:lstStyle/>
+                    <a:p>
+                      <a:pPr algn="l"/>
+                      <a:r>
+                        <a:rPr sz="1100" b="0">
+                          <a:solidFill>
+                            <a:srgbClr val="3C4947"/>
+                          </a:solidFill>
+                          <a:latin typeface="맑은 고딕"/>
+                        </a:rPr>
+                        <a:t>Wiener → 디노이저</a:t>
+                      </a:r>
+                    </a:p>
+                  </a:txBody>
+                  <a:tcPr marL="82296" marR="82296" marT="27432" marB="27432" anchor="ctr">
+                    <a:solidFill>
+                      <a:srgbClr val="FFFFFF"/>
+                    </a:solidFill>
+                  </a:tcPr>
+                </a:tc>
+                <a:tc>
+                  <a:txBody>
+                    <a:bodyPr/>
+                    <a:lstStyle/>
+                    <a:p>
+                      <a:pPr algn="r"/>
+                      <a:r>
+                        <a:rPr sz="1100" b="0">
+                          <a:solidFill>
+                            <a:srgbClr val="3C4947"/>
+                          </a:solidFill>
+                          <a:latin typeface="Consolas"/>
+                        </a:rPr>
+                        <a:t>16.88</a:t>
+                      </a:r>
+                    </a:p>
+                  </a:txBody>
+                  <a:tcPr marL="82296" marR="82296" marT="27432" marB="27432" anchor="ctr">
+                    <a:solidFill>
+                      <a:srgbClr val="FFFFFF"/>
+                    </a:solidFill>
+                  </a:tcPr>
+                </a:tc>
+                <a:tc>
+                  <a:txBody>
+                    <a:bodyPr/>
+                    <a:lstStyle/>
+                    <a:p>
+                      <a:pPr algn="r"/>
+                      <a:r>
+                        <a:rPr sz="1100" b="0">
+                          <a:solidFill>
+                            <a:srgbClr val="3C4947"/>
+                          </a:solidFill>
+                          <a:latin typeface="Consolas"/>
+                        </a:rPr>
+                        <a:t>순서가 반대. 역산이 노이즈를 유색으로 만든다</a:t>
+                      </a:r>
+                    </a:p>
+                  </a:txBody>
+                  <a:tcPr marL="82296" marR="82296" marT="27432" marB="27432" anchor="ctr">
+                    <a:solidFill>
+                      <a:srgbClr val="FFFFFF"/>
+                    </a:solidFill>
+                  </a:tcPr>
+                </a:tc>
+              </a:tr>
+              <a:tr h="274320">
+                <a:tc>
+                  <a:txBody>
+                    <a:bodyPr/>
+                    <a:lstStyle/>
+                    <a:p>
+                      <a:pPr algn="l"/>
+                      <a:r>
+                        <a:rPr sz="1100" b="0">
+                          <a:solidFill>
+                            <a:srgbClr val="3C4947"/>
+                          </a:solidFill>
+                          <a:latin typeface="맑은 고딕"/>
+                        </a:rPr>
+                        <a:t>median → Wiener</a:t>
+                      </a:r>
+                    </a:p>
+                  </a:txBody>
+                  <a:tcPr marL="82296" marR="82296" marT="27432" marB="27432" anchor="ctr">
+                    <a:solidFill>
+                      <a:srgbClr val="FFFFFF"/>
+                    </a:solidFill>
+                  </a:tcPr>
+                </a:tc>
+                <a:tc>
+                  <a:txBody>
+                    <a:bodyPr/>
+                    <a:lstStyle/>
+                    <a:p>
+                      <a:pPr algn="r"/>
+                      <a:r>
+                        <a:rPr sz="1100" b="0">
+                          <a:solidFill>
+                            <a:srgbClr val="3C4947"/>
+                          </a:solidFill>
+                          <a:latin typeface="Consolas"/>
+                        </a:rPr>
+                        <a:t>19.20</a:t>
+                      </a:r>
+                    </a:p>
+                  </a:txBody>
+                  <a:tcPr marL="82296" marR="82296" marT="27432" marB="27432" anchor="ctr">
+                    <a:solidFill>
+                      <a:srgbClr val="FFFFFF"/>
+                    </a:solidFill>
+                  </a:tcPr>
+                </a:tc>
+                <a:tc>
+                  <a:txBody>
+                    <a:bodyPr/>
+                    <a:lstStyle/>
+                    <a:p>
+                      <a:pPr algn="r"/>
+                      <a:r>
+                        <a:rPr sz="1100" b="0">
+                          <a:solidFill>
+                            <a:srgbClr val="3C4947"/>
+                          </a:solidFill>
+                          <a:latin typeface="Consolas"/>
+                        </a:rPr>
+                        <a:t>s&amp;p 에서만 딥러닝을 이긴다 (23.23)</a:t>
+                      </a:r>
+                    </a:p>
+                  </a:txBody>
+                  <a:tcPr marL="82296" marR="82296" marT="27432" marB="27432" anchor="ctr">
+                    <a:solidFill>
+                      <a:srgbClr val="FFFFFF"/>
+                    </a:solidFill>
+                  </a:tcPr>
+                </a:tc>
+              </a:tr>
+              <a:tr h="274320">
+                <a:tc>
+                  <a:txBody>
+                    <a:bodyPr/>
+                    <a:lstStyle/>
+                    <a:p>
+                      <a:pPr algn="l"/>
+                      <a:r>
+                        <a:rPr sz="1100" b="0">
+                          <a:solidFill>
+                            <a:srgbClr val="3C4947"/>
+                          </a:solidFill>
+                          <a:latin typeface="맑은 고딕"/>
+                        </a:rPr>
+                        <a:t>1일차 디노이저 → Wiener</a:t>
+                      </a:r>
+                    </a:p>
+                  </a:txBody>
+                  <a:tcPr marL="82296" marR="82296" marT="27432" marB="27432" anchor="ctr">
+                    <a:solidFill>
+                      <a:srgbClr val="FFFFFF"/>
+                    </a:solidFill>
+                  </a:tcPr>
+                </a:tc>
+                <a:tc>
+                  <a:txBody>
+                    <a:bodyPr/>
+                    <a:lstStyle/>
+                    <a:p>
+                      <a:pPr algn="r"/>
+                      <a:r>
+                        <a:rPr sz="1100" b="0">
+                          <a:solidFill>
+                            <a:srgbClr val="3C4947"/>
+                          </a:solidFill>
+                          <a:latin typeface="Consolas"/>
+                        </a:rPr>
+                        <a:t>21.06</a:t>
+                      </a:r>
+                    </a:p>
+                  </a:txBody>
+                  <a:tcPr marL="82296" marR="82296" marT="27432" marB="27432" anchor="ctr">
+                    <a:solidFill>
+                      <a:srgbClr val="FFFFFF"/>
+                    </a:solidFill>
+                  </a:tcPr>
+                </a:tc>
+                <a:tc>
+                  <a:txBody>
+                    <a:bodyPr/>
+                    <a:lstStyle/>
+                    <a:p>
+                      <a:pPr algn="r"/>
+                      <a:r>
+                        <a:rPr sz="1100" b="0">
+                          <a:solidFill>
+                            <a:srgbClr val="3C4947"/>
+                          </a:solidFill>
+                          <a:latin typeface="Consolas"/>
+                        </a:rPr>
+                        <a:t>오라클 선형(19.80)을 넘었다. 비선형이 필요하다는 증거</a:t>
+                      </a:r>
+                    </a:p>
+                  </a:txBody>
+                  <a:tcPr marL="82296" marR="82296" marT="27432" marB="27432" anchor="ctr">
+                    <a:solidFill>
+                      <a:srgbClr val="FFFFFF"/>
+                    </a:solidFill>
+                  </a:tcPr>
+                </a:tc>
+              </a:tr>
+              <a:tr h="274320">
+                <a:tc>
+                  <a:txBody>
+                    <a:bodyPr/>
+                    <a:lstStyle/>
+                    <a:p>
+                      <a:pPr algn="l"/>
+                      <a:r>
+                        <a:rPr sz="1100" b="0">
+                          <a:solidFill>
+                            <a:srgbClr val="3C4947"/>
+                          </a:solidFill>
+                          <a:latin typeface="맑은 고딕"/>
+                        </a:rPr>
+                        <a:t>전개형 (unet f32, blind)</a:t>
+                      </a:r>
+                    </a:p>
+                  </a:txBody>
+                  <a:tcPr marL="82296" marR="82296" marT="27432" marB="27432" anchor="ctr">
+                    <a:solidFill>
+                      <a:srgbClr val="FFFFFF"/>
+                    </a:solidFill>
+                  </a:tcPr>
+                </a:tc>
+                <a:tc>
+                  <a:txBody>
+                    <a:bodyPr/>
+                    <a:lstStyle/>
+                    <a:p>
+                      <a:pPr algn="r"/>
+                      <a:r>
+                        <a:rPr sz="1100" b="0">
+                          <a:solidFill>
+                            <a:srgbClr val="3C4947"/>
+                          </a:solidFill>
+                          <a:latin typeface="Consolas"/>
+                        </a:rPr>
+                        <a:t>25.91</a:t>
+                      </a:r>
+                    </a:p>
+                  </a:txBody>
+                  <a:tcPr marL="82296" marR="82296" marT="27432" marB="27432" anchor="ctr">
+                    <a:solidFill>
+                      <a:srgbClr val="FFFFFF"/>
+                    </a:solidFill>
+                  </a:tcPr>
+                </a:tc>
+                <a:tc>
+                  <a:txBody>
+                    <a:bodyPr/>
+                    <a:lstStyle/>
+                    <a:p>
+                      <a:pPr algn="r"/>
+                      <a:r>
+                        <a:rPr sz="1100" b="0">
+                          <a:solidFill>
+                            <a:srgbClr val="3C4947"/>
+                          </a:solidFill>
+                          <a:latin typeface="Consolas"/>
+                        </a:rPr>
+                        <a:t>ep37 정체. 용량과 조건화가 병목이지 학습량이 아니다</a:t>
+                      </a:r>
+                    </a:p>
+                  </a:txBody>
+                  <a:tcPr marL="82296" marR="82296" marT="27432" marB="27432" anchor="ctr">
+                    <a:solidFill>
+                      <a:srgbClr val="FFFFFF"/>
+                    </a:solidFill>
+                  </a:tcPr>
+                </a:tc>
+              </a:tr>
+              <a:tr h="274320">
+                <a:tc>
+                  <a:txBody>
+                    <a:bodyPr/>
+                    <a:lstStyle/>
+                    <a:p>
+                      <a:pPr algn="l"/>
+                      <a:r>
+                        <a:rPr sz="1100" b="0">
+                          <a:solidFill>
+                            <a:srgbClr val="3C4947"/>
+                          </a:solidFill>
+                          <a:latin typeface="맑은 고딕"/>
+                        </a:rPr>
+                        <a:t>End2End U-Net f64</a:t>
+                      </a:r>
+                    </a:p>
+                  </a:txBody>
+                  <a:tcPr marL="82296" marR="82296" marT="27432" marB="27432" anchor="ctr">
+                    <a:solidFill>
+                      <a:srgbClr val="FFFFFF"/>
+                    </a:solidFill>
+                  </a:tcPr>
+                </a:tc>
+                <a:tc>
+                  <a:txBody>
+                    <a:bodyPr/>
+                    <a:lstStyle/>
+                    <a:p>
+                      <a:pPr algn="r"/>
+                      <a:r>
+                        <a:rPr sz="1100" b="0">
+                          <a:solidFill>
+                            <a:srgbClr val="3C4947"/>
+                          </a:solidFill>
+                          <a:latin typeface="Consolas"/>
+                        </a:rPr>
+                        <a:t>25.99</a:t>
+                      </a:r>
+                    </a:p>
+                  </a:txBody>
+                  <a:tcPr marL="82296" marR="82296" marT="27432" marB="27432" anchor="ctr">
+                    <a:solidFill>
+                      <a:srgbClr val="FFFFFF"/>
+                    </a:solidFill>
+                  </a:tcPr>
+                </a:tc>
+                <a:tc>
+                  <a:txBody>
+                    <a:bodyPr/>
+                    <a:lstStyle/>
+                    <a:p>
+                      <a:pPr algn="r"/>
+                      <a:r>
+                        <a:rPr sz="1100" b="0">
+                          <a:solidFill>
+                            <a:srgbClr val="3C4947"/>
+                          </a:solidFill>
+                          <a:latin typeface="Consolas"/>
+                        </a:rPr>
+                        <a:t>전개형과 비슷 — 물리 구조만으로는 이득이 없었다</a:t>
+                      </a:r>
+                    </a:p>
+                  </a:txBody>
+                  <a:tcPr marL="82296" marR="82296" marT="27432" marB="27432" anchor="ctr">
+                    <a:solidFill>
+                      <a:srgbClr val="FFFFFF"/>
+                    </a:solidFill>
+                  </a:tcPr>
+                </a:tc>
+              </a:tr>
+              <a:tr h="274320">
+                <a:tc>
+                  <a:txBody>
+                    <a:bodyPr/>
+                    <a:lstStyle/>
+                    <a:p>
+                      <a:pPr algn="l"/>
+                      <a:r>
+                        <a:rPr sz="1100" b="0">
+                          <a:solidFill>
+                            <a:srgbClr val="3C4947"/>
+                          </a:solidFill>
+                          <a:latin typeface="맑은 고딕"/>
+                        </a:rPr>
+                        <a:t>2단 분해 (측정치 영역 → 역필터)</a:t>
+                      </a:r>
+                    </a:p>
+                  </a:txBody>
+                  <a:tcPr marL="82296" marR="82296" marT="27432" marB="27432" anchor="ctr">
+                    <a:solidFill>
+                      <a:srgbClr val="FFFFFF"/>
+                    </a:solidFill>
+                  </a:tcPr>
+                </a:tc>
+                <a:tc>
+                  <a:txBody>
+                    <a:bodyPr/>
+                    <a:lstStyle/>
+                    <a:p>
+                      <a:pPr algn="r"/>
+                      <a:r>
+                        <a:rPr sz="1100" b="0">
+                          <a:solidFill>
+                            <a:srgbClr val="3C4947"/>
+                          </a:solidFill>
+                          <a:latin typeface="Consolas"/>
+                        </a:rPr>
+                        <a:t>15.6</a:t>
+                      </a:r>
+                    </a:p>
+                  </a:txBody>
+                  <a:tcPr marL="82296" marR="82296" marT="27432" marB="27432" anchor="ctr">
+                    <a:solidFill>
+                      <a:srgbClr val="FFFFFF"/>
+                    </a:solidFill>
+                  </a:tcPr>
+                </a:tc>
+                <a:tc>
+                  <a:txBody>
+                    <a:bodyPr/>
+                    <a:lstStyle/>
+                    <a:p>
+                      <a:pPr algn="r"/>
+                      <a:r>
+                        <a:rPr sz="1100" b="0">
+                          <a:solidFill>
+                            <a:srgbClr val="3C4947"/>
+                          </a:solidFill>
+                          <a:latin typeface="Consolas"/>
+                        </a:rPr>
+                        <a:t>실패. 역필터가 오차를 1/D 로 증폭해 40 dB 디노이징을 요구한다</a:t>
+                      </a:r>
+                    </a:p>
+                  </a:txBody>
+                  <a:tcPr marL="82296" marR="82296" marT="27432" marB="27432" anchor="ctr">
+                    <a:solidFill>
+                      <a:srgbClr val="FFFFFF"/>
+                    </a:solidFill>
+                  </a:tcPr>
+                </a:tc>
+              </a:tr>
+              <a:tr h="274320">
+                <a:tc>
+                  <a:txBody>
+                    <a:bodyPr/>
+                    <a:lstStyle/>
+                    <a:p>
+                      <a:pPr algn="l"/>
+                      <a:r>
+                        <a:rPr sz="1100" b="0">
+                          <a:solidFill>
+                            <a:srgbClr val="3C4947"/>
+                          </a:solidFill>
+                          <a:latin typeface="맑은 고딕"/>
+                        </a:rPr>
+                        <a:t>SSIM 을 처음부터 손실에</a:t>
+                      </a:r>
+                    </a:p>
+                  </a:txBody>
+                  <a:tcPr marL="82296" marR="82296" marT="27432" marB="27432" anchor="ctr">
+                    <a:solidFill>
+                      <a:srgbClr val="FFFFFF"/>
+                    </a:solidFill>
+                  </a:tcPr>
+                </a:tc>
+                <a:tc>
+                  <a:txBody>
+                    <a:bodyPr/>
+                    <a:lstStyle/>
+                    <a:p>
+                      <a:pPr algn="r"/>
+                      <a:r>
+                        <a:rPr sz="1100" b="0">
+                          <a:solidFill>
+                            <a:srgbClr val="3C4947"/>
+                          </a:solidFill>
+                          <a:latin typeface="Consolas"/>
+                        </a:rPr>
+                        <a:t>17.5</a:t>
+                      </a:r>
+                    </a:p>
+                  </a:txBody>
+                  <a:tcPr marL="82296" marR="82296" marT="27432" marB="27432" anchor="ctr">
+                    <a:solidFill>
+                      <a:srgbClr val="FFFFFF"/>
+                    </a:solidFill>
+                  </a:tcPr>
+                </a:tc>
+                <a:tc>
+                  <a:txBody>
+                    <a:bodyPr/>
+                    <a:lstStyle/>
+                    <a:p>
+                      <a:pPr algn="r"/>
+                      <a:r>
+                        <a:rPr sz="1100" b="0">
+                          <a:solidFill>
+                            <a:srgbClr val="3C4947"/>
+                          </a:solidFill>
+                          <a:latin typeface="Consolas"/>
+                        </a:rPr>
+                        <a:t>실패. 덜 학습된 모델을 '맞든 아니든 대비를 키우는' 쪽으로 민다</a:t>
+                      </a:r>
+                    </a:p>
+                  </a:txBody>
+                  <a:tcPr marL="82296" marR="82296" marT="27432" marB="27432" anchor="ctr">
+                    <a:solidFill>
+                      <a:srgbClr val="FFFFFF"/>
+                    </a:solidFill>
+                  </a:tcPr>
+                </a:tc>
+              </a:tr>
+              <a:tr h="274320">
+                <a:tc>
+                  <a:txBody>
+                    <a:bodyPr/>
+                    <a:lstStyle/>
+                    <a:p>
+                      <a:pPr algn="l"/>
+                      <a:r>
+                        <a:rPr sz="1100" b="0">
+                          <a:solidFill>
+                            <a:srgbClr val="3C4947"/>
+                          </a:solidFill>
+                          <a:latin typeface="맑은 고딕"/>
+                        </a:rPr>
+                        <a:t>언샤프 후처리로 SSIM 보정</a:t>
+                      </a:r>
+                    </a:p>
+                  </a:txBody>
+                  <a:tcPr marL="82296" marR="82296" marT="27432" marB="27432" anchor="ctr">
+                    <a:solidFill>
+                      <a:srgbClr val="FFFFFF"/>
+                    </a:solidFill>
+                  </a:tcPr>
+                </a:tc>
+                <a:tc>
+                  <a:txBody>
+                    <a:bodyPr/>
+                    <a:lstStyle/>
+                    <a:p>
+                      <a:pPr algn="r"/>
+                      <a:r>
+                        <a:rPr sz="1100" b="0">
+                          <a:solidFill>
+                            <a:srgbClr val="3C4947"/>
+                          </a:solidFill>
+                          <a:latin typeface="Consolas"/>
+                        </a:rPr>
+                        <a:t>—</a:t>
+                      </a:r>
+                    </a:p>
+                  </a:txBody>
+                  <a:tcPr marL="82296" marR="82296" marT="27432" marB="27432" anchor="ctr">
+                    <a:solidFill>
+                      <a:srgbClr val="FFFFFF"/>
+                    </a:solidFill>
+                  </a:tcPr>
+                </a:tc>
+                <a:tc>
+                  <a:txBody>
+                    <a:bodyPr/>
+                    <a:lstStyle/>
+                    <a:p>
+                      <a:pPr algn="r"/>
+                      <a:r>
+                        <a:rPr sz="1100" b="0">
+                          <a:solidFill>
+                            <a:srgbClr val="3C4947"/>
+                          </a:solidFill>
+                          <a:latin typeface="Consolas"/>
+                        </a:rPr>
+                        <a:t>실패. 잔차까지 키워 σx 만 커진다. 잃은 대비는 사후에 못 만든다</a:t>
+                      </a:r>
+                    </a:p>
+                  </a:txBody>
+                  <a:tcPr marL="82296" marR="82296" marT="27432" marB="27432" anchor="ctr">
+                    <a:solidFill>
+                      <a:srgbClr val="FFFFFF"/>
+                    </a:solidFill>
+                  </a:tcPr>
+                </a:tc>
+              </a:tr>
+              <a:tr h="274320">
+                <a:tc>
+                  <a:txBody>
+                    <a:bodyPr/>
+                    <a:lstStyle/>
+                    <a:p>
+                      <a:pPr algn="l"/>
+                      <a:r>
+                        <a:rPr sz="1100" b="0">
+                          <a:solidFill>
+                            <a:srgbClr val="3C4947"/>
+                          </a:solidFill>
+                          <a:latin typeface="맑은 고딕"/>
+                        </a:rPr>
+                        <a:t>end-to-end DRUNet</a:t>
+                      </a:r>
+                    </a:p>
+                  </a:txBody>
+                  <a:tcPr marL="82296" marR="82296" marT="27432" marB="27432" anchor="ctr">
+                    <a:solidFill>
+                      <a:srgbClr val="FFFFFF"/>
+                    </a:solidFill>
+                  </a:tcPr>
+                </a:tc>
+                <a:tc>
+                  <a:txBody>
+                    <a:bodyPr/>
+                    <a:lstStyle/>
+                    <a:p>
+                      <a:pPr algn="r"/>
+                      <a:r>
+                        <a:rPr sz="1100" b="0">
+                          <a:solidFill>
+                            <a:srgbClr val="3C4947"/>
+                          </a:solidFill>
+                          <a:latin typeface="Consolas"/>
+                        </a:rPr>
+                        <a:t>24.6</a:t>
+                      </a:r>
+                    </a:p>
+                  </a:txBody>
+                  <a:tcPr marL="82296" marR="82296" marT="27432" marB="27432" anchor="ctr">
+                    <a:solidFill>
+                      <a:srgbClr val="FFFFFF"/>
+                    </a:solidFill>
+                  </a:tcPr>
+                </a:tc>
+                <a:tc>
+                  <a:txBody>
+                    <a:bodyPr/>
+                    <a:lstStyle/>
+                    <a:p>
+                      <a:pPr algn="r"/>
+                      <a:r>
+                        <a:rPr sz="1100" b="0">
+                          <a:solidFill>
+                            <a:srgbClr val="3C4947"/>
+                          </a:solidFill>
+                          <a:latin typeface="Consolas"/>
+                        </a:rPr>
+                        <a:t>전개형보다 3.8 dB 아래. 물리 구조가 실제로 이득이다</a:t>
+                      </a:r>
+                    </a:p>
+                  </a:txBody>
+                  <a:tcPr marL="82296" marR="82296" marT="27432" marB="27432" anchor="ctr">
+                    <a:solidFill>
+                      <a:srgbClr val="FFFFFF"/>
+                    </a:solidFill>
+                  </a:tcPr>
+                </a:tc>
+              </a:tr>
+              <a:tr h="274320">
+                <a:tc>
+                  <a:txBody>
+                    <a:bodyPr/>
+                    <a:lstStyle/>
+                    <a:p>
+                      <a:pPr algn="l"/>
+                      <a:r>
+                        <a:rPr sz="1100" b="1">
+                          <a:solidFill>
+                            <a:srgbClr val="131A19"/>
+                          </a:solidFill>
+                          <a:latin typeface="맑은 고딕"/>
+                        </a:rPr>
+                        <a:t>전개형 + DRUNet + σ 조건화</a:t>
+                      </a:r>
+                    </a:p>
+                  </a:txBody>
+                  <a:tcPr marL="82296" marR="82296" marT="27432" marB="27432" anchor="ctr">
+                    <a:solidFill>
+                      <a:srgbClr val="ECF5F2"/>
+                    </a:solidFill>
+                  </a:tcPr>
+                </a:tc>
+                <a:tc>
+                  <a:txBody>
+                    <a:bodyPr/>
+                    <a:lstStyle/>
+                    <a:p>
+                      <a:pPr algn="r"/>
+                      <a:r>
+                        <a:rPr sz="1100" b="1">
+                          <a:solidFill>
+                            <a:srgbClr val="131A19"/>
+                          </a:solidFill>
+                          <a:latin typeface="Consolas"/>
+                        </a:rPr>
+                        <a:t>29.25</a:t>
+                      </a:r>
+                    </a:p>
+                  </a:txBody>
+                  <a:tcPr marL="82296" marR="82296" marT="27432" marB="27432" anchor="ctr">
+                    <a:solidFill>
+                      <a:srgbClr val="ECF5F2"/>
+                    </a:solidFill>
+                  </a:tcPr>
+                </a:tc>
+                <a:tc>
+                  <a:txBody>
+                    <a:bodyPr/>
+                    <a:lstStyle/>
+                    <a:p>
+                      <a:pPr algn="r"/>
+                      <a:r>
+                        <a:rPr sz="1100" b="1">
+                          <a:solidFill>
+                            <a:srgbClr val="131A19"/>
+                          </a:solidFill>
+                          <a:latin typeface="Consolas"/>
+                        </a:rPr>
+                        <a:t>σ 200배 차이를 흡수. 두 기준 모두 통과 (test, 4× SE)</a:t>
+                      </a:r>
+                    </a:p>
+                  </a:txBody>
+                  <a:tcPr marL="82296" marR="82296" marT="27432" marB="27432" anchor="ctr">
+                    <a:solidFill>
+                      <a:srgbClr val="ECF5F2"/>
+                    </a:solidFill>
+                  </a:tcPr>
+                </a:tc>
+              </a:tr>
+            </a:tbl>
+          </a:graphicData>
+        </a:graphic>
+      </p:graphicFrame>
+      <p:sp>
+        <p:nvSpPr>
+          <p:cNvPr id="7" name="TextBox 6"/>
+          <p:cNvSpPr txBox="1"/>
+          <p:nvPr/>
+        </p:nvSpPr>
+        <p:spPr>
+          <a:xfrm>
+            <a:off x="640080" y="6355080"/>
+            <a:ext cx="10972800" cy="274320"/>
+          </a:xfrm>
+          <a:prstGeom prst="rect">
+            <a:avLst/>
+          </a:prstGeom>
+          <a:noFill/>
+        </p:spPr>
+        <p:txBody>
+          <a:bodyPr wrap="square" anchor="t">
+            <a:spAutoFit/>
+          </a:bodyPr>
+          <a:lstStyle/>
+          <a:p>
+            <a:pPr algn="l">
+              <a:lnSpc>
+                <a:spcPct val="125000"/>
+              </a:lnSpc>
+            </a:pPr>
+            <a:r>
+              <a:rPr sz="1000" b="0">
+                <a:solidFill>
+                  <a:srgbClr val="66756F"/>
+                </a:solidFill>
+                <a:latin typeface="Consolas"/>
+              </a:rPr>
+              <a:t>K·λ 는 전부 validation 에서 골랐다. test 는 채점에만 썼다</a:t>
+            </a:r>
+          </a:p>
+        </p:txBody>
+      </p:sp>
+    </p:spTree>
+  </p:cSld>
+  <p:clrMapOvr>
+    <a:masterClrMapping/>
+  </p:clrMapOvr>
+</p:sld>
+</file>
+
+<file path=ppt/slides/slide15.xml><?xml version="1.0" encoding="utf-8"?>
+<p:sld xmlns:a="http://schemas.openxmlformats.org/drawingml/2006/main" xmlns:p="http://schemas.openxmlformats.org/presentationml/2006/main" xmlns:r="http://schemas.openxmlformats.org/officeDocument/2006/relationships">
+  <p:cSld>
+    <p:bg>
+      <p:bgPr>
+        <a:solidFill>
+          <a:srgbClr val="FFFFFF"/>
+        </a:solidFill>
+        <a:effectLst/>
+      </p:bgPr>
+    </p:bg>
+    <p:spTree>
+      <p:nvGrpSpPr>
+        <p:cNvPr id="1" name=""/>
+        <p:cNvGrpSpPr/>
+        <p:nvPr/>
+      </p:nvGrpSpPr>
+      <p:grpSpPr/>
+      <p:sp>
+        <p:nvSpPr>
+          <p:cNvPr id="2" name="TextBox 1"/>
+          <p:cNvSpPr txBox="1"/>
+          <p:nvPr/>
+        </p:nvSpPr>
+        <p:spPr>
+          <a:xfrm>
+            <a:off x="640080" y="420624"/>
+            <a:ext cx="10972800" cy="274320"/>
+          </a:xfrm>
+          <a:prstGeom prst="rect">
+            <a:avLst/>
+          </a:prstGeom>
+          <a:noFill/>
+        </p:spPr>
+        <p:txBody>
+          <a:bodyPr wrap="square" anchor="t">
+            <a:spAutoFit/>
+          </a:bodyPr>
+          <a:lstStyle/>
+          <a:p>
+            <a:pPr algn="l">
+              <a:lnSpc>
+                <a:spcPct val="125000"/>
+              </a:lnSpc>
+            </a:pPr>
+            <a:r>
+              <a:rPr sz="1100" b="1">
+                <a:solidFill>
+                  <a:srgbClr val="0B6E5E"/>
+                </a:solidFill>
+                <a:latin typeface="Consolas"/>
+              </a:rPr>
               <a:t>검증 규칙</a:t>
             </a:r>
           </a:p>
@@ -9395,7 +11668,7 @@
                           </a:solidFill>
                           <a:latin typeface="Consolas"/>
                         </a:rPr>
-                        <a:t>27.50</a:t>
+                        <a:t>29.25</a:t>
                       </a:r>
                     </a:p>
                   </a:txBody>
@@ -10544,7 +12817,7 @@
                 </a:solidFill>
                 <a:latin typeface="Consolas"/>
               </a:rPr>
-              <a:t>27.50 dB</a:t>
+              <a:t>29.25 dB</a:t>
             </a:r>
           </a:p>
         </p:txBody>

--- a/실습5/실습5_day3_발표.pptx
+++ b/실습5/실습5_day3_발표.pptx
@@ -5,23 +5,23 @@
     <p:sldMasterId id="2147483648" r:id="rId1"/>
   </p:sldMasterIdLst>
   <p:sldIdLst>
-    <p:sldId id="256" r:id="rId7"/>
-    <p:sldId id="257" r:id="rId8"/>
-    <p:sldId id="258" r:id="rId9"/>
-    <p:sldId id="259" r:id="rId10"/>
-    <p:sldId id="260" r:id="rId11"/>
-    <p:sldId id="261" r:id="rId12"/>
-    <p:sldId id="262" r:id="rId13"/>
-    <p:sldId id="263" r:id="rId14"/>
-    <p:sldId id="264" r:id="rId15"/>
-    <p:sldId id="265" r:id="rId16"/>
-    <p:sldId id="266" r:id="rId17"/>
-    <p:sldId id="267" r:id="rId18"/>
-    <p:sldId id="268" r:id="rId19"/>
-    <p:sldId id="269" r:id="rId20"/>
-    <p:sldId id="270" r:id="rId21"/>
+    <p:sldId id="256" r:id="rId2"/>
+    <p:sldId id="257" r:id="rId3"/>
+    <p:sldId id="258" r:id="rId4"/>
+    <p:sldId id="259" r:id="rId5"/>
+    <p:sldId id="260" r:id="rId6"/>
+    <p:sldId id="261" r:id="rId7"/>
+    <p:sldId id="262" r:id="rId8"/>
+    <p:sldId id="263" r:id="rId9"/>
+    <p:sldId id="264" r:id="rId10"/>
+    <p:sldId id="265" r:id="rId11"/>
+    <p:sldId id="266" r:id="rId12"/>
+    <p:sldId id="267" r:id="rId13"/>
+    <p:sldId id="268" r:id="rId14"/>
+    <p:sldId id="269" r:id="rId15"/>
+    <p:sldId id="270" r:id="rId16"/>
   </p:sldIdLst>
-  <p:sldSz cx="12191695" cy="6858000" type="screen4x3"/>
+  <p:sldSz cx="12192000" cy="6858000"/>
   <p:notesSz cx="6858000" cy="9144000"/>
   <p:defaultTextStyle>
     <a:defPPr>
@@ -118,6 +118,22 @@
       </a:defRPr>
     </a:lvl9pPr>
   </p:defaultTextStyle>
+  <p:extLst>
+    <p:ext uri="{EFAFB233-063F-42B5-8137-9DF3F51BA10A}">
+      <p15:sldGuideLst xmlns:p15="http://schemas.microsoft.com/office/powerpoint/2012/main">
+        <p15:guide id="1" orient="horz" pos="2160">
+          <p15:clr>
+            <a:srgbClr val="A4A3A4"/>
+          </p15:clr>
+        </p15:guide>
+        <p15:guide id="2" pos="2880">
+          <p15:clr>
+            <a:srgbClr val="A4A3A4"/>
+          </p15:clr>
+        </p15:guide>
+      </p15:sldGuideLst>
+    </p:ext>
+  </p:extLst>
 </p:presentation>
 </file>
 
@@ -302,7 +318,7 @@
           <a:p>
             <a:fld id="{5BCAD085-E8A6-8845-BD4E-CB4CCA059FC4}" type="datetimeFigureOut">
               <a:rPr lang="en-US" smtClean="0"/>
-              <a:t>1/27/13</a:t>
+              <a:t>9/2/2026</a:t>
             </a:fld>
             <a:endParaRPr lang="en-US"/>
           </a:p>
@@ -472,7 +488,7 @@
           <a:p>
             <a:fld id="{5BCAD085-E8A6-8845-BD4E-CB4CCA059FC4}" type="datetimeFigureOut">
               <a:rPr lang="en-US" smtClean="0"/>
-              <a:t>1/27/13</a:t>
+              <a:t>9/2/2026</a:t>
             </a:fld>
             <a:endParaRPr lang="en-US"/>
           </a:p>
@@ -652,7 +668,7 @@
           <a:p>
             <a:fld id="{5BCAD085-E8A6-8845-BD4E-CB4CCA059FC4}" type="datetimeFigureOut">
               <a:rPr lang="en-US" smtClean="0"/>
-              <a:t>1/27/13</a:t>
+              <a:t>9/2/2026</a:t>
             </a:fld>
             <a:endParaRPr lang="en-US"/>
           </a:p>
@@ -822,7 +838,7 @@
           <a:p>
             <a:fld id="{5BCAD085-E8A6-8845-BD4E-CB4CCA059FC4}" type="datetimeFigureOut">
               <a:rPr lang="en-US" smtClean="0"/>
-              <a:t>1/27/13</a:t>
+              <a:t>9/2/2026</a:t>
             </a:fld>
             <a:endParaRPr lang="en-US"/>
           </a:p>
@@ -1068,7 +1084,7 @@
           <a:p>
             <a:fld id="{5BCAD085-E8A6-8845-BD4E-CB4CCA059FC4}" type="datetimeFigureOut">
               <a:rPr lang="en-US" smtClean="0"/>
-              <a:t>1/27/13</a:t>
+              <a:t>9/2/2026</a:t>
             </a:fld>
             <a:endParaRPr lang="en-US"/>
           </a:p>
@@ -1356,7 +1372,7 @@
           <a:p>
             <a:fld id="{5BCAD085-E8A6-8845-BD4E-CB4CCA059FC4}" type="datetimeFigureOut">
               <a:rPr lang="en-US" smtClean="0"/>
-              <a:t>1/27/13</a:t>
+              <a:t>9/2/2026</a:t>
             </a:fld>
             <a:endParaRPr lang="en-US"/>
           </a:p>
@@ -1778,7 +1794,7 @@
           <a:p>
             <a:fld id="{5BCAD085-E8A6-8845-BD4E-CB4CCA059FC4}" type="datetimeFigureOut">
               <a:rPr lang="en-US" smtClean="0"/>
-              <a:t>1/27/13</a:t>
+              <a:t>9/2/2026</a:t>
             </a:fld>
             <a:endParaRPr lang="en-US"/>
           </a:p>
@@ -1896,7 +1912,7 @@
           <a:p>
             <a:fld id="{5BCAD085-E8A6-8845-BD4E-CB4CCA059FC4}" type="datetimeFigureOut">
               <a:rPr lang="en-US" smtClean="0"/>
-              <a:t>1/27/13</a:t>
+              <a:t>9/2/2026</a:t>
             </a:fld>
             <a:endParaRPr lang="en-US"/>
           </a:p>
@@ -1991,7 +2007,7 @@
           <a:p>
             <a:fld id="{5BCAD085-E8A6-8845-BD4E-CB4CCA059FC4}" type="datetimeFigureOut">
               <a:rPr lang="en-US" smtClean="0"/>
-              <a:t>1/27/13</a:t>
+              <a:t>9/2/2026</a:t>
             </a:fld>
             <a:endParaRPr lang="en-US"/>
           </a:p>
@@ -2268,7 +2284,7 @@
           <a:p>
             <a:fld id="{5BCAD085-E8A6-8845-BD4E-CB4CCA059FC4}" type="datetimeFigureOut">
               <a:rPr lang="en-US" smtClean="0"/>
-              <a:t>1/27/13</a:t>
+              <a:t>9/2/2026</a:t>
             </a:fld>
             <a:endParaRPr lang="en-US"/>
           </a:p>
@@ -2521,7 +2537,7 @@
           <a:p>
             <a:fld id="{5BCAD085-E8A6-8845-BD4E-CB4CCA059FC4}" type="datetimeFigureOut">
               <a:rPr lang="en-US" smtClean="0"/>
-              <a:t>1/27/13</a:t>
+              <a:t>9/2/2026</a:t>
             </a:fld>
             <a:endParaRPr lang="en-US"/>
           </a:p>
@@ -2734,7 +2750,7 @@
           <a:p>
             <a:fld id="{5BCAD085-E8A6-8845-BD4E-CB4CCA059FC4}" type="datetimeFigureOut">
               <a:rPr lang="en-US" smtClean="0"/>
-              <a:t>1/27/13</a:t>
+              <a:t>9/2/2026</a:t>
             </a:fld>
             <a:endParaRPr lang="en-US"/>
           </a:p>
@@ -3093,7 +3109,7 @@
 </file>
 
 <file path=ppt/slides/slide1.xml><?xml version="1.0" encoding="utf-8"?>
-<p:sld xmlns:a="http://schemas.openxmlformats.org/drawingml/2006/main" xmlns:p="http://schemas.openxmlformats.org/presentationml/2006/main" xmlns:r="http://schemas.openxmlformats.org/officeDocument/2006/relationships">
+<p:sld xmlns:a="http://schemas.openxmlformats.org/drawingml/2006/main" xmlns:r="http://schemas.openxmlformats.org/officeDocument/2006/relationships" xmlns:p="http://schemas.openxmlformats.org/presentationml/2006/main">
   <p:cSld>
     <p:bg>
       <p:bgPr>
@@ -3109,7 +3125,14 @@
         <p:cNvGrpSpPr/>
         <p:nvPr/>
       </p:nvGrpSpPr>
-      <p:grpSpPr/>
+      <p:grpSpPr>
+        <a:xfrm>
+          <a:off x="0" y="0"/>
+          <a:ext cx="0" cy="0"/>
+          <a:chOff x="0" y="0"/>
+          <a:chExt cx="0" cy="0"/>
+        </a:xfrm>
+      </p:grpSpPr>
       <p:sp>
         <p:nvSpPr>
           <p:cNvPr id="2" name="Rectangle 1"/>
@@ -3151,6 +3174,7 @@
           <a:lstStyle/>
           <a:p>
             <a:pPr algn="ctr"/>
+            <a:endParaRPr/>
           </a:p>
         </p:txBody>
       </p:sp>
@@ -3299,13 +3323,31 @@
               </a:lnSpc>
             </a:pPr>
             <a:r>
-              <a:rPr sz="1500" b="0">
+              <a:rPr sz="1500" b="0" dirty="0">
                 <a:solidFill>
                   <a:srgbClr val="66756F"/>
                 </a:solidFill>
                 <a:latin typeface="맑은 고딕"/>
               </a:rPr>
-              <a:t>g = dipole(f) + n  ·  test_deconv_noise 100장</a:t>
+              <a:t>g = dipole(f) + n  ·  </a:t>
+            </a:r>
+            <a:r>
+              <a:rPr sz="1500" b="0" dirty="0" err="1">
+                <a:solidFill>
+                  <a:srgbClr val="66756F"/>
+                </a:solidFill>
+                <a:latin typeface="맑은 고딕"/>
+              </a:rPr>
+              <a:t>test_deconv_noise</a:t>
+            </a:r>
+            <a:r>
+              <a:rPr sz="1500" b="0" dirty="0">
+                <a:solidFill>
+                  <a:srgbClr val="66756F"/>
+                </a:solidFill>
+                <a:latin typeface="맑은 고딕"/>
+              </a:rPr>
+              <a:t> 100장</a:t>
             </a:r>
           </a:p>
         </p:txBody>
@@ -3355,6 +3397,7 @@
           <a:lstStyle/>
           <a:p>
             <a:pPr algn="ctr"/>
+            <a:endParaRPr/>
           </a:p>
         </p:txBody>
       </p:sp>
@@ -3481,6 +3524,7 @@
           <a:lstStyle/>
           <a:p>
             <a:pPr algn="ctr"/>
+            <a:endParaRPr/>
           </a:p>
         </p:txBody>
       </p:sp>
@@ -3571,7 +3615,7 @@
 </file>
 
 <file path=ppt/slides/slide10.xml><?xml version="1.0" encoding="utf-8"?>
-<p:sld xmlns:a="http://schemas.openxmlformats.org/drawingml/2006/main" xmlns:p="http://schemas.openxmlformats.org/presentationml/2006/main" xmlns:r="http://schemas.openxmlformats.org/officeDocument/2006/relationships">
+<p:sld xmlns:a="http://schemas.openxmlformats.org/drawingml/2006/main" xmlns:r="http://schemas.openxmlformats.org/officeDocument/2006/relationships" xmlns:p="http://schemas.openxmlformats.org/presentationml/2006/main">
   <p:cSld>
     <p:bg>
       <p:bgPr>
@@ -3587,7 +3631,14 @@
         <p:cNvGrpSpPr/>
         <p:nvPr/>
       </p:nvGrpSpPr>
-      <p:grpSpPr/>
+      <p:grpSpPr>
+        <a:xfrm>
+          <a:off x="0" y="0"/>
+          <a:ext cx="0" cy="0"/>
+          <a:chOff x="0" y="0"/>
+          <a:chExt cx="0" cy="0"/>
+        </a:xfrm>
+      </p:grpSpPr>
       <p:sp>
         <p:nvSpPr>
           <p:cNvPr id="2" name="TextBox 1"/>
@@ -3746,6 +3797,7 @@
           <a:lstStyle/>
           <a:p>
             <a:pPr algn="ctr"/>
+            <a:endParaRPr/>
           </a:p>
         </p:txBody>
       </p:sp>
@@ -3820,7 +3872,7 @@
         </p:nvSpPr>
         <p:spPr>
           <a:xfrm>
-            <a:off x="822960" y="4370832"/>
+            <a:off x="731520" y="4567766"/>
             <a:ext cx="10515600" cy="274320"/>
           </a:xfrm>
           <a:prstGeom prst="rect">
@@ -3840,13 +3892,148 @@
               </a:lnSpc>
             </a:pPr>
             <a:r>
-              <a:rPr sz="1100" b="0">
+              <a:rPr sz="1100" b="0" dirty="0" err="1">
                 <a:solidFill>
                   <a:srgbClr val="66756F"/>
                 </a:solidFill>
                 <a:latin typeface="맑은 고딕"/>
               </a:rPr>
-              <a:t>정류 편향이 DC 를 밀어 올리는데 dipole 은 DC 를 1/3 로 보존하므로 편향이 그대로 살아남는다.</a:t>
+              <a:t>정류</a:t>
+            </a:r>
+            <a:r>
+              <a:rPr sz="1100" b="0" dirty="0">
+                <a:solidFill>
+                  <a:srgbClr val="66756F"/>
+                </a:solidFill>
+                <a:latin typeface="맑은 고딕"/>
+              </a:rPr>
+              <a:t> </a:t>
+            </a:r>
+            <a:r>
+              <a:rPr sz="1100" b="0" dirty="0" err="1">
+                <a:solidFill>
+                  <a:srgbClr val="66756F"/>
+                </a:solidFill>
+                <a:latin typeface="맑은 고딕"/>
+              </a:rPr>
+              <a:t>편향이</a:t>
+            </a:r>
+            <a:r>
+              <a:rPr sz="1100" b="0" dirty="0">
+                <a:solidFill>
+                  <a:srgbClr val="66756F"/>
+                </a:solidFill>
+                <a:latin typeface="맑은 고딕"/>
+              </a:rPr>
+              <a:t> DC 를 </a:t>
+            </a:r>
+            <a:r>
+              <a:rPr sz="1100" b="0" dirty="0" err="1">
+                <a:solidFill>
+                  <a:srgbClr val="66756F"/>
+                </a:solidFill>
+                <a:latin typeface="맑은 고딕"/>
+              </a:rPr>
+              <a:t>밀어</a:t>
+            </a:r>
+            <a:r>
+              <a:rPr sz="1100" b="0" dirty="0">
+                <a:solidFill>
+                  <a:srgbClr val="66756F"/>
+                </a:solidFill>
+                <a:latin typeface="맑은 고딕"/>
+              </a:rPr>
+              <a:t> </a:t>
+            </a:r>
+            <a:r>
+              <a:rPr sz="1100" b="0" dirty="0" err="1">
+                <a:solidFill>
+                  <a:srgbClr val="66756F"/>
+                </a:solidFill>
+                <a:latin typeface="맑은 고딕"/>
+              </a:rPr>
+              <a:t>올리는데</a:t>
+            </a:r>
+            <a:r>
+              <a:rPr sz="1100" b="0" dirty="0">
+                <a:solidFill>
+                  <a:srgbClr val="66756F"/>
+                </a:solidFill>
+                <a:latin typeface="맑은 고딕"/>
+              </a:rPr>
+              <a:t> dipole 은 DC 를 1/3 로 </a:t>
+            </a:r>
+            <a:r>
+              <a:rPr sz="1100" b="0" dirty="0" err="1">
+                <a:solidFill>
+                  <a:srgbClr val="66756F"/>
+                </a:solidFill>
+                <a:latin typeface="맑은 고딕"/>
+              </a:rPr>
+              <a:t>보존하므로</a:t>
+            </a:r>
+            <a:r>
+              <a:rPr sz="1100" b="0" dirty="0">
+                <a:solidFill>
+                  <a:srgbClr val="66756F"/>
+                </a:solidFill>
+                <a:latin typeface="맑은 고딕"/>
+              </a:rPr>
+              <a:t> </a:t>
+            </a:r>
+            <a:r>
+              <a:rPr sz="1100" b="0" dirty="0" err="1">
+                <a:solidFill>
+                  <a:srgbClr val="66756F"/>
+                </a:solidFill>
+                <a:latin typeface="맑은 고딕"/>
+              </a:rPr>
+              <a:t>편향이</a:t>
+            </a:r>
+            <a:r>
+              <a:rPr sz="1100" b="0" dirty="0">
+                <a:solidFill>
+                  <a:srgbClr val="66756F"/>
+                </a:solidFill>
+                <a:latin typeface="맑은 고딕"/>
+              </a:rPr>
+              <a:t> </a:t>
+            </a:r>
+            <a:r>
+              <a:rPr sz="1100" b="0" dirty="0" err="1">
+                <a:solidFill>
+                  <a:srgbClr val="66756F"/>
+                </a:solidFill>
+                <a:latin typeface="맑은 고딕"/>
+              </a:rPr>
+              <a:t>그대로</a:t>
+            </a:r>
+            <a:r>
+              <a:rPr sz="1100" b="0" dirty="0">
+                <a:solidFill>
+                  <a:srgbClr val="66756F"/>
+                </a:solidFill>
+                <a:latin typeface="맑은 고딕"/>
+              </a:rPr>
+              <a:t> </a:t>
+            </a:r>
+            <a:r>
+              <a:rPr sz="1100" b="0" dirty="0" err="1">
+                <a:solidFill>
+                  <a:srgbClr val="66756F"/>
+                </a:solidFill>
+                <a:latin typeface="맑은 고딕"/>
+              </a:rPr>
+              <a:t>살아남는다</a:t>
+            </a:r>
+            <a:r>
+              <a:rPr sz="1100" b="0" dirty="0">
+                <a:solidFill>
+                  <a:srgbClr val="66756F"/>
+                </a:solidFill>
+                <a:latin typeface="맑은 고딕"/>
+              </a:rPr>
+              <a:t>.</a:t>
             </a:r>
           </a:p>
         </p:txBody>
@@ -3859,7 +4046,7 @@
         </p:nvSpPr>
         <p:spPr>
           <a:xfrm>
-            <a:off x="822960" y="4718304"/>
+            <a:off x="822960" y="5131542"/>
             <a:ext cx="10515600" cy="274320"/>
           </a:xfrm>
           <a:prstGeom prst="rect">
@@ -3898,7 +4085,7 @@
         </p:nvSpPr>
         <p:spPr>
           <a:xfrm>
-            <a:off x="822960" y="4974336"/>
+            <a:off x="822960" y="5387574"/>
             <a:ext cx="10515600" cy="274320"/>
           </a:xfrm>
           <a:prstGeom prst="rect">
@@ -3918,13 +4105,229 @@
               </a:lnSpc>
             </a:pPr>
             <a:r>
-              <a:rPr sz="1100" b="0">
+              <a:rPr sz="1100" b="0" dirty="0">
                 <a:solidFill>
                   <a:srgbClr val="66756F"/>
                 </a:solidFill>
                 <a:latin typeface="맑은 고딕"/>
               </a:rPr>
-              <a:t>1일차 디노이저는 선명한 입력 위의 임펄스만 봤지, 흐릿한 입력 위의 임펄스는 본 적이 없다.</a:t>
+              <a:t>1일차 </a:t>
+            </a:r>
+            <a:r>
+              <a:rPr sz="1100" b="0" dirty="0" err="1">
+                <a:solidFill>
+                  <a:srgbClr val="66756F"/>
+                </a:solidFill>
+                <a:latin typeface="맑은 고딕"/>
+              </a:rPr>
+              <a:t>디노이저는</a:t>
+            </a:r>
+            <a:r>
+              <a:rPr sz="1100" b="0" dirty="0">
+                <a:solidFill>
+                  <a:srgbClr val="66756F"/>
+                </a:solidFill>
+                <a:latin typeface="맑은 고딕"/>
+              </a:rPr>
+              <a:t> </a:t>
+            </a:r>
+            <a:r>
+              <a:rPr sz="1100" b="0" dirty="0" err="1">
+                <a:solidFill>
+                  <a:srgbClr val="66756F"/>
+                </a:solidFill>
+                <a:latin typeface="맑은 고딕"/>
+              </a:rPr>
+              <a:t>선명한</a:t>
+            </a:r>
+            <a:r>
+              <a:rPr sz="1100" b="0" dirty="0">
+                <a:solidFill>
+                  <a:srgbClr val="66756F"/>
+                </a:solidFill>
+                <a:latin typeface="맑은 고딕"/>
+              </a:rPr>
+              <a:t> </a:t>
+            </a:r>
+            <a:r>
+              <a:rPr sz="1100" b="0" dirty="0" err="1">
+                <a:solidFill>
+                  <a:srgbClr val="66756F"/>
+                </a:solidFill>
+                <a:latin typeface="맑은 고딕"/>
+              </a:rPr>
+              <a:t>입력</a:t>
+            </a:r>
+            <a:r>
+              <a:rPr sz="1100" b="0" dirty="0">
+                <a:solidFill>
+                  <a:srgbClr val="66756F"/>
+                </a:solidFill>
+                <a:latin typeface="맑은 고딕"/>
+              </a:rPr>
+              <a:t> </a:t>
+            </a:r>
+            <a:r>
+              <a:rPr sz="1100" b="0" dirty="0" err="1">
+                <a:solidFill>
+                  <a:srgbClr val="66756F"/>
+                </a:solidFill>
+                <a:latin typeface="맑은 고딕"/>
+              </a:rPr>
+              <a:t>위의</a:t>
+            </a:r>
+            <a:r>
+              <a:rPr sz="1100" b="0" dirty="0">
+                <a:solidFill>
+                  <a:srgbClr val="66756F"/>
+                </a:solidFill>
+                <a:latin typeface="맑은 고딕"/>
+              </a:rPr>
+              <a:t> </a:t>
+            </a:r>
+            <a:r>
+              <a:rPr sz="1100" b="0" dirty="0" err="1">
+                <a:solidFill>
+                  <a:srgbClr val="66756F"/>
+                </a:solidFill>
+                <a:latin typeface="맑은 고딕"/>
+              </a:rPr>
+              <a:t>임펄스만</a:t>
+            </a:r>
+            <a:r>
+              <a:rPr sz="1100" b="0" dirty="0">
+                <a:solidFill>
+                  <a:srgbClr val="66756F"/>
+                </a:solidFill>
+                <a:latin typeface="맑은 고딕"/>
+              </a:rPr>
+              <a:t> </a:t>
+            </a:r>
+            <a:r>
+              <a:rPr sz="1100" b="0" dirty="0" err="1">
+                <a:solidFill>
+                  <a:srgbClr val="66756F"/>
+                </a:solidFill>
+                <a:latin typeface="맑은 고딕"/>
+              </a:rPr>
+              <a:t>봤지</a:t>
+            </a:r>
+            <a:r>
+              <a:rPr sz="1100" b="0" dirty="0">
+                <a:solidFill>
+                  <a:srgbClr val="66756F"/>
+                </a:solidFill>
+                <a:latin typeface="맑은 고딕"/>
+              </a:rPr>
+              <a:t>, </a:t>
+            </a:r>
+            <a:r>
+              <a:rPr sz="1100" b="0" dirty="0" err="1">
+                <a:solidFill>
+                  <a:srgbClr val="66756F"/>
+                </a:solidFill>
+                <a:latin typeface="맑은 고딕"/>
+              </a:rPr>
+              <a:t>흐릿한</a:t>
+            </a:r>
+            <a:r>
+              <a:rPr sz="1100" b="0" dirty="0">
+                <a:solidFill>
+                  <a:srgbClr val="66756F"/>
+                </a:solidFill>
+                <a:latin typeface="맑은 고딕"/>
+              </a:rPr>
+              <a:t> </a:t>
+            </a:r>
+            <a:r>
+              <a:rPr sz="1100" b="0" dirty="0" err="1">
+                <a:solidFill>
+                  <a:srgbClr val="66756F"/>
+                </a:solidFill>
+                <a:latin typeface="맑은 고딕"/>
+              </a:rPr>
+              <a:t>입력</a:t>
+            </a:r>
+            <a:r>
+              <a:rPr sz="1100" b="0" dirty="0">
+                <a:solidFill>
+                  <a:srgbClr val="66756F"/>
+                </a:solidFill>
+                <a:latin typeface="맑은 고딕"/>
+              </a:rPr>
+              <a:t> </a:t>
+            </a:r>
+            <a:r>
+              <a:rPr sz="1100" b="0" dirty="0" err="1">
+                <a:solidFill>
+                  <a:srgbClr val="66756F"/>
+                </a:solidFill>
+                <a:latin typeface="맑은 고딕"/>
+              </a:rPr>
+              <a:t>위의</a:t>
+            </a:r>
+            <a:r>
+              <a:rPr sz="1100" b="0" dirty="0">
+                <a:solidFill>
+                  <a:srgbClr val="66756F"/>
+                </a:solidFill>
+                <a:latin typeface="맑은 고딕"/>
+              </a:rPr>
+              <a:t> </a:t>
+            </a:r>
+            <a:r>
+              <a:rPr sz="1100" b="0" dirty="0" err="1">
+                <a:solidFill>
+                  <a:srgbClr val="66756F"/>
+                </a:solidFill>
+                <a:latin typeface="맑은 고딕"/>
+              </a:rPr>
+              <a:t>임펄스는</a:t>
+            </a:r>
+            <a:r>
+              <a:rPr sz="1100" b="0" dirty="0">
+                <a:solidFill>
+                  <a:srgbClr val="66756F"/>
+                </a:solidFill>
+                <a:latin typeface="맑은 고딕"/>
+              </a:rPr>
+              <a:t> 본 </a:t>
+            </a:r>
+            <a:r>
+              <a:rPr sz="1100" b="0" dirty="0" err="1">
+                <a:solidFill>
+                  <a:srgbClr val="66756F"/>
+                </a:solidFill>
+                <a:latin typeface="맑은 고딕"/>
+              </a:rPr>
+              <a:t>적이</a:t>
+            </a:r>
+            <a:r>
+              <a:rPr sz="1100" b="0" dirty="0">
+                <a:solidFill>
+                  <a:srgbClr val="66756F"/>
+                </a:solidFill>
+                <a:latin typeface="맑은 고딕"/>
+              </a:rPr>
+              <a:t> </a:t>
+            </a:r>
+            <a:r>
+              <a:rPr sz="1100" b="0" dirty="0" err="1">
+                <a:solidFill>
+                  <a:srgbClr val="66756F"/>
+                </a:solidFill>
+                <a:latin typeface="맑은 고딕"/>
+              </a:rPr>
+              <a:t>없다</a:t>
+            </a:r>
+            <a:r>
+              <a:rPr sz="1100" b="0" dirty="0">
+                <a:solidFill>
+                  <a:srgbClr val="66756F"/>
+                </a:solidFill>
+                <a:latin typeface="맑은 고딕"/>
+              </a:rPr>
+              <a:t>.</a:t>
             </a:r>
           </a:p>
         </p:txBody>
@@ -3937,7 +4340,7 @@
         </p:nvSpPr>
         <p:spPr>
           <a:xfrm>
-            <a:off x="822960" y="5321808"/>
+            <a:off x="822960" y="5735046"/>
             <a:ext cx="10515600" cy="274320"/>
           </a:xfrm>
           <a:prstGeom prst="rect">
@@ -3976,7 +4379,7 @@
         </p:nvSpPr>
         <p:spPr>
           <a:xfrm>
-            <a:off x="822960" y="5577840"/>
+            <a:off x="822960" y="5991078"/>
             <a:ext cx="10515600" cy="274320"/>
           </a:xfrm>
           <a:prstGeom prst="rect">
@@ -3996,13 +4399,184 @@
               </a:lnSpc>
             </a:pPr>
             <a:r>
-              <a:rPr sz="1100" b="0">
+              <a:rPr sz="1100" b="0" dirty="0" err="1">
                 <a:solidFill>
                   <a:srgbClr val="66756F"/>
                 </a:solidFill>
                 <a:latin typeface="맑은 고딕"/>
               </a:rPr>
-              <a:t>정보가 애초에 없는 주파수라 어떤 K 를 써도 남는다. 사전지식으로만 메울 수 있다.</a:t>
+              <a:t>정보가</a:t>
+            </a:r>
+            <a:r>
+              <a:rPr sz="1100" b="0" dirty="0">
+                <a:solidFill>
+                  <a:srgbClr val="66756F"/>
+                </a:solidFill>
+                <a:latin typeface="맑은 고딕"/>
+              </a:rPr>
+              <a:t> </a:t>
+            </a:r>
+            <a:r>
+              <a:rPr sz="1100" b="0" dirty="0" err="1">
+                <a:solidFill>
+                  <a:srgbClr val="66756F"/>
+                </a:solidFill>
+                <a:latin typeface="맑은 고딕"/>
+              </a:rPr>
+              <a:t>애초에</a:t>
+            </a:r>
+            <a:r>
+              <a:rPr sz="1100" b="0" dirty="0">
+                <a:solidFill>
+                  <a:srgbClr val="66756F"/>
+                </a:solidFill>
+                <a:latin typeface="맑은 고딕"/>
+              </a:rPr>
+              <a:t> </a:t>
+            </a:r>
+            <a:r>
+              <a:rPr sz="1100" b="0" dirty="0" err="1">
+                <a:solidFill>
+                  <a:srgbClr val="66756F"/>
+                </a:solidFill>
+                <a:latin typeface="맑은 고딕"/>
+              </a:rPr>
+              <a:t>없는</a:t>
+            </a:r>
+            <a:r>
+              <a:rPr sz="1100" b="0" dirty="0">
+                <a:solidFill>
+                  <a:srgbClr val="66756F"/>
+                </a:solidFill>
+                <a:latin typeface="맑은 고딕"/>
+              </a:rPr>
+              <a:t> </a:t>
+            </a:r>
+            <a:r>
+              <a:rPr sz="1100" b="0" dirty="0" err="1">
+                <a:solidFill>
+                  <a:srgbClr val="66756F"/>
+                </a:solidFill>
+                <a:latin typeface="맑은 고딕"/>
+              </a:rPr>
+              <a:t>주파수라</a:t>
+            </a:r>
+            <a:r>
+              <a:rPr sz="1100" b="0" dirty="0">
+                <a:solidFill>
+                  <a:srgbClr val="66756F"/>
+                </a:solidFill>
+                <a:latin typeface="맑은 고딕"/>
+              </a:rPr>
+              <a:t> </a:t>
+            </a:r>
+            <a:r>
+              <a:rPr sz="1100" b="0" dirty="0" err="1">
+                <a:solidFill>
+                  <a:srgbClr val="66756F"/>
+                </a:solidFill>
+                <a:latin typeface="맑은 고딕"/>
+              </a:rPr>
+              <a:t>어떤</a:t>
+            </a:r>
+            <a:r>
+              <a:rPr sz="1100" b="0" dirty="0">
+                <a:solidFill>
+                  <a:srgbClr val="66756F"/>
+                </a:solidFill>
+                <a:latin typeface="맑은 고딕"/>
+              </a:rPr>
+              <a:t> K 를 </a:t>
+            </a:r>
+            <a:r>
+              <a:rPr sz="1100" b="0" dirty="0" err="1">
+                <a:solidFill>
+                  <a:srgbClr val="66756F"/>
+                </a:solidFill>
+                <a:latin typeface="맑은 고딕"/>
+              </a:rPr>
+              <a:t>써도</a:t>
+            </a:r>
+            <a:r>
+              <a:rPr sz="1100" b="0" dirty="0">
+                <a:solidFill>
+                  <a:srgbClr val="66756F"/>
+                </a:solidFill>
+                <a:latin typeface="맑은 고딕"/>
+              </a:rPr>
+              <a:t> </a:t>
+            </a:r>
+            <a:r>
+              <a:rPr sz="1100" b="0" dirty="0" err="1">
+                <a:solidFill>
+                  <a:srgbClr val="66756F"/>
+                </a:solidFill>
+                <a:latin typeface="맑은 고딕"/>
+              </a:rPr>
+              <a:t>남는다</a:t>
+            </a:r>
+            <a:r>
+              <a:rPr sz="1100" b="0" dirty="0">
+                <a:solidFill>
+                  <a:srgbClr val="66756F"/>
+                </a:solidFill>
+                <a:latin typeface="맑은 고딕"/>
+              </a:rPr>
+              <a:t>. </a:t>
+            </a:r>
+            <a:r>
+              <a:rPr sz="1100" b="0" dirty="0" err="1">
+                <a:solidFill>
+                  <a:srgbClr val="66756F"/>
+                </a:solidFill>
+                <a:latin typeface="맑은 고딕"/>
+              </a:rPr>
+              <a:t>사전지식으로만</a:t>
+            </a:r>
+            <a:r>
+              <a:rPr sz="1100" b="0" dirty="0">
+                <a:solidFill>
+                  <a:srgbClr val="66756F"/>
+                </a:solidFill>
+                <a:latin typeface="맑은 고딕"/>
+              </a:rPr>
+              <a:t> </a:t>
+            </a:r>
+            <a:r>
+              <a:rPr sz="1100" b="0" dirty="0" err="1">
+                <a:solidFill>
+                  <a:srgbClr val="66756F"/>
+                </a:solidFill>
+                <a:latin typeface="맑은 고딕"/>
+              </a:rPr>
+              <a:t>메울</a:t>
+            </a:r>
+            <a:r>
+              <a:rPr sz="1100" b="0" dirty="0">
+                <a:solidFill>
+                  <a:srgbClr val="66756F"/>
+                </a:solidFill>
+                <a:latin typeface="맑은 고딕"/>
+              </a:rPr>
+              <a:t> 수 </a:t>
+            </a:r>
+            <a:r>
+              <a:rPr sz="1100" b="0" dirty="0" err="1">
+                <a:solidFill>
+                  <a:srgbClr val="66756F"/>
+                </a:solidFill>
+                <a:latin typeface="맑은 고딕"/>
+              </a:rPr>
+              <a:t>있다</a:t>
+            </a:r>
+            <a:r>
+              <a:rPr sz="1100" b="0" dirty="0">
+                <a:solidFill>
+                  <a:srgbClr val="66756F"/>
+                </a:solidFill>
+                <a:latin typeface="맑은 고딕"/>
+              </a:rPr>
+              <a:t>.</a:t>
             </a:r>
           </a:p>
         </p:txBody>
@@ -4016,7 +4590,7 @@
 </file>
 
 <file path=ppt/slides/slide11.xml><?xml version="1.0" encoding="utf-8"?>
-<p:sld xmlns:a="http://schemas.openxmlformats.org/drawingml/2006/main" xmlns:p="http://schemas.openxmlformats.org/presentationml/2006/main" xmlns:r="http://schemas.openxmlformats.org/officeDocument/2006/relationships">
+<p:sld xmlns:a="http://schemas.openxmlformats.org/drawingml/2006/main" xmlns:r="http://schemas.openxmlformats.org/officeDocument/2006/relationships" xmlns:p="http://schemas.openxmlformats.org/presentationml/2006/main">
   <p:cSld>
     <p:bg>
       <p:bgPr>
@@ -4032,7 +4606,14 @@
         <p:cNvGrpSpPr/>
         <p:nvPr/>
       </p:nvGrpSpPr>
-      <p:grpSpPr/>
+      <p:grpSpPr>
+        <a:xfrm>
+          <a:off x="0" y="0"/>
+          <a:ext cx="0" cy="0"/>
+          <a:chOff x="0" y="0"/>
+          <a:chExt cx="0" cy="0"/>
+        </a:xfrm>
+      </p:grpSpPr>
       <p:sp>
         <p:nvSpPr>
           <p:cNvPr id="2" name="TextBox 1"/>
@@ -4191,6 +4772,7 @@
           <a:lstStyle/>
           <a:p>
             <a:pPr algn="ctr"/>
+            <a:endParaRPr/>
           </a:p>
         </p:txBody>
       </p:sp>
@@ -4204,7 +4786,7 @@
         </p:nvGraphicFramePr>
         <p:xfrm>
           <a:off x="822960" y="1691640"/>
-          <a:ext cx="10515599" cy="1645920"/>
+          <a:ext cx="10515599" cy="1700784"/>
         </p:xfrm>
         <a:graphic>
           <a:graphicData uri="http://schemas.openxmlformats.org/drawingml/2006/table">
@@ -4213,10 +4795,34 @@
                 <a:tableStyleId>{5C22544A-7EE6-4342-B048-85BDC9FD1C3A}</a:tableStyleId>
               </a:tblPr>
               <a:tblGrid>
-                <a:gridCol w="4754880"/>
-                <a:gridCol w="1828800"/>
-                <a:gridCol w="1828800"/>
-                <a:gridCol w="2103119"/>
+                <a:gridCol w="4754880">
+                  <a:extLst>
+                    <a:ext uri="{9D8B030D-6E8A-4147-A177-3AD203B41FA5}">
+                      <a16:colId xmlns:a16="http://schemas.microsoft.com/office/drawing/2014/main" val="20000"/>
+                    </a:ext>
+                  </a:extLst>
+                </a:gridCol>
+                <a:gridCol w="1828800">
+                  <a:extLst>
+                    <a:ext uri="{9D8B030D-6E8A-4147-A177-3AD203B41FA5}">
+                      <a16:colId xmlns:a16="http://schemas.microsoft.com/office/drawing/2014/main" val="20001"/>
+                    </a:ext>
+                  </a:extLst>
+                </a:gridCol>
+                <a:gridCol w="1828800">
+                  <a:extLst>
+                    <a:ext uri="{9D8B030D-6E8A-4147-A177-3AD203B41FA5}">
+                      <a16:colId xmlns:a16="http://schemas.microsoft.com/office/drawing/2014/main" val="20002"/>
+                    </a:ext>
+                  </a:extLst>
+                </a:gridCol>
+                <a:gridCol w="2103119">
+                  <a:extLst>
+                    <a:ext uri="{9D8B030D-6E8A-4147-A177-3AD203B41FA5}">
+                      <a16:colId xmlns:a16="http://schemas.microsoft.com/office/drawing/2014/main" val="20003"/>
+                    </a:ext>
+                  </a:extLst>
+                </a:gridCol>
               </a:tblGrid>
               <a:tr h="274320">
                 <a:tc>
@@ -4225,6 +4831,7 @@
                     <a:lstStyle/>
                     <a:p>
                       <a:pPr algn="l"/>
+                      <a:endParaRPr/>
                     </a:p>
                   </a:txBody>
                   <a:tcPr marL="82296" marR="82296" marT="27432" marB="27432" anchor="ctr">
@@ -4302,6 +4909,11 @@
                     </a:solidFill>
                   </a:tcPr>
                 </a:tc>
+                <a:extLst>
+                  <a:ext uri="{0D108BD9-81ED-4DB2-BD59-A6C34878D82A}">
+                    <a16:rowId xmlns:a16="http://schemas.microsoft.com/office/drawing/2014/main" val="10000"/>
+                  </a:ext>
+                </a:extLst>
               </a:tr>
               <a:tr h="274320">
                 <a:tc>
@@ -4396,6 +5008,11 @@
                     </a:solidFill>
                   </a:tcPr>
                 </a:tc>
+                <a:extLst>
+                  <a:ext uri="{0D108BD9-81ED-4DB2-BD59-A6C34878D82A}">
+                    <a16:rowId xmlns:a16="http://schemas.microsoft.com/office/drawing/2014/main" val="10001"/>
+                  </a:ext>
+                </a:extLst>
               </a:tr>
               <a:tr h="274320">
                 <a:tc>
@@ -4490,6 +5107,11 @@
                     </a:solidFill>
                   </a:tcPr>
                 </a:tc>
+                <a:extLst>
+                  <a:ext uri="{0D108BD9-81ED-4DB2-BD59-A6C34878D82A}">
+                    <a16:rowId xmlns:a16="http://schemas.microsoft.com/office/drawing/2014/main" val="10002"/>
+                  </a:ext>
+                </a:extLst>
               </a:tr>
               <a:tr h="274320">
                 <a:tc>
@@ -4584,6 +5206,11 @@
                     </a:solidFill>
                   </a:tcPr>
                 </a:tc>
+                <a:extLst>
+                  <a:ext uri="{0D108BD9-81ED-4DB2-BD59-A6C34878D82A}">
+                    <a16:rowId xmlns:a16="http://schemas.microsoft.com/office/drawing/2014/main" val="10003"/>
+                  </a:ext>
+                </a:extLst>
               </a:tr>
               <a:tr h="274320">
                 <a:tc>
@@ -4678,6 +5305,11 @@
                     </a:solidFill>
                   </a:tcPr>
                 </a:tc>
+                <a:extLst>
+                  <a:ext uri="{0D108BD9-81ED-4DB2-BD59-A6C34878D82A}">
+                    <a16:rowId xmlns:a16="http://schemas.microsoft.com/office/drawing/2014/main" val="10004"/>
+                  </a:ext>
+                </a:extLst>
               </a:tr>
               <a:tr h="274320">
                 <a:tc>
@@ -4772,6 +5404,11 @@
                     </a:solidFill>
                   </a:tcPr>
                 </a:tc>
+                <a:extLst>
+                  <a:ext uri="{0D108BD9-81ED-4DB2-BD59-A6C34878D82A}">
+                    <a16:rowId xmlns:a16="http://schemas.microsoft.com/office/drawing/2014/main" val="10005"/>
+                  </a:ext>
+                </a:extLst>
               </a:tr>
             </a:tbl>
           </a:graphicData>
@@ -4796,10 +5433,34 @@
                 <a:tableStyleId>{5C22544A-7EE6-4342-B048-85BDC9FD1C3A}</a:tableStyleId>
               </a:tblPr>
               <a:tblGrid>
-                <a:gridCol w="2377440"/>
-                <a:gridCol w="1188720"/>
-                <a:gridCol w="1188720"/>
-                <a:gridCol w="731520"/>
+                <a:gridCol w="2377440">
+                  <a:extLst>
+                    <a:ext uri="{9D8B030D-6E8A-4147-A177-3AD203B41FA5}">
+                      <a16:colId xmlns:a16="http://schemas.microsoft.com/office/drawing/2014/main" val="20000"/>
+                    </a:ext>
+                  </a:extLst>
+                </a:gridCol>
+                <a:gridCol w="1188720">
+                  <a:extLst>
+                    <a:ext uri="{9D8B030D-6E8A-4147-A177-3AD203B41FA5}">
+                      <a16:colId xmlns:a16="http://schemas.microsoft.com/office/drawing/2014/main" val="20001"/>
+                    </a:ext>
+                  </a:extLst>
+                </a:gridCol>
+                <a:gridCol w="1188720">
+                  <a:extLst>
+                    <a:ext uri="{9D8B030D-6E8A-4147-A177-3AD203B41FA5}">
+                      <a16:colId xmlns:a16="http://schemas.microsoft.com/office/drawing/2014/main" val="20002"/>
+                    </a:ext>
+                  </a:extLst>
+                </a:gridCol>
+                <a:gridCol w="731520">
+                  <a:extLst>
+                    <a:ext uri="{9D8B030D-6E8A-4147-A177-3AD203B41FA5}">
+                      <a16:colId xmlns:a16="http://schemas.microsoft.com/office/drawing/2014/main" val="20003"/>
+                    </a:ext>
+                  </a:extLst>
+                </a:gridCol>
               </a:tblGrid>
               <a:tr h="274320">
                 <a:tc>
@@ -4894,6 +5555,11 @@
                     </a:solidFill>
                   </a:tcPr>
                 </a:tc>
+                <a:extLst>
+                  <a:ext uri="{0D108BD9-81ED-4DB2-BD59-A6C34878D82A}">
+                    <a16:rowId xmlns:a16="http://schemas.microsoft.com/office/drawing/2014/main" val="10000"/>
+                  </a:ext>
+                </a:extLst>
               </a:tr>
               <a:tr h="274320">
                 <a:tc>
@@ -4988,6 +5654,11 @@
                     </a:solidFill>
                   </a:tcPr>
                 </a:tc>
+                <a:extLst>
+                  <a:ext uri="{0D108BD9-81ED-4DB2-BD59-A6C34878D82A}">
+                    <a16:rowId xmlns:a16="http://schemas.microsoft.com/office/drawing/2014/main" val="10001"/>
+                  </a:ext>
+                </a:extLst>
               </a:tr>
               <a:tr h="274320">
                 <a:tc>
@@ -5082,6 +5753,11 @@
                     </a:solidFill>
                   </a:tcPr>
                 </a:tc>
+                <a:extLst>
+                  <a:ext uri="{0D108BD9-81ED-4DB2-BD59-A6C34878D82A}">
+                    <a16:rowId xmlns:a16="http://schemas.microsoft.com/office/drawing/2014/main" val="10002"/>
+                  </a:ext>
+                </a:extLst>
               </a:tr>
               <a:tr h="274320">
                 <a:tc>
@@ -5176,6 +5852,11 @@
                     </a:solidFill>
                   </a:tcPr>
                 </a:tc>
+                <a:extLst>
+                  <a:ext uri="{0D108BD9-81ED-4DB2-BD59-A6C34878D82A}">
+                    <a16:rowId xmlns:a16="http://schemas.microsoft.com/office/drawing/2014/main" val="10003"/>
+                  </a:ext>
+                </a:extLst>
               </a:tr>
               <a:tr h="274320">
                 <a:tc>
@@ -5270,6 +5951,11 @@
                     </a:solidFill>
                   </a:tcPr>
                 </a:tc>
+                <a:extLst>
+                  <a:ext uri="{0D108BD9-81ED-4DB2-BD59-A6C34878D82A}">
+                    <a16:rowId xmlns:a16="http://schemas.microsoft.com/office/drawing/2014/main" val="10004"/>
+                  </a:ext>
+                </a:extLst>
               </a:tr>
             </a:tbl>
           </a:graphicData>
@@ -5320,6 +6006,7 @@
           <a:lstStyle/>
           <a:p>
             <a:pPr algn="ctr"/>
+            <a:endParaRPr/>
           </a:p>
         </p:txBody>
       </p:sp>
@@ -5458,7 +6145,7 @@
 </file>
 
 <file path=ppt/slides/slide12.xml><?xml version="1.0" encoding="utf-8"?>
-<p:sld xmlns:a="http://schemas.openxmlformats.org/drawingml/2006/main" xmlns:p="http://schemas.openxmlformats.org/presentationml/2006/main" xmlns:r="http://schemas.openxmlformats.org/officeDocument/2006/relationships">
+<p:sld xmlns:a="http://schemas.openxmlformats.org/drawingml/2006/main" xmlns:r="http://schemas.openxmlformats.org/officeDocument/2006/relationships" xmlns:p="http://schemas.openxmlformats.org/presentationml/2006/main">
   <p:cSld>
     <p:bg>
       <p:bgPr>
@@ -5474,7 +6161,14 @@
         <p:cNvGrpSpPr/>
         <p:nvPr/>
       </p:nvGrpSpPr>
-      <p:grpSpPr/>
+      <p:grpSpPr>
+        <a:xfrm>
+          <a:off x="0" y="0"/>
+          <a:ext cx="0" cy="0"/>
+          <a:chOff x="0" y="0"/>
+          <a:chExt cx="0" cy="0"/>
+        </a:xfrm>
+      </p:grpSpPr>
       <p:sp>
         <p:nvSpPr>
           <p:cNvPr id="2" name="TextBox 1"/>
@@ -5633,6 +6327,7 @@
           <a:lstStyle/>
           <a:p>
             <a:pPr algn="ctr"/>
+            <a:endParaRPr/>
           </a:p>
         </p:txBody>
       </p:sp>
@@ -5655,10 +6350,34 @@
                 <a:tableStyleId>{5C22544A-7EE6-4342-B048-85BDC9FD1C3A}</a:tableStyleId>
               </a:tblPr>
               <a:tblGrid>
-                <a:gridCol w="4779818"/>
-                <a:gridCol w="1720734"/>
-                <a:gridCol w="1720734"/>
-                <a:gridCol w="2294312"/>
+                <a:gridCol w="4779818">
+                  <a:extLst>
+                    <a:ext uri="{9D8B030D-6E8A-4147-A177-3AD203B41FA5}">
+                      <a16:colId xmlns:a16="http://schemas.microsoft.com/office/drawing/2014/main" val="20000"/>
+                    </a:ext>
+                  </a:extLst>
+                </a:gridCol>
+                <a:gridCol w="1720734">
+                  <a:extLst>
+                    <a:ext uri="{9D8B030D-6E8A-4147-A177-3AD203B41FA5}">
+                      <a16:colId xmlns:a16="http://schemas.microsoft.com/office/drawing/2014/main" val="20001"/>
+                    </a:ext>
+                  </a:extLst>
+                </a:gridCol>
+                <a:gridCol w="1720734">
+                  <a:extLst>
+                    <a:ext uri="{9D8B030D-6E8A-4147-A177-3AD203B41FA5}">
+                      <a16:colId xmlns:a16="http://schemas.microsoft.com/office/drawing/2014/main" val="20002"/>
+                    </a:ext>
+                  </a:extLst>
+                </a:gridCol>
+                <a:gridCol w="2294312">
+                  <a:extLst>
+                    <a:ext uri="{9D8B030D-6E8A-4147-A177-3AD203B41FA5}">
+                      <a16:colId xmlns:a16="http://schemas.microsoft.com/office/drawing/2014/main" val="20003"/>
+                    </a:ext>
+                  </a:extLst>
+                </a:gridCol>
               </a:tblGrid>
               <a:tr h="274320">
                 <a:tc>
@@ -5753,6 +6472,11 @@
                     </a:solidFill>
                   </a:tcPr>
                 </a:tc>
+                <a:extLst>
+                  <a:ext uri="{0D108BD9-81ED-4DB2-BD59-A6C34878D82A}">
+                    <a16:rowId xmlns:a16="http://schemas.microsoft.com/office/drawing/2014/main" val="10000"/>
+                  </a:ext>
+                </a:extLst>
               </a:tr>
               <a:tr h="274320">
                 <a:tc>
@@ -5847,6 +6571,11 @@
                     </a:solidFill>
                   </a:tcPr>
                 </a:tc>
+                <a:extLst>
+                  <a:ext uri="{0D108BD9-81ED-4DB2-BD59-A6C34878D82A}">
+                    <a16:rowId xmlns:a16="http://schemas.microsoft.com/office/drawing/2014/main" val="10001"/>
+                  </a:ext>
+                </a:extLst>
               </a:tr>
               <a:tr h="274320">
                 <a:tc>
@@ -5941,6 +6670,11 @@
                     </a:solidFill>
                   </a:tcPr>
                 </a:tc>
+                <a:extLst>
+                  <a:ext uri="{0D108BD9-81ED-4DB2-BD59-A6C34878D82A}">
+                    <a16:rowId xmlns:a16="http://schemas.microsoft.com/office/drawing/2014/main" val="10002"/>
+                  </a:ext>
+                </a:extLst>
               </a:tr>
               <a:tr h="274320">
                 <a:tc>
@@ -6035,6 +6769,11 @@
                     </a:solidFill>
                   </a:tcPr>
                 </a:tc>
+                <a:extLst>
+                  <a:ext uri="{0D108BD9-81ED-4DB2-BD59-A6C34878D82A}">
+                    <a16:rowId xmlns:a16="http://schemas.microsoft.com/office/drawing/2014/main" val="10003"/>
+                  </a:ext>
+                </a:extLst>
               </a:tr>
             </a:tbl>
           </a:graphicData>
@@ -6085,6 +6824,7 @@
           <a:lstStyle/>
           <a:p>
             <a:pPr algn="ctr"/>
+            <a:endParaRPr/>
           </a:p>
         </p:txBody>
       </p:sp>
@@ -6131,15 +6871,12 @@
                 <a:spcPct val="125000"/>
               </a:lnSpc>
             </a:pPr>
-            <a:r>
-              <a:rPr sz="1300" b="0">
-                <a:solidFill>
-                  <a:srgbClr val="3C4947"/>
-                </a:solidFill>
-                <a:latin typeface="맑은 고딕"/>
-              </a:rPr>
-              <a:t/>
-            </a:r>
+            <a:endParaRPr sz="1300" b="1">
+              <a:solidFill>
+                <a:srgbClr val="131A19"/>
+              </a:solidFill>
+              <a:latin typeface="맑은 고딕"/>
+            </a:endParaRPr>
           </a:p>
           <a:p>
             <a:pPr algn="l">
@@ -6184,7 +6921,7 @@
 </file>
 
 <file path=ppt/slides/slide13.xml><?xml version="1.0" encoding="utf-8"?>
-<p:sld xmlns:a="http://schemas.openxmlformats.org/drawingml/2006/main" xmlns:p="http://schemas.openxmlformats.org/presentationml/2006/main" xmlns:r="http://schemas.openxmlformats.org/officeDocument/2006/relationships">
+<p:sld xmlns:a="http://schemas.openxmlformats.org/drawingml/2006/main" xmlns:r="http://schemas.openxmlformats.org/officeDocument/2006/relationships" xmlns:p="http://schemas.openxmlformats.org/presentationml/2006/main">
   <p:cSld>
     <p:bg>
       <p:bgPr>
@@ -6200,7 +6937,14 @@
         <p:cNvGrpSpPr/>
         <p:nvPr/>
       </p:nvGrpSpPr>
-      <p:grpSpPr/>
+      <p:grpSpPr>
+        <a:xfrm>
+          <a:off x="0" y="0"/>
+          <a:ext cx="0" cy="0"/>
+          <a:chOff x="0" y="0"/>
+          <a:chExt cx="0" cy="0"/>
+        </a:xfrm>
+      </p:grpSpPr>
       <p:sp>
         <p:nvSpPr>
           <p:cNvPr id="2" name="TextBox 1"/>
@@ -6359,6 +7103,7 @@
           <a:lstStyle/>
           <a:p>
             <a:pPr algn="ctr"/>
+            <a:endParaRPr/>
           </a:p>
         </p:txBody>
       </p:sp>
@@ -6407,6 +7152,7 @@
           <a:lstStyle/>
           <a:p>
             <a:pPr algn="ctr"/>
+            <a:endParaRPr/>
           </a:p>
         </p:txBody>
       </p:sp>
@@ -6533,6 +7279,7 @@
           <a:lstStyle/>
           <a:p>
             <a:pPr algn="ctr"/>
+            <a:endParaRPr/>
           </a:p>
         </p:txBody>
       </p:sp>
@@ -6660,6 +7407,7 @@
           <a:lstStyle/>
           <a:p>
             <a:pPr algn="ctr"/>
+            <a:endParaRPr/>
           </a:p>
         </p:txBody>
       </p:sp>
@@ -6788,6 +7536,7 @@
           <a:lstStyle/>
           <a:p>
             <a:pPr algn="ctr"/>
+            <a:endParaRPr/>
           </a:p>
         </p:txBody>
       </p:sp>
@@ -6915,6 +7664,7 @@
           <a:lstStyle/>
           <a:p>
             <a:pPr algn="ctr"/>
+            <a:endParaRPr/>
           </a:p>
         </p:txBody>
       </p:sp>
@@ -7015,10 +7765,34 @@
                 <a:tableStyleId>{5C22544A-7EE6-4342-B048-85BDC9FD1C3A}</a:tableStyleId>
               </a:tblPr>
               <a:tblGrid>
-                <a:gridCol w="4572000"/>
-                <a:gridCol w="1828800"/>
-                <a:gridCol w="1645920"/>
-                <a:gridCol w="2468880"/>
+                <a:gridCol w="4572000">
+                  <a:extLst>
+                    <a:ext uri="{9D8B030D-6E8A-4147-A177-3AD203B41FA5}">
+                      <a16:colId xmlns:a16="http://schemas.microsoft.com/office/drawing/2014/main" val="20000"/>
+                    </a:ext>
+                  </a:extLst>
+                </a:gridCol>
+                <a:gridCol w="1828800">
+                  <a:extLst>
+                    <a:ext uri="{9D8B030D-6E8A-4147-A177-3AD203B41FA5}">
+                      <a16:colId xmlns:a16="http://schemas.microsoft.com/office/drawing/2014/main" val="20001"/>
+                    </a:ext>
+                  </a:extLst>
+                </a:gridCol>
+                <a:gridCol w="1645920">
+                  <a:extLst>
+                    <a:ext uri="{9D8B030D-6E8A-4147-A177-3AD203B41FA5}">
+                      <a16:colId xmlns:a16="http://schemas.microsoft.com/office/drawing/2014/main" val="20002"/>
+                    </a:ext>
+                  </a:extLst>
+                </a:gridCol>
+                <a:gridCol w="2468880">
+                  <a:extLst>
+                    <a:ext uri="{9D8B030D-6E8A-4147-A177-3AD203B41FA5}">
+                      <a16:colId xmlns:a16="http://schemas.microsoft.com/office/drawing/2014/main" val="20003"/>
+                    </a:ext>
+                  </a:extLst>
+                </a:gridCol>
               </a:tblGrid>
               <a:tr h="274320">
                 <a:tc>
@@ -7113,6 +7887,11 @@
                     </a:solidFill>
                   </a:tcPr>
                 </a:tc>
+                <a:extLst>
+                  <a:ext uri="{0D108BD9-81ED-4DB2-BD59-A6C34878D82A}">
+                    <a16:rowId xmlns:a16="http://schemas.microsoft.com/office/drawing/2014/main" val="10000"/>
+                  </a:ext>
+                </a:extLst>
               </a:tr>
               <a:tr h="274320">
                 <a:tc>
@@ -7207,6 +7986,11 @@
                     </a:solidFill>
                   </a:tcPr>
                 </a:tc>
+                <a:extLst>
+                  <a:ext uri="{0D108BD9-81ED-4DB2-BD59-A6C34878D82A}">
+                    <a16:rowId xmlns:a16="http://schemas.microsoft.com/office/drawing/2014/main" val="10001"/>
+                  </a:ext>
+                </a:extLst>
               </a:tr>
               <a:tr h="274320">
                 <a:tc>
@@ -7301,6 +8085,11 @@
                     </a:solidFill>
                   </a:tcPr>
                 </a:tc>
+                <a:extLst>
+                  <a:ext uri="{0D108BD9-81ED-4DB2-BD59-A6C34878D82A}">
+                    <a16:rowId xmlns:a16="http://schemas.microsoft.com/office/drawing/2014/main" val="10002"/>
+                  </a:ext>
+                </a:extLst>
               </a:tr>
               <a:tr h="274320">
                 <a:tc>
@@ -7395,6 +8184,11 @@
                     </a:solidFill>
                   </a:tcPr>
                 </a:tc>
+                <a:extLst>
+                  <a:ext uri="{0D108BD9-81ED-4DB2-BD59-A6C34878D82A}">
+                    <a16:rowId xmlns:a16="http://schemas.microsoft.com/office/drawing/2014/main" val="10003"/>
+                  </a:ext>
+                </a:extLst>
               </a:tr>
               <a:tr h="274320">
                 <a:tc>
@@ -7489,6 +8283,11 @@
                     </a:solidFill>
                   </a:tcPr>
                 </a:tc>
+                <a:extLst>
+                  <a:ext uri="{0D108BD9-81ED-4DB2-BD59-A6C34878D82A}">
+                    <a16:rowId xmlns:a16="http://schemas.microsoft.com/office/drawing/2014/main" val="10004"/>
+                  </a:ext>
+                </a:extLst>
               </a:tr>
             </a:tbl>
           </a:graphicData>
@@ -7542,7 +8341,7 @@
 </file>
 
 <file path=ppt/slides/slide14.xml><?xml version="1.0" encoding="utf-8"?>
-<p:sld xmlns:a="http://schemas.openxmlformats.org/drawingml/2006/main" xmlns:p="http://schemas.openxmlformats.org/presentationml/2006/main" xmlns:r="http://schemas.openxmlformats.org/officeDocument/2006/relationships">
+<p:sld xmlns:a="http://schemas.openxmlformats.org/drawingml/2006/main" xmlns:r="http://schemas.openxmlformats.org/officeDocument/2006/relationships" xmlns:p="http://schemas.openxmlformats.org/presentationml/2006/main">
   <p:cSld>
     <p:bg>
       <p:bgPr>
@@ -7558,7 +8357,14 @@
         <p:cNvGrpSpPr/>
         <p:nvPr/>
       </p:nvGrpSpPr>
-      <p:grpSpPr/>
+      <p:grpSpPr>
+        <a:xfrm>
+          <a:off x="0" y="0"/>
+          <a:ext cx="0" cy="0"/>
+          <a:chOff x="0" y="0"/>
+          <a:chExt cx="0" cy="0"/>
+        </a:xfrm>
+      </p:grpSpPr>
       <p:sp>
         <p:nvSpPr>
           <p:cNvPr id="2" name="TextBox 1"/>
@@ -7717,6 +8523,7 @@
           <a:lstStyle/>
           <a:p>
             <a:pPr algn="ctr"/>
+            <a:endParaRPr/>
           </a:p>
         </p:txBody>
       </p:sp>
@@ -7739,9 +8546,27 @@
                 <a:tableStyleId>{5C22544A-7EE6-4342-B048-85BDC9FD1C3A}</a:tableStyleId>
               </a:tblPr>
               <a:tblGrid>
-                <a:gridCol w="3291840"/>
-                <a:gridCol w="1371600"/>
-                <a:gridCol w="6400800"/>
+                <a:gridCol w="3291840">
+                  <a:extLst>
+                    <a:ext uri="{9D8B030D-6E8A-4147-A177-3AD203B41FA5}">
+                      <a16:colId xmlns:a16="http://schemas.microsoft.com/office/drawing/2014/main" val="20000"/>
+                    </a:ext>
+                  </a:extLst>
+                </a:gridCol>
+                <a:gridCol w="1371600">
+                  <a:extLst>
+                    <a:ext uri="{9D8B030D-6E8A-4147-A177-3AD203B41FA5}">
+                      <a16:colId xmlns:a16="http://schemas.microsoft.com/office/drawing/2014/main" val="20001"/>
+                    </a:ext>
+                  </a:extLst>
+                </a:gridCol>
+                <a:gridCol w="6400800">
+                  <a:extLst>
+                    <a:ext uri="{9D8B030D-6E8A-4147-A177-3AD203B41FA5}">
+                      <a16:colId xmlns:a16="http://schemas.microsoft.com/office/drawing/2014/main" val="20002"/>
+                    </a:ext>
+                  </a:extLst>
+                </a:gridCol>
               </a:tblGrid>
               <a:tr h="274320">
                 <a:tc>
@@ -7813,6 +8638,11 @@
                     </a:solidFill>
                   </a:tcPr>
                 </a:tc>
+                <a:extLst>
+                  <a:ext uri="{0D108BD9-81ED-4DB2-BD59-A6C34878D82A}">
+                    <a16:rowId xmlns:a16="http://schemas.microsoft.com/office/drawing/2014/main" val="10000"/>
+                  </a:ext>
+                </a:extLst>
               </a:tr>
               <a:tr h="274320">
                 <a:tc>
@@ -7884,6 +8714,11 @@
                     </a:solidFill>
                   </a:tcPr>
                 </a:tc>
+                <a:extLst>
+                  <a:ext uri="{0D108BD9-81ED-4DB2-BD59-A6C34878D82A}">
+                    <a16:rowId xmlns:a16="http://schemas.microsoft.com/office/drawing/2014/main" val="10001"/>
+                  </a:ext>
+                </a:extLst>
               </a:tr>
               <a:tr h="274320">
                 <a:tc>
@@ -7955,6 +8790,11 @@
                     </a:solidFill>
                   </a:tcPr>
                 </a:tc>
+                <a:extLst>
+                  <a:ext uri="{0D108BD9-81ED-4DB2-BD59-A6C34878D82A}">
+                    <a16:rowId xmlns:a16="http://schemas.microsoft.com/office/drawing/2014/main" val="10002"/>
+                  </a:ext>
+                </a:extLst>
               </a:tr>
               <a:tr h="274320">
                 <a:tc>
@@ -8026,6 +8866,11 @@
                     </a:solidFill>
                   </a:tcPr>
                 </a:tc>
+                <a:extLst>
+                  <a:ext uri="{0D108BD9-81ED-4DB2-BD59-A6C34878D82A}">
+                    <a16:rowId xmlns:a16="http://schemas.microsoft.com/office/drawing/2014/main" val="10003"/>
+                  </a:ext>
+                </a:extLst>
               </a:tr>
               <a:tr h="274320">
                 <a:tc>
@@ -8097,6 +8942,11 @@
                     </a:solidFill>
                   </a:tcPr>
                 </a:tc>
+                <a:extLst>
+                  <a:ext uri="{0D108BD9-81ED-4DB2-BD59-A6C34878D82A}">
+                    <a16:rowId xmlns:a16="http://schemas.microsoft.com/office/drawing/2014/main" val="10004"/>
+                  </a:ext>
+                </a:extLst>
               </a:tr>
               <a:tr h="274320">
                 <a:tc>
@@ -8168,6 +9018,11 @@
                     </a:solidFill>
                   </a:tcPr>
                 </a:tc>
+                <a:extLst>
+                  <a:ext uri="{0D108BD9-81ED-4DB2-BD59-A6C34878D82A}">
+                    <a16:rowId xmlns:a16="http://schemas.microsoft.com/office/drawing/2014/main" val="10005"/>
+                  </a:ext>
+                </a:extLst>
               </a:tr>
               <a:tr h="274320">
                 <a:tc>
@@ -8239,6 +9094,11 @@
                     </a:solidFill>
                   </a:tcPr>
                 </a:tc>
+                <a:extLst>
+                  <a:ext uri="{0D108BD9-81ED-4DB2-BD59-A6C34878D82A}">
+                    <a16:rowId xmlns:a16="http://schemas.microsoft.com/office/drawing/2014/main" val="10006"/>
+                  </a:ext>
+                </a:extLst>
               </a:tr>
               <a:tr h="274320">
                 <a:tc>
@@ -8310,6 +9170,11 @@
                     </a:solidFill>
                   </a:tcPr>
                 </a:tc>
+                <a:extLst>
+                  <a:ext uri="{0D108BD9-81ED-4DB2-BD59-A6C34878D82A}">
+                    <a16:rowId xmlns:a16="http://schemas.microsoft.com/office/drawing/2014/main" val="10007"/>
+                  </a:ext>
+                </a:extLst>
               </a:tr>
               <a:tr h="274320">
                 <a:tc>
@@ -8381,6 +9246,11 @@
                     </a:solidFill>
                   </a:tcPr>
                 </a:tc>
+                <a:extLst>
+                  <a:ext uri="{0D108BD9-81ED-4DB2-BD59-A6C34878D82A}">
+                    <a16:rowId xmlns:a16="http://schemas.microsoft.com/office/drawing/2014/main" val="10008"/>
+                  </a:ext>
+                </a:extLst>
               </a:tr>
               <a:tr h="274320">
                 <a:tc>
@@ -8452,6 +9322,11 @@
                     </a:solidFill>
                   </a:tcPr>
                 </a:tc>
+                <a:extLst>
+                  <a:ext uri="{0D108BD9-81ED-4DB2-BD59-A6C34878D82A}">
+                    <a16:rowId xmlns:a16="http://schemas.microsoft.com/office/drawing/2014/main" val="10009"/>
+                  </a:ext>
+                </a:extLst>
               </a:tr>
               <a:tr h="274320">
                 <a:tc>
@@ -8523,6 +9398,11 @@
                     </a:solidFill>
                   </a:tcPr>
                 </a:tc>
+                <a:extLst>
+                  <a:ext uri="{0D108BD9-81ED-4DB2-BD59-A6C34878D82A}">
+                    <a16:rowId xmlns:a16="http://schemas.microsoft.com/office/drawing/2014/main" val="10010"/>
+                  </a:ext>
+                </a:extLst>
               </a:tr>
               <a:tr h="274320">
                 <a:tc>
@@ -8594,6 +9474,11 @@
                     </a:solidFill>
                   </a:tcPr>
                 </a:tc>
+                <a:extLst>
+                  <a:ext uri="{0D108BD9-81ED-4DB2-BD59-A6C34878D82A}">
+                    <a16:rowId xmlns:a16="http://schemas.microsoft.com/office/drawing/2014/main" val="10011"/>
+                  </a:ext>
+                </a:extLst>
               </a:tr>
               <a:tr h="274320">
                 <a:tc>
@@ -8665,6 +9550,11 @@
                     </a:solidFill>
                   </a:tcPr>
                 </a:tc>
+                <a:extLst>
+                  <a:ext uri="{0D108BD9-81ED-4DB2-BD59-A6C34878D82A}">
+                    <a16:rowId xmlns:a16="http://schemas.microsoft.com/office/drawing/2014/main" val="10012"/>
+                  </a:ext>
+                </a:extLst>
               </a:tr>
               <a:tr h="274320">
                 <a:tc>
@@ -8736,6 +9626,11 @@
                     </a:solidFill>
                   </a:tcPr>
                 </a:tc>
+                <a:extLst>
+                  <a:ext uri="{0D108BD9-81ED-4DB2-BD59-A6C34878D82A}">
+                    <a16:rowId xmlns:a16="http://schemas.microsoft.com/office/drawing/2014/main" val="10013"/>
+                  </a:ext>
+                </a:extLst>
               </a:tr>
             </a:tbl>
           </a:graphicData>
@@ -8789,7 +9684,7 @@
 </file>
 
 <file path=ppt/slides/slide15.xml><?xml version="1.0" encoding="utf-8"?>
-<p:sld xmlns:a="http://schemas.openxmlformats.org/drawingml/2006/main" xmlns:p="http://schemas.openxmlformats.org/presentationml/2006/main" xmlns:r="http://schemas.openxmlformats.org/officeDocument/2006/relationships">
+<p:sld xmlns:a="http://schemas.openxmlformats.org/drawingml/2006/main" xmlns:r="http://schemas.openxmlformats.org/officeDocument/2006/relationships" xmlns:p="http://schemas.openxmlformats.org/presentationml/2006/main">
   <p:cSld>
     <p:bg>
       <p:bgPr>
@@ -8805,7 +9700,14 @@
         <p:cNvGrpSpPr/>
         <p:nvPr/>
       </p:nvGrpSpPr>
-      <p:grpSpPr/>
+      <p:grpSpPr>
+        <a:xfrm>
+          <a:off x="0" y="0"/>
+          <a:ext cx="0" cy="0"/>
+          <a:chOff x="0" y="0"/>
+          <a:chExt cx="0" cy="0"/>
+        </a:xfrm>
+      </p:grpSpPr>
       <p:sp>
         <p:nvSpPr>
           <p:cNvPr id="2" name="TextBox 1"/>
@@ -8964,6 +9866,7 @@
           <a:lstStyle/>
           <a:p>
             <a:pPr algn="ctr"/>
+            <a:endParaRPr/>
           </a:p>
         </p:txBody>
       </p:sp>
@@ -9012,6 +9915,7 @@
           <a:lstStyle/>
           <a:p>
             <a:pPr algn="ctr"/>
+            <a:endParaRPr/>
           </a:p>
         </p:txBody>
       </p:sp>
@@ -9139,6 +10043,7 @@
           <a:lstStyle/>
           <a:p>
             <a:pPr algn="ctr"/>
+            <a:endParaRPr/>
           </a:p>
         </p:txBody>
       </p:sp>
@@ -9265,6 +10170,7 @@
           <a:lstStyle/>
           <a:p>
             <a:pPr algn="ctr"/>
+            <a:endParaRPr/>
           </a:p>
         </p:txBody>
       </p:sp>
@@ -9391,6 +10297,7 @@
           <a:lstStyle/>
           <a:p>
             <a:pPr algn="ctr"/>
+            <a:endParaRPr/>
           </a:p>
         </p:txBody>
       </p:sp>
@@ -9482,7 +10389,7 @@
 </file>
 
 <file path=ppt/slides/slide2.xml><?xml version="1.0" encoding="utf-8"?>
-<p:sld xmlns:a="http://schemas.openxmlformats.org/drawingml/2006/main" xmlns:p="http://schemas.openxmlformats.org/presentationml/2006/main" xmlns:r="http://schemas.openxmlformats.org/officeDocument/2006/relationships">
+<p:sld xmlns:a="http://schemas.openxmlformats.org/drawingml/2006/main" xmlns:r="http://schemas.openxmlformats.org/officeDocument/2006/relationships" xmlns:p="http://schemas.openxmlformats.org/presentationml/2006/main">
   <p:cSld>
     <p:bg>
       <p:bgPr>
@@ -9498,7 +10405,14 @@
         <p:cNvGrpSpPr/>
         <p:nvPr/>
       </p:nvGrpSpPr>
-      <p:grpSpPr/>
+      <p:grpSpPr>
+        <a:xfrm>
+          <a:off x="0" y="0"/>
+          <a:ext cx="0" cy="0"/>
+          <a:chOff x="0" y="0"/>
+          <a:chExt cx="0" cy="0"/>
+        </a:xfrm>
+      </p:grpSpPr>
       <p:sp>
         <p:nvSpPr>
           <p:cNvPr id="2" name="TextBox 1"/>
@@ -9657,6 +10571,7 @@
           <a:lstStyle/>
           <a:p>
             <a:pPr algn="ctr"/>
+            <a:endParaRPr/>
           </a:p>
         </p:txBody>
       </p:sp>
@@ -9670,7 +10585,7 @@
         </p:nvGraphicFramePr>
         <p:xfrm>
           <a:off x="822960" y="1737360"/>
-          <a:ext cx="10515598" cy="1097280"/>
+          <a:ext cx="10515598" cy="1152144"/>
         </p:xfrm>
         <a:graphic>
           <a:graphicData uri="http://schemas.openxmlformats.org/drawingml/2006/table">
@@ -9679,10 +10594,34 @@
                 <a:tableStyleId>{5C22544A-7EE6-4342-B048-85BDC9FD1C3A}</a:tableStyleId>
               </a:tblPr>
               <a:tblGrid>
-                <a:gridCol w="1660357"/>
-                <a:gridCol w="2767263"/>
-                <a:gridCol w="2767263"/>
-                <a:gridCol w="3320715"/>
+                <a:gridCol w="1660357">
+                  <a:extLst>
+                    <a:ext uri="{9D8B030D-6E8A-4147-A177-3AD203B41FA5}">
+                      <a16:colId xmlns:a16="http://schemas.microsoft.com/office/drawing/2014/main" val="20000"/>
+                    </a:ext>
+                  </a:extLst>
+                </a:gridCol>
+                <a:gridCol w="2767263">
+                  <a:extLst>
+                    <a:ext uri="{9D8B030D-6E8A-4147-A177-3AD203B41FA5}">
+                      <a16:colId xmlns:a16="http://schemas.microsoft.com/office/drawing/2014/main" val="20001"/>
+                    </a:ext>
+                  </a:extLst>
+                </a:gridCol>
+                <a:gridCol w="2767263">
+                  <a:extLst>
+                    <a:ext uri="{9D8B030D-6E8A-4147-A177-3AD203B41FA5}">
+                      <a16:colId xmlns:a16="http://schemas.microsoft.com/office/drawing/2014/main" val="20002"/>
+                    </a:ext>
+                  </a:extLst>
+                </a:gridCol>
+                <a:gridCol w="3320715">
+                  <a:extLst>
+                    <a:ext uri="{9D8B030D-6E8A-4147-A177-3AD203B41FA5}">
+                      <a16:colId xmlns:a16="http://schemas.microsoft.com/office/drawing/2014/main" val="20003"/>
+                    </a:ext>
+                  </a:extLst>
+                </a:gridCol>
               </a:tblGrid>
               <a:tr h="274320">
                 <a:tc>
@@ -9691,6 +10630,7 @@
                     <a:lstStyle/>
                     <a:p>
                       <a:pPr algn="l"/>
+                      <a:endParaRPr/>
                     </a:p>
                   </a:txBody>
                   <a:tcPr marL="82296" marR="82296" marT="27432" marB="27432" anchor="ctr">
@@ -9768,6 +10708,11 @@
                     </a:solidFill>
                   </a:tcPr>
                 </a:tc>
+                <a:extLst>
+                  <a:ext uri="{0D108BD9-81ED-4DB2-BD59-A6C34878D82A}">
+                    <a16:rowId xmlns:a16="http://schemas.microsoft.com/office/drawing/2014/main" val="10000"/>
+                  </a:ext>
+                </a:extLst>
               </a:tr>
               <a:tr h="274320">
                 <a:tc>
@@ -9862,6 +10807,11 @@
                     </a:solidFill>
                   </a:tcPr>
                 </a:tc>
+                <a:extLst>
+                  <a:ext uri="{0D108BD9-81ED-4DB2-BD59-A6C34878D82A}">
+                    <a16:rowId xmlns:a16="http://schemas.microsoft.com/office/drawing/2014/main" val="10001"/>
+                  </a:ext>
+                </a:extLst>
               </a:tr>
               <a:tr h="274320">
                 <a:tc>
@@ -9956,6 +10906,11 @@
                     </a:solidFill>
                   </a:tcPr>
                 </a:tc>
+                <a:extLst>
+                  <a:ext uri="{0D108BD9-81ED-4DB2-BD59-A6C34878D82A}">
+                    <a16:rowId xmlns:a16="http://schemas.microsoft.com/office/drawing/2014/main" val="10002"/>
+                  </a:ext>
+                </a:extLst>
               </a:tr>
               <a:tr h="274320">
                 <a:tc>
@@ -10050,6 +11005,11 @@
                     </a:solidFill>
                   </a:tcPr>
                 </a:tc>
+                <a:extLst>
+                  <a:ext uri="{0D108BD9-81ED-4DB2-BD59-A6C34878D82A}">
+                    <a16:rowId xmlns:a16="http://schemas.microsoft.com/office/drawing/2014/main" val="10003"/>
+                  </a:ext>
+                </a:extLst>
               </a:tr>
             </a:tbl>
           </a:graphicData>
@@ -10100,6 +11060,7 @@
           <a:lstStyle/>
           <a:p>
             <a:pPr algn="ctr"/>
+            <a:endParaRPr/>
           </a:p>
         </p:txBody>
       </p:sp>
@@ -10185,15 +11146,12 @@
                 <a:spcPct val="125000"/>
               </a:lnSpc>
             </a:pPr>
-            <a:r>
-              <a:rPr sz="1400" b="0">
-                <a:solidFill>
-                  <a:srgbClr val="3C4947"/>
-                </a:solidFill>
-                <a:latin typeface="맑은 고딕"/>
-              </a:rPr>
-              <a:t/>
-            </a:r>
+            <a:endParaRPr sz="1400" b="0">
+              <a:solidFill>
+                <a:srgbClr val="3C4947"/>
+              </a:solidFill>
+              <a:latin typeface="맑은 고딕"/>
+            </a:endParaRPr>
           </a:p>
           <a:p>
             <a:pPr algn="l">
@@ -10277,7 +11235,7 @@
 </file>
 
 <file path=ppt/slides/slide3.xml><?xml version="1.0" encoding="utf-8"?>
-<p:sld xmlns:a="http://schemas.openxmlformats.org/drawingml/2006/main" xmlns:p="http://schemas.openxmlformats.org/presentationml/2006/main" xmlns:r="http://schemas.openxmlformats.org/officeDocument/2006/relationships">
+<p:sld xmlns:a="http://schemas.openxmlformats.org/drawingml/2006/main" xmlns:r="http://schemas.openxmlformats.org/officeDocument/2006/relationships" xmlns:p="http://schemas.openxmlformats.org/presentationml/2006/main">
   <p:cSld>
     <p:bg>
       <p:bgPr>
@@ -10293,7 +11251,14 @@
         <p:cNvGrpSpPr/>
         <p:nvPr/>
       </p:nvGrpSpPr>
-      <p:grpSpPr/>
+      <p:grpSpPr>
+        <a:xfrm>
+          <a:off x="0" y="0"/>
+          <a:ext cx="0" cy="0"/>
+          <a:chOff x="0" y="0"/>
+          <a:chExt cx="0" cy="0"/>
+        </a:xfrm>
+      </p:grpSpPr>
       <p:sp>
         <p:nvSpPr>
           <p:cNvPr id="2" name="TextBox 1"/>
@@ -10452,6 +11417,7 @@
           <a:lstStyle/>
           <a:p>
             <a:pPr algn="ctr"/>
+            <a:endParaRPr/>
           </a:p>
         </p:txBody>
       </p:sp>
@@ -10500,6 +11466,7 @@
           <a:lstStyle/>
           <a:p>
             <a:pPr algn="ctr"/>
+            <a:endParaRPr/>
           </a:p>
         </p:txBody>
       </p:sp>
@@ -10667,6 +11634,7 @@
           <a:lstStyle/>
           <a:p>
             <a:pPr algn="ctr"/>
+            <a:endParaRPr/>
           </a:p>
         </p:txBody>
       </p:sp>
@@ -10834,6 +11802,7 @@
           <a:lstStyle/>
           <a:p>
             <a:pPr algn="ctr"/>
+            <a:endParaRPr/>
           </a:p>
         </p:txBody>
       </p:sp>
@@ -11004,7 +11973,7 @@
 </file>
 
 <file path=ppt/slides/slide4.xml><?xml version="1.0" encoding="utf-8"?>
-<p:sld xmlns:a="http://schemas.openxmlformats.org/drawingml/2006/main" xmlns:p="http://schemas.openxmlformats.org/presentationml/2006/main" xmlns:r="http://schemas.openxmlformats.org/officeDocument/2006/relationships">
+<p:sld xmlns:a="http://schemas.openxmlformats.org/drawingml/2006/main" xmlns:r="http://schemas.openxmlformats.org/officeDocument/2006/relationships" xmlns:p="http://schemas.openxmlformats.org/presentationml/2006/main">
   <p:cSld>
     <p:bg>
       <p:bgPr>
@@ -11020,7 +11989,14 @@
         <p:cNvGrpSpPr/>
         <p:nvPr/>
       </p:nvGrpSpPr>
-      <p:grpSpPr/>
+      <p:grpSpPr>
+        <a:xfrm>
+          <a:off x="0" y="0"/>
+          <a:ext cx="0" cy="0"/>
+          <a:chOff x="0" y="0"/>
+          <a:chExt cx="0" cy="0"/>
+        </a:xfrm>
+      </p:grpSpPr>
       <p:sp>
         <p:nvSpPr>
           <p:cNvPr id="2" name="TextBox 1"/>
@@ -11179,6 +12155,7 @@
           <a:lstStyle/>
           <a:p>
             <a:pPr algn="ctr"/>
+            <a:endParaRPr/>
           </a:p>
         </p:txBody>
       </p:sp>
@@ -11201,9 +12178,27 @@
                 <a:tableStyleId>{5C22544A-7EE6-4342-B048-85BDC9FD1C3A}</a:tableStyleId>
               </a:tblPr>
               <a:tblGrid>
-                <a:gridCol w="5615126"/>
-                <a:gridCol w="1633491"/>
-                <a:gridCol w="3266982"/>
+                <a:gridCol w="5615126">
+                  <a:extLst>
+                    <a:ext uri="{9D8B030D-6E8A-4147-A177-3AD203B41FA5}">
+                      <a16:colId xmlns:a16="http://schemas.microsoft.com/office/drawing/2014/main" val="20000"/>
+                    </a:ext>
+                  </a:extLst>
+                </a:gridCol>
+                <a:gridCol w="1633491">
+                  <a:extLst>
+                    <a:ext uri="{9D8B030D-6E8A-4147-A177-3AD203B41FA5}">
+                      <a16:colId xmlns:a16="http://schemas.microsoft.com/office/drawing/2014/main" val="20001"/>
+                    </a:ext>
+                  </a:extLst>
+                </a:gridCol>
+                <a:gridCol w="3266982">
+                  <a:extLst>
+                    <a:ext uri="{9D8B030D-6E8A-4147-A177-3AD203B41FA5}">
+                      <a16:colId xmlns:a16="http://schemas.microsoft.com/office/drawing/2014/main" val="20002"/>
+                    </a:ext>
+                  </a:extLst>
+                </a:gridCol>
               </a:tblGrid>
               <a:tr h="274320">
                 <a:tc>
@@ -11275,6 +12270,11 @@
                     </a:solidFill>
                   </a:tcPr>
                 </a:tc>
+                <a:extLst>
+                  <a:ext uri="{0D108BD9-81ED-4DB2-BD59-A6C34878D82A}">
+                    <a16:rowId xmlns:a16="http://schemas.microsoft.com/office/drawing/2014/main" val="10000"/>
+                  </a:ext>
+                </a:extLst>
               </a:tr>
               <a:tr h="274320">
                 <a:tc>
@@ -11346,6 +12346,11 @@
                     </a:solidFill>
                   </a:tcPr>
                 </a:tc>
+                <a:extLst>
+                  <a:ext uri="{0D108BD9-81ED-4DB2-BD59-A6C34878D82A}">
+                    <a16:rowId xmlns:a16="http://schemas.microsoft.com/office/drawing/2014/main" val="10001"/>
+                  </a:ext>
+                </a:extLst>
               </a:tr>
               <a:tr h="274320">
                 <a:tc>
@@ -11417,6 +12422,11 @@
                     </a:solidFill>
                   </a:tcPr>
                 </a:tc>
+                <a:extLst>
+                  <a:ext uri="{0D108BD9-81ED-4DB2-BD59-A6C34878D82A}">
+                    <a16:rowId xmlns:a16="http://schemas.microsoft.com/office/drawing/2014/main" val="10002"/>
+                  </a:ext>
+                </a:extLst>
               </a:tr>
               <a:tr h="274320">
                 <a:tc>
@@ -11488,6 +12498,11 @@
                     </a:solidFill>
                   </a:tcPr>
                 </a:tc>
+                <a:extLst>
+                  <a:ext uri="{0D108BD9-81ED-4DB2-BD59-A6C34878D82A}">
+                    <a16:rowId xmlns:a16="http://schemas.microsoft.com/office/drawing/2014/main" val="10003"/>
+                  </a:ext>
+                </a:extLst>
               </a:tr>
               <a:tr h="274320">
                 <a:tc>
@@ -11559,6 +12574,11 @@
                     </a:solidFill>
                   </a:tcPr>
                 </a:tc>
+                <a:extLst>
+                  <a:ext uri="{0D108BD9-81ED-4DB2-BD59-A6C34878D82A}">
+                    <a16:rowId xmlns:a16="http://schemas.microsoft.com/office/drawing/2014/main" val="10004"/>
+                  </a:ext>
+                </a:extLst>
               </a:tr>
               <a:tr h="274320">
                 <a:tc>
@@ -11630,6 +12650,11 @@
                     </a:solidFill>
                   </a:tcPr>
                 </a:tc>
+                <a:extLst>
+                  <a:ext uri="{0D108BD9-81ED-4DB2-BD59-A6C34878D82A}">
+                    <a16:rowId xmlns:a16="http://schemas.microsoft.com/office/drawing/2014/main" val="10005"/>
+                  </a:ext>
+                </a:extLst>
               </a:tr>
               <a:tr h="274320">
                 <a:tc>
@@ -11701,6 +12726,11 @@
                     </a:solidFill>
                   </a:tcPr>
                 </a:tc>
+                <a:extLst>
+                  <a:ext uri="{0D108BD9-81ED-4DB2-BD59-A6C34878D82A}">
+                    <a16:rowId xmlns:a16="http://schemas.microsoft.com/office/drawing/2014/main" val="10006"/>
+                  </a:ext>
+                </a:extLst>
               </a:tr>
             </a:tbl>
           </a:graphicData>
@@ -11751,6 +12781,7 @@
           <a:lstStyle/>
           <a:p>
             <a:pPr algn="ctr"/>
+            <a:endParaRPr/>
           </a:p>
         </p:txBody>
       </p:sp>
@@ -11834,7 +12865,7 @@
 </file>
 
 <file path=ppt/slides/slide5.xml><?xml version="1.0" encoding="utf-8"?>
-<p:sld xmlns:a="http://schemas.openxmlformats.org/drawingml/2006/main" xmlns:p="http://schemas.openxmlformats.org/presentationml/2006/main" xmlns:r="http://schemas.openxmlformats.org/officeDocument/2006/relationships">
+<p:sld xmlns:a="http://schemas.openxmlformats.org/drawingml/2006/main" xmlns:r="http://schemas.openxmlformats.org/officeDocument/2006/relationships" xmlns:p="http://schemas.openxmlformats.org/presentationml/2006/main">
   <p:cSld>
     <p:bg>
       <p:bgPr>
@@ -11850,7 +12881,14 @@
         <p:cNvGrpSpPr/>
         <p:nvPr/>
       </p:nvGrpSpPr>
-      <p:grpSpPr/>
+      <p:grpSpPr>
+        <a:xfrm>
+          <a:off x="0" y="0"/>
+          <a:ext cx="0" cy="0"/>
+          <a:chOff x="0" y="0"/>
+          <a:chExt cx="0" cy="0"/>
+        </a:xfrm>
+      </p:grpSpPr>
       <p:sp>
         <p:nvSpPr>
           <p:cNvPr id="2" name="TextBox 1"/>
@@ -12009,6 +13047,7 @@
           <a:lstStyle/>
           <a:p>
             <a:pPr algn="ctr"/>
+            <a:endParaRPr/>
           </a:p>
         </p:txBody>
       </p:sp>
@@ -12057,6 +13096,7 @@
           <a:lstStyle/>
           <a:p>
             <a:pPr algn="ctr"/>
+            <a:endParaRPr/>
           </a:p>
         </p:txBody>
       </p:sp>
@@ -12179,6 +13219,7 @@
           <a:lstStyle/>
           <a:p>
             <a:pPr algn="ctr"/>
+            <a:endParaRPr/>
           </a:p>
         </p:txBody>
       </p:sp>
@@ -12227,6 +13268,7 @@
           <a:lstStyle/>
           <a:p>
             <a:pPr algn="ctr"/>
+            <a:endParaRPr/>
           </a:p>
         </p:txBody>
       </p:sp>
@@ -12350,6 +13392,7 @@
           <a:lstStyle/>
           <a:p>
             <a:pPr algn="ctr"/>
+            <a:endParaRPr/>
           </a:p>
         </p:txBody>
       </p:sp>
@@ -12398,6 +13441,7 @@
           <a:lstStyle/>
           <a:p>
             <a:pPr algn="ctr"/>
+            <a:endParaRPr/>
           </a:p>
         </p:txBody>
       </p:sp>
@@ -12522,6 +13566,7 @@
           <a:lstStyle/>
           <a:p>
             <a:pPr algn="ctr"/>
+            <a:endParaRPr/>
           </a:p>
         </p:txBody>
       </p:sp>
@@ -12570,6 +13615,7 @@
           <a:lstStyle/>
           <a:p>
             <a:pPr algn="ctr"/>
+            <a:endParaRPr/>
           </a:p>
         </p:txBody>
       </p:sp>
@@ -12693,6 +13739,7 @@
           <a:lstStyle/>
           <a:p>
             <a:pPr algn="ctr"/>
+            <a:endParaRPr/>
           </a:p>
         </p:txBody>
       </p:sp>
@@ -12741,6 +13788,7 @@
           <a:lstStyle/>
           <a:p>
             <a:pPr algn="ctr"/>
+            <a:endParaRPr/>
           </a:p>
         </p:txBody>
       </p:sp>
@@ -12906,6 +13954,7 @@
           <a:lstStyle/>
           <a:p>
             <a:pPr algn="ctr"/>
+            <a:endParaRPr/>
           </a:p>
         </p:txBody>
       </p:sp>
@@ -12989,7 +14038,7 @@
 </file>
 
 <file path=ppt/slides/slide6.xml><?xml version="1.0" encoding="utf-8"?>
-<p:sld xmlns:a="http://schemas.openxmlformats.org/drawingml/2006/main" xmlns:p="http://schemas.openxmlformats.org/presentationml/2006/main" xmlns:r="http://schemas.openxmlformats.org/officeDocument/2006/relationships">
+<p:sld xmlns:a="http://schemas.openxmlformats.org/drawingml/2006/main" xmlns:r="http://schemas.openxmlformats.org/officeDocument/2006/relationships" xmlns:p="http://schemas.openxmlformats.org/presentationml/2006/main">
   <p:cSld>
     <p:bg>
       <p:bgPr>
@@ -13005,7 +14054,14 @@
         <p:cNvGrpSpPr/>
         <p:nvPr/>
       </p:nvGrpSpPr>
-      <p:grpSpPr/>
+      <p:grpSpPr>
+        <a:xfrm>
+          <a:off x="0" y="0"/>
+          <a:ext cx="0" cy="0"/>
+          <a:chOff x="0" y="0"/>
+          <a:chExt cx="0" cy="0"/>
+        </a:xfrm>
+      </p:grpSpPr>
       <p:sp>
         <p:nvSpPr>
           <p:cNvPr id="2" name="TextBox 1"/>
@@ -13164,6 +14220,7 @@
           <a:lstStyle/>
           <a:p>
             <a:pPr algn="ctr"/>
+            <a:endParaRPr/>
           </a:p>
         </p:txBody>
       </p:sp>
@@ -13251,6 +14308,7 @@
           <a:lstStyle/>
           <a:p>
             <a:pPr algn="ctr"/>
+            <a:endParaRPr/>
           </a:p>
         </p:txBody>
       </p:sp>
@@ -13312,10 +14370,34 @@
                 <a:tableStyleId>{5C22544A-7EE6-4342-B048-85BDC9FD1C3A}</a:tableStyleId>
               </a:tblPr>
               <a:tblGrid>
-                <a:gridCol w="3310466"/>
-                <a:gridCol w="2336800"/>
-                <a:gridCol w="2531533"/>
-                <a:gridCol w="2336800"/>
+                <a:gridCol w="3310466">
+                  <a:extLst>
+                    <a:ext uri="{9D8B030D-6E8A-4147-A177-3AD203B41FA5}">
+                      <a16:colId xmlns:a16="http://schemas.microsoft.com/office/drawing/2014/main" val="20000"/>
+                    </a:ext>
+                  </a:extLst>
+                </a:gridCol>
+                <a:gridCol w="2336800">
+                  <a:extLst>
+                    <a:ext uri="{9D8B030D-6E8A-4147-A177-3AD203B41FA5}">
+                      <a16:colId xmlns:a16="http://schemas.microsoft.com/office/drawing/2014/main" val="20001"/>
+                    </a:ext>
+                  </a:extLst>
+                </a:gridCol>
+                <a:gridCol w="2531533">
+                  <a:extLst>
+                    <a:ext uri="{9D8B030D-6E8A-4147-A177-3AD203B41FA5}">
+                      <a16:colId xmlns:a16="http://schemas.microsoft.com/office/drawing/2014/main" val="20002"/>
+                    </a:ext>
+                  </a:extLst>
+                </a:gridCol>
+                <a:gridCol w="2336800">
+                  <a:extLst>
+                    <a:ext uri="{9D8B030D-6E8A-4147-A177-3AD203B41FA5}">
+                      <a16:colId xmlns:a16="http://schemas.microsoft.com/office/drawing/2014/main" val="20003"/>
+                    </a:ext>
+                  </a:extLst>
+                </a:gridCol>
               </a:tblGrid>
               <a:tr h="274320">
                 <a:tc>
@@ -13410,6 +14492,11 @@
                     </a:solidFill>
                   </a:tcPr>
                 </a:tc>
+                <a:extLst>
+                  <a:ext uri="{0D108BD9-81ED-4DB2-BD59-A6C34878D82A}">
+                    <a16:rowId xmlns:a16="http://schemas.microsoft.com/office/drawing/2014/main" val="10000"/>
+                  </a:ext>
+                </a:extLst>
               </a:tr>
               <a:tr h="274320">
                 <a:tc>
@@ -13504,6 +14591,11 @@
                     </a:solidFill>
                   </a:tcPr>
                 </a:tc>
+                <a:extLst>
+                  <a:ext uri="{0D108BD9-81ED-4DB2-BD59-A6C34878D82A}">
+                    <a16:rowId xmlns:a16="http://schemas.microsoft.com/office/drawing/2014/main" val="10001"/>
+                  </a:ext>
+                </a:extLst>
               </a:tr>
               <a:tr h="274320">
                 <a:tc>
@@ -13598,6 +14690,11 @@
                     </a:solidFill>
                   </a:tcPr>
                 </a:tc>
+                <a:extLst>
+                  <a:ext uri="{0D108BD9-81ED-4DB2-BD59-A6C34878D82A}">
+                    <a16:rowId xmlns:a16="http://schemas.microsoft.com/office/drawing/2014/main" val="10002"/>
+                  </a:ext>
+                </a:extLst>
               </a:tr>
               <a:tr h="274320">
                 <a:tc>
@@ -13692,6 +14789,11 @@
                     </a:solidFill>
                   </a:tcPr>
                 </a:tc>
+                <a:extLst>
+                  <a:ext uri="{0D108BD9-81ED-4DB2-BD59-A6C34878D82A}">
+                    <a16:rowId xmlns:a16="http://schemas.microsoft.com/office/drawing/2014/main" val="10003"/>
+                  </a:ext>
+                </a:extLst>
               </a:tr>
             </a:tbl>
           </a:graphicData>
@@ -13742,6 +14844,7 @@
           <a:lstStyle/>
           <a:p>
             <a:pPr algn="ctr"/>
+            <a:endParaRPr/>
           </a:p>
         </p:txBody>
       </p:sp>
@@ -13825,7 +14928,7 @@
 </file>
 
 <file path=ppt/slides/slide7.xml><?xml version="1.0" encoding="utf-8"?>
-<p:sld xmlns:a="http://schemas.openxmlformats.org/drawingml/2006/main" xmlns:p="http://schemas.openxmlformats.org/presentationml/2006/main" xmlns:r="http://schemas.openxmlformats.org/officeDocument/2006/relationships">
+<p:sld xmlns:a="http://schemas.openxmlformats.org/drawingml/2006/main" xmlns:r="http://schemas.openxmlformats.org/officeDocument/2006/relationships" xmlns:p="http://schemas.openxmlformats.org/presentationml/2006/main">
   <p:cSld>
     <p:bg>
       <p:bgPr>
@@ -13841,7 +14944,14 @@
         <p:cNvGrpSpPr/>
         <p:nvPr/>
       </p:nvGrpSpPr>
-      <p:grpSpPr/>
+      <p:grpSpPr>
+        <a:xfrm>
+          <a:off x="0" y="0"/>
+          <a:ext cx="0" cy="0"/>
+          <a:chOff x="0" y="0"/>
+          <a:chExt cx="0" cy="0"/>
+        </a:xfrm>
+      </p:grpSpPr>
       <p:sp>
         <p:nvSpPr>
           <p:cNvPr id="2" name="TextBox 1"/>
@@ -14000,6 +15110,7 @@
           <a:lstStyle/>
           <a:p>
             <a:pPr algn="ctr"/>
+            <a:endParaRPr/>
           </a:p>
         </p:txBody>
       </p:sp>
@@ -14084,7 +15195,7 @@
         </p:nvGraphicFramePr>
         <p:xfrm>
           <a:off x="822960" y="2743200"/>
-          <a:ext cx="5852160" cy="1371600"/>
+          <a:ext cx="5852160" cy="1426464"/>
         </p:xfrm>
         <a:graphic>
           <a:graphicData uri="http://schemas.openxmlformats.org/drawingml/2006/table">
@@ -14093,8 +15204,20 @@
                 <a:tableStyleId>{5C22544A-7EE6-4342-B048-85BDC9FD1C3A}</a:tableStyleId>
               </a:tblPr>
               <a:tblGrid>
-                <a:gridCol w="2926080"/>
-                <a:gridCol w="2926080"/>
+                <a:gridCol w="2926080">
+                  <a:extLst>
+                    <a:ext uri="{9D8B030D-6E8A-4147-A177-3AD203B41FA5}">
+                      <a16:colId xmlns:a16="http://schemas.microsoft.com/office/drawing/2014/main" val="20000"/>
+                    </a:ext>
+                  </a:extLst>
+                </a:gridCol>
+                <a:gridCol w="2926080">
+                  <a:extLst>
+                    <a:ext uri="{9D8B030D-6E8A-4147-A177-3AD203B41FA5}">
+                      <a16:colId xmlns:a16="http://schemas.microsoft.com/office/drawing/2014/main" val="20001"/>
+                    </a:ext>
+                  </a:extLst>
+                </a:gridCol>
               </a:tblGrid>
               <a:tr h="274320">
                 <a:tc>
@@ -14103,6 +15226,7 @@
                     <a:lstStyle/>
                     <a:p>
                       <a:pPr algn="l"/>
+                      <a:endParaRPr/>
                     </a:p>
                   </a:txBody>
                   <a:tcPr marL="82296" marR="82296" marT="27432" marB="27432" anchor="ctr">
@@ -14134,6 +15258,11 @@
                     </a:solidFill>
                   </a:tcPr>
                 </a:tc>
+                <a:extLst>
+                  <a:ext uri="{0D108BD9-81ED-4DB2-BD59-A6C34878D82A}">
+                    <a16:rowId xmlns:a16="http://schemas.microsoft.com/office/drawing/2014/main" val="10000"/>
+                  </a:ext>
+                </a:extLst>
               </a:tr>
               <a:tr h="274320">
                 <a:tc>
@@ -14182,6 +15311,11 @@
                     </a:solidFill>
                   </a:tcPr>
                 </a:tc>
+                <a:extLst>
+                  <a:ext uri="{0D108BD9-81ED-4DB2-BD59-A6C34878D82A}">
+                    <a16:rowId xmlns:a16="http://schemas.microsoft.com/office/drawing/2014/main" val="10001"/>
+                  </a:ext>
+                </a:extLst>
               </a:tr>
               <a:tr h="274320">
                 <a:tc>
@@ -14230,6 +15364,11 @@
                     </a:solidFill>
                   </a:tcPr>
                 </a:tc>
+                <a:extLst>
+                  <a:ext uri="{0D108BD9-81ED-4DB2-BD59-A6C34878D82A}">
+                    <a16:rowId xmlns:a16="http://schemas.microsoft.com/office/drawing/2014/main" val="10002"/>
+                  </a:ext>
+                </a:extLst>
               </a:tr>
               <a:tr h="274320">
                 <a:tc>
@@ -14278,6 +15417,11 @@
                     </a:solidFill>
                   </a:tcPr>
                 </a:tc>
+                <a:extLst>
+                  <a:ext uri="{0D108BD9-81ED-4DB2-BD59-A6C34878D82A}">
+                    <a16:rowId xmlns:a16="http://schemas.microsoft.com/office/drawing/2014/main" val="10003"/>
+                  </a:ext>
+                </a:extLst>
               </a:tr>
               <a:tr h="274320">
                 <a:tc>
@@ -14326,6 +15470,11 @@
                     </a:solidFill>
                   </a:tcPr>
                 </a:tc>
+                <a:extLst>
+                  <a:ext uri="{0D108BD9-81ED-4DB2-BD59-A6C34878D82A}">
+                    <a16:rowId xmlns:a16="http://schemas.microsoft.com/office/drawing/2014/main" val="10004"/>
+                  </a:ext>
+                </a:extLst>
               </a:tr>
             </a:tbl>
           </a:graphicData>
@@ -14376,6 +15525,7 @@
           <a:lstStyle/>
           <a:p>
             <a:pPr algn="ctr"/>
+            <a:endParaRPr/>
           </a:p>
         </p:txBody>
       </p:sp>
@@ -14438,15 +15588,12 @@
                 <a:spcPct val="125000"/>
               </a:lnSpc>
             </a:pPr>
-            <a:r>
-              <a:rPr sz="1300" b="0">
-                <a:solidFill>
-                  <a:srgbClr val="3C4947"/>
-                </a:solidFill>
-                <a:latin typeface="맑은 고딕"/>
-              </a:rPr>
-              <a:t/>
-            </a:r>
+            <a:endParaRPr sz="1300" b="1">
+              <a:solidFill>
+                <a:srgbClr val="131A19"/>
+              </a:solidFill>
+              <a:latin typeface="맑은 고딕"/>
+            </a:endParaRPr>
           </a:p>
           <a:p>
             <a:pPr algn="l">
@@ -14511,6 +15658,7 @@
           <a:lstStyle/>
           <a:p>
             <a:pPr algn="ctr"/>
+            <a:endParaRPr/>
           </a:p>
         </p:txBody>
       </p:sp>
@@ -14578,7 +15726,7 @@
 </file>
 
 <file path=ppt/slides/slide8.xml><?xml version="1.0" encoding="utf-8"?>
-<p:sld xmlns:a="http://schemas.openxmlformats.org/drawingml/2006/main" xmlns:p="http://schemas.openxmlformats.org/presentationml/2006/main" xmlns:r="http://schemas.openxmlformats.org/officeDocument/2006/relationships">
+<p:sld xmlns:a="http://schemas.openxmlformats.org/drawingml/2006/main" xmlns:r="http://schemas.openxmlformats.org/officeDocument/2006/relationships" xmlns:p="http://schemas.openxmlformats.org/presentationml/2006/main">
   <p:cSld>
     <p:bg>
       <p:bgPr>
@@ -14594,7 +15742,14 @@
         <p:cNvGrpSpPr/>
         <p:nvPr/>
       </p:nvGrpSpPr>
-      <p:grpSpPr/>
+      <p:grpSpPr>
+        <a:xfrm>
+          <a:off x="0" y="0"/>
+          <a:ext cx="0" cy="0"/>
+          <a:chOff x="0" y="0"/>
+          <a:chExt cx="0" cy="0"/>
+        </a:xfrm>
+      </p:grpSpPr>
       <p:sp>
         <p:nvSpPr>
           <p:cNvPr id="2" name="TextBox 1"/>
@@ -14753,6 +15908,7 @@
           <a:lstStyle/>
           <a:p>
             <a:pPr algn="ctr"/>
+            <a:endParaRPr/>
           </a:p>
         </p:txBody>
       </p:sp>
@@ -14828,7 +15984,7 @@
 </file>
 
 <file path=ppt/slides/slide9.xml><?xml version="1.0" encoding="utf-8"?>
-<p:sld xmlns:a="http://schemas.openxmlformats.org/drawingml/2006/main" xmlns:p="http://schemas.openxmlformats.org/presentationml/2006/main" xmlns:r="http://schemas.openxmlformats.org/officeDocument/2006/relationships">
+<p:sld xmlns:a="http://schemas.openxmlformats.org/drawingml/2006/main" xmlns:r="http://schemas.openxmlformats.org/officeDocument/2006/relationships" xmlns:p="http://schemas.openxmlformats.org/presentationml/2006/main">
   <p:cSld>
     <p:bg>
       <p:bgPr>
@@ -14844,7 +16000,14 @@
         <p:cNvGrpSpPr/>
         <p:nvPr/>
       </p:nvGrpSpPr>
-      <p:grpSpPr/>
+      <p:grpSpPr>
+        <a:xfrm>
+          <a:off x="0" y="0"/>
+          <a:ext cx="0" cy="0"/>
+          <a:chOff x="0" y="0"/>
+          <a:chExt cx="0" cy="0"/>
+        </a:xfrm>
+      </p:grpSpPr>
       <p:sp>
         <p:nvSpPr>
           <p:cNvPr id="2" name="TextBox 1"/>
@@ -14964,6 +16127,7 @@
           <a:lstStyle/>
           <a:p>
             <a:pPr algn="ctr"/>
+            <a:endParaRPr/>
           </a:p>
         </p:txBody>
       </p:sp>
